--- a/2026/ciclo 1/TP558_X_Template (1).pptx
+++ b/2026/ciclo 1/TP558_X_Template (1).pptx
@@ -5,23 +5,45 @@
     <p:sldMasterId id="2147483648" r:id="rId1"/>
   </p:sldMasterIdLst>
   <p:notesMasterIdLst>
-    <p:notesMasterId r:id="rId13"/>
+    <p:notesMasterId r:id="rId35"/>
   </p:notesMasterIdLst>
   <p:handoutMasterIdLst>
-    <p:handoutMasterId r:id="rId14"/>
+    <p:handoutMasterId r:id="rId36"/>
   </p:handoutMasterIdLst>
   <p:sldIdLst>
     <p:sldId id="256" r:id="rId2"/>
     <p:sldId id="307" r:id="rId3"/>
-    <p:sldId id="315" r:id="rId4"/>
-    <p:sldId id="308" r:id="rId5"/>
-    <p:sldId id="309" r:id="rId6"/>
-    <p:sldId id="310" r:id="rId7"/>
-    <p:sldId id="311" r:id="rId8"/>
-    <p:sldId id="312" r:id="rId9"/>
-    <p:sldId id="293" r:id="rId10"/>
-    <p:sldId id="314" r:id="rId11"/>
-    <p:sldId id="306" r:id="rId12"/>
+    <p:sldId id="318" r:id="rId4"/>
+    <p:sldId id="319" r:id="rId5"/>
+    <p:sldId id="321" r:id="rId6"/>
+    <p:sldId id="323" r:id="rId7"/>
+    <p:sldId id="322" r:id="rId8"/>
+    <p:sldId id="315" r:id="rId9"/>
+    <p:sldId id="308" r:id="rId10"/>
+    <p:sldId id="325" r:id="rId11"/>
+    <p:sldId id="335" r:id="rId12"/>
+    <p:sldId id="333" r:id="rId13"/>
+    <p:sldId id="334" r:id="rId14"/>
+    <p:sldId id="324" r:id="rId15"/>
+    <p:sldId id="330" r:id="rId16"/>
+    <p:sldId id="309" r:id="rId17"/>
+    <p:sldId id="328" r:id="rId18"/>
+    <p:sldId id="326" r:id="rId19"/>
+    <p:sldId id="310" r:id="rId20"/>
+    <p:sldId id="329" r:id="rId21"/>
+    <p:sldId id="336" r:id="rId22"/>
+    <p:sldId id="331" r:id="rId23"/>
+    <p:sldId id="337" r:id="rId24"/>
+    <p:sldId id="339" r:id="rId25"/>
+    <p:sldId id="340" r:id="rId26"/>
+    <p:sldId id="342" r:id="rId27"/>
+    <p:sldId id="341" r:id="rId28"/>
+    <p:sldId id="327" r:id="rId29"/>
+    <p:sldId id="311" r:id="rId30"/>
+    <p:sldId id="312" r:id="rId31"/>
+    <p:sldId id="293" r:id="rId32"/>
+    <p:sldId id="314" r:id="rId33"/>
+    <p:sldId id="306" r:id="rId34"/>
   </p:sldIdLst>
   <p:sldSz cx="12192000" cy="6858000"/>
   <p:notesSz cx="7315200" cy="9601200"/>
@@ -285,7 +307,7 @@
           <a:p>
             <a:fld id="{144F1436-6906-4D93-B7A2-786C327BFA14}" type="datetimeFigureOut">
               <a:rPr lang="nl-BE" smtClean="0"/>
-              <a:t>1/03/2026</a:t>
+              <a:t>13/03/2026</a:t>
             </a:fld>
             <a:endParaRPr lang="nl-BE"/>
           </a:p>
@@ -351,7 +373,7 @@
           <a:p>
             <a:fld id="{F7E56D9B-79AD-444A-AFED-DEC23408F8B4}" type="slidenum">
               <a:rPr lang="nl-BE" smtClean="0"/>
-              <a:t>‹#›</a:t>
+              <a:t>‹nº›</a:t>
             </a:fld>
             <a:endParaRPr lang="nl-BE"/>
           </a:p>
@@ -450,7 +472,7 @@
           <a:p>
             <a:fld id="{AA8CD09E-2914-4F47-B6C1-51B2C31814C9}" type="datetimeFigureOut">
               <a:rPr lang="pt-BR" smtClean="0"/>
-              <a:t>01/03/2026</a:t>
+              <a:t>13/03/2026</a:t>
             </a:fld>
             <a:endParaRPr lang="pt-BR"/>
           </a:p>
@@ -608,7 +630,7 @@
           <a:p>
             <a:fld id="{6FC8D850-966F-45A6-8DE7-15B891E7D40D}" type="slidenum">
               <a:rPr lang="pt-BR" smtClean="0"/>
-              <a:t>‹#›</a:t>
+              <a:t>‹nº›</a:t>
             </a:fld>
             <a:endParaRPr lang="pt-BR"/>
           </a:p>
@@ -801,6 +823,594 @@
 </p:notes>
 </file>
 
+<file path=ppt/notesSlides/notesSlide2.xml><?xml version="1.0" encoding="utf-8"?>
+<p:notes xmlns:a="http://schemas.openxmlformats.org/drawingml/2006/main" xmlns:r="http://schemas.openxmlformats.org/officeDocument/2006/relationships" xmlns:p="http://schemas.openxmlformats.org/presentationml/2006/main">
+  <p:cSld>
+    <p:spTree>
+      <p:nvGrpSpPr>
+        <p:cNvPr id="1" name=""/>
+        <p:cNvGrpSpPr/>
+        <p:nvPr/>
+      </p:nvGrpSpPr>
+      <p:grpSpPr>
+        <a:xfrm>
+          <a:off x="0" y="0"/>
+          <a:ext cx="0" cy="0"/>
+          <a:chOff x="0" y="0"/>
+          <a:chExt cx="0" cy="0"/>
+        </a:xfrm>
+      </p:grpSpPr>
+      <p:sp>
+        <p:nvSpPr>
+          <p:cNvPr id="2" name="Espaço Reservado para Imagem de Slide 1"/>
+          <p:cNvSpPr>
+            <a:spLocks noGrp="1" noRot="1" noChangeAspect="1"/>
+          </p:cNvSpPr>
+          <p:nvPr>
+            <p:ph type="sldImg"/>
+          </p:nvPr>
+        </p:nvSpPr>
+        <p:spPr/>
+      </p:sp>
+      <p:sp>
+        <p:nvSpPr>
+          <p:cNvPr id="3" name="Espaço Reservado para Anotações 2"/>
+          <p:cNvSpPr>
+            <a:spLocks noGrp="1"/>
+          </p:cNvSpPr>
+          <p:nvPr>
+            <p:ph type="body" idx="1"/>
+          </p:nvPr>
+        </p:nvSpPr>
+        <p:spPr/>
+        <p:txBody>
+          <a:bodyPr/>
+          <a:lstStyle/>
+          <a:p>
+            <a:endParaRPr lang="pt-BR" dirty="0"/>
+          </a:p>
+        </p:txBody>
+      </p:sp>
+      <p:sp>
+        <p:nvSpPr>
+          <p:cNvPr id="4" name="Espaço Reservado para Número de Slide 3"/>
+          <p:cNvSpPr>
+            <a:spLocks noGrp="1"/>
+          </p:cNvSpPr>
+          <p:nvPr>
+            <p:ph type="sldNum" sz="quarter" idx="5"/>
+          </p:nvPr>
+        </p:nvSpPr>
+        <p:spPr/>
+        <p:txBody>
+          <a:bodyPr/>
+          <a:lstStyle/>
+          <a:p>
+            <a:fld id="{6FC8D850-966F-45A6-8DE7-15B891E7D40D}" type="slidenum">
+              <a:rPr lang="pt-BR" smtClean="0"/>
+              <a:t>2</a:t>
+            </a:fld>
+            <a:endParaRPr lang="pt-BR"/>
+          </a:p>
+        </p:txBody>
+      </p:sp>
+    </p:spTree>
+    <p:extLst>
+      <p:ext uri="{BB962C8B-B14F-4D97-AF65-F5344CB8AC3E}">
+        <p14:creationId xmlns:p14="http://schemas.microsoft.com/office/powerpoint/2010/main" val="1719356537"/>
+      </p:ext>
+    </p:extLst>
+  </p:cSld>
+  <p:clrMapOvr>
+    <a:masterClrMapping/>
+  </p:clrMapOvr>
+</p:notes>
+</file>
+
+<file path=ppt/notesSlides/notesSlide3.xml><?xml version="1.0" encoding="utf-8"?>
+<p:notes xmlns:a="http://schemas.openxmlformats.org/drawingml/2006/main" xmlns:r="http://schemas.openxmlformats.org/officeDocument/2006/relationships" xmlns:p="http://schemas.openxmlformats.org/presentationml/2006/main">
+  <p:cSld>
+    <p:spTree>
+      <p:nvGrpSpPr>
+        <p:cNvPr id="1" name=""/>
+        <p:cNvGrpSpPr/>
+        <p:nvPr/>
+      </p:nvGrpSpPr>
+      <p:grpSpPr>
+        <a:xfrm>
+          <a:off x="0" y="0"/>
+          <a:ext cx="0" cy="0"/>
+          <a:chOff x="0" y="0"/>
+          <a:chExt cx="0" cy="0"/>
+        </a:xfrm>
+      </p:grpSpPr>
+      <p:sp>
+        <p:nvSpPr>
+          <p:cNvPr id="2" name="Espaço Reservado para Imagem de Slide 1"/>
+          <p:cNvSpPr>
+            <a:spLocks noGrp="1" noRot="1" noChangeAspect="1"/>
+          </p:cNvSpPr>
+          <p:nvPr>
+            <p:ph type="sldImg"/>
+          </p:nvPr>
+        </p:nvSpPr>
+        <p:spPr/>
+      </p:sp>
+      <p:sp>
+        <p:nvSpPr>
+          <p:cNvPr id="3" name="Espaço Reservado para Anotações 2"/>
+          <p:cNvSpPr>
+            <a:spLocks noGrp="1"/>
+          </p:cNvSpPr>
+          <p:nvPr>
+            <p:ph type="body" idx="1"/>
+          </p:nvPr>
+        </p:nvSpPr>
+        <p:spPr/>
+        <p:txBody>
+          <a:bodyPr/>
+          <a:lstStyle/>
+          <a:p>
+            <a:endParaRPr lang="pt-BR" dirty="0"/>
+          </a:p>
+        </p:txBody>
+      </p:sp>
+      <p:sp>
+        <p:nvSpPr>
+          <p:cNvPr id="4" name="Espaço Reservado para Número de Slide 3"/>
+          <p:cNvSpPr>
+            <a:spLocks noGrp="1"/>
+          </p:cNvSpPr>
+          <p:nvPr>
+            <p:ph type="sldNum" sz="quarter" idx="5"/>
+          </p:nvPr>
+        </p:nvSpPr>
+        <p:spPr/>
+        <p:txBody>
+          <a:bodyPr/>
+          <a:lstStyle/>
+          <a:p>
+            <a:fld id="{6FC8D850-966F-45A6-8DE7-15B891E7D40D}" type="slidenum">
+              <a:rPr lang="pt-BR" smtClean="0"/>
+              <a:t>3</a:t>
+            </a:fld>
+            <a:endParaRPr lang="pt-BR"/>
+          </a:p>
+        </p:txBody>
+      </p:sp>
+    </p:spTree>
+    <p:extLst>
+      <p:ext uri="{BB962C8B-B14F-4D97-AF65-F5344CB8AC3E}">
+        <p14:creationId xmlns:p14="http://schemas.microsoft.com/office/powerpoint/2010/main" val="28551790"/>
+      </p:ext>
+    </p:extLst>
+  </p:cSld>
+  <p:clrMapOvr>
+    <a:masterClrMapping/>
+  </p:clrMapOvr>
+</p:notes>
+</file>
+
+<file path=ppt/notesSlides/notesSlide4.xml><?xml version="1.0" encoding="utf-8"?>
+<p:notes xmlns:a="http://schemas.openxmlformats.org/drawingml/2006/main" xmlns:r="http://schemas.openxmlformats.org/officeDocument/2006/relationships" xmlns:p="http://schemas.openxmlformats.org/presentationml/2006/main">
+  <p:cSld>
+    <p:spTree>
+      <p:nvGrpSpPr>
+        <p:cNvPr id="1" name=""/>
+        <p:cNvGrpSpPr/>
+        <p:nvPr/>
+      </p:nvGrpSpPr>
+      <p:grpSpPr>
+        <a:xfrm>
+          <a:off x="0" y="0"/>
+          <a:ext cx="0" cy="0"/>
+          <a:chOff x="0" y="0"/>
+          <a:chExt cx="0" cy="0"/>
+        </a:xfrm>
+      </p:grpSpPr>
+      <p:sp>
+        <p:nvSpPr>
+          <p:cNvPr id="2" name="Espaço Reservado para Imagem de Slide 1"/>
+          <p:cNvSpPr>
+            <a:spLocks noGrp="1" noRot="1" noChangeAspect="1"/>
+          </p:cNvSpPr>
+          <p:nvPr>
+            <p:ph type="sldImg"/>
+          </p:nvPr>
+        </p:nvSpPr>
+        <p:spPr/>
+      </p:sp>
+      <p:sp>
+        <p:nvSpPr>
+          <p:cNvPr id="3" name="Espaço Reservado para Anotações 2"/>
+          <p:cNvSpPr>
+            <a:spLocks noGrp="1"/>
+          </p:cNvSpPr>
+          <p:nvPr>
+            <p:ph type="body" idx="1"/>
+          </p:nvPr>
+        </p:nvSpPr>
+        <p:spPr/>
+        <p:txBody>
+          <a:bodyPr/>
+          <a:lstStyle/>
+          <a:p>
+            <a:endParaRPr lang="pt-BR" dirty="0"/>
+          </a:p>
+        </p:txBody>
+      </p:sp>
+      <p:sp>
+        <p:nvSpPr>
+          <p:cNvPr id="4" name="Espaço Reservado para Número de Slide 3"/>
+          <p:cNvSpPr>
+            <a:spLocks noGrp="1"/>
+          </p:cNvSpPr>
+          <p:nvPr>
+            <p:ph type="sldNum" sz="quarter" idx="5"/>
+          </p:nvPr>
+        </p:nvSpPr>
+        <p:spPr/>
+        <p:txBody>
+          <a:bodyPr/>
+          <a:lstStyle/>
+          <a:p>
+            <a:fld id="{6FC8D850-966F-45A6-8DE7-15B891E7D40D}" type="slidenum">
+              <a:rPr lang="pt-BR" smtClean="0"/>
+              <a:t>19</a:t>
+            </a:fld>
+            <a:endParaRPr lang="pt-BR"/>
+          </a:p>
+        </p:txBody>
+      </p:sp>
+    </p:spTree>
+    <p:extLst>
+      <p:ext uri="{BB962C8B-B14F-4D97-AF65-F5344CB8AC3E}">
+        <p14:creationId xmlns:p14="http://schemas.microsoft.com/office/powerpoint/2010/main" val="2375980662"/>
+      </p:ext>
+    </p:extLst>
+  </p:cSld>
+  <p:clrMapOvr>
+    <a:masterClrMapping/>
+  </p:clrMapOvr>
+</p:notes>
+</file>
+
+<file path=ppt/notesSlides/notesSlide5.xml><?xml version="1.0" encoding="utf-8"?>
+<p:notes xmlns:a="http://schemas.openxmlformats.org/drawingml/2006/main" xmlns:r="http://schemas.openxmlformats.org/officeDocument/2006/relationships" xmlns:p="http://schemas.openxmlformats.org/presentationml/2006/main">
+  <p:cSld>
+    <p:spTree>
+      <p:nvGrpSpPr>
+        <p:cNvPr id="1" name=""/>
+        <p:cNvGrpSpPr/>
+        <p:nvPr/>
+      </p:nvGrpSpPr>
+      <p:grpSpPr>
+        <a:xfrm>
+          <a:off x="0" y="0"/>
+          <a:ext cx="0" cy="0"/>
+          <a:chOff x="0" y="0"/>
+          <a:chExt cx="0" cy="0"/>
+        </a:xfrm>
+      </p:grpSpPr>
+      <p:sp>
+        <p:nvSpPr>
+          <p:cNvPr id="2" name="Espaço Reservado para Imagem de Slide 1"/>
+          <p:cNvSpPr>
+            <a:spLocks noGrp="1" noRot="1" noChangeAspect="1"/>
+          </p:cNvSpPr>
+          <p:nvPr>
+            <p:ph type="sldImg"/>
+          </p:nvPr>
+        </p:nvSpPr>
+        <p:spPr/>
+      </p:sp>
+      <p:sp>
+        <p:nvSpPr>
+          <p:cNvPr id="3" name="Espaço Reservado para Anotações 2"/>
+          <p:cNvSpPr>
+            <a:spLocks noGrp="1"/>
+          </p:cNvSpPr>
+          <p:nvPr>
+            <p:ph type="body" idx="1"/>
+          </p:nvPr>
+        </p:nvSpPr>
+        <p:spPr/>
+        <p:txBody>
+          <a:bodyPr/>
+          <a:lstStyle/>
+          <a:p>
+            <a:endParaRPr lang="pt-BR" dirty="0"/>
+          </a:p>
+        </p:txBody>
+      </p:sp>
+      <p:sp>
+        <p:nvSpPr>
+          <p:cNvPr id="4" name="Espaço Reservado para Número de Slide 3"/>
+          <p:cNvSpPr>
+            <a:spLocks noGrp="1"/>
+          </p:cNvSpPr>
+          <p:nvPr>
+            <p:ph type="sldNum" sz="quarter" idx="5"/>
+          </p:nvPr>
+        </p:nvSpPr>
+        <p:spPr/>
+        <p:txBody>
+          <a:bodyPr/>
+          <a:lstStyle/>
+          <a:p>
+            <a:fld id="{6FC8D850-966F-45A6-8DE7-15B891E7D40D}" type="slidenum">
+              <a:rPr lang="pt-BR" smtClean="0"/>
+              <a:t>20</a:t>
+            </a:fld>
+            <a:endParaRPr lang="pt-BR"/>
+          </a:p>
+        </p:txBody>
+      </p:sp>
+    </p:spTree>
+    <p:extLst>
+      <p:ext uri="{BB962C8B-B14F-4D97-AF65-F5344CB8AC3E}">
+        <p14:creationId xmlns:p14="http://schemas.microsoft.com/office/powerpoint/2010/main" val="2091225034"/>
+      </p:ext>
+    </p:extLst>
+  </p:cSld>
+  <p:clrMapOvr>
+    <a:masterClrMapping/>
+  </p:clrMapOvr>
+</p:notes>
+</file>
+
+<file path=ppt/notesSlides/notesSlide6.xml><?xml version="1.0" encoding="utf-8"?>
+<p:notes xmlns:a="http://schemas.openxmlformats.org/drawingml/2006/main" xmlns:r="http://schemas.openxmlformats.org/officeDocument/2006/relationships" xmlns:p="http://schemas.openxmlformats.org/presentationml/2006/main">
+  <p:cSld>
+    <p:spTree>
+      <p:nvGrpSpPr>
+        <p:cNvPr id="1" name=""/>
+        <p:cNvGrpSpPr/>
+        <p:nvPr/>
+      </p:nvGrpSpPr>
+      <p:grpSpPr>
+        <a:xfrm>
+          <a:off x="0" y="0"/>
+          <a:ext cx="0" cy="0"/>
+          <a:chOff x="0" y="0"/>
+          <a:chExt cx="0" cy="0"/>
+        </a:xfrm>
+      </p:grpSpPr>
+      <p:sp>
+        <p:nvSpPr>
+          <p:cNvPr id="2" name="Espaço Reservado para Imagem de Slide 1"/>
+          <p:cNvSpPr>
+            <a:spLocks noGrp="1" noRot="1" noChangeAspect="1"/>
+          </p:cNvSpPr>
+          <p:nvPr>
+            <p:ph type="sldImg"/>
+          </p:nvPr>
+        </p:nvSpPr>
+        <p:spPr/>
+      </p:sp>
+      <p:sp>
+        <p:nvSpPr>
+          <p:cNvPr id="3" name="Espaço Reservado para Anotações 2"/>
+          <p:cNvSpPr>
+            <a:spLocks noGrp="1"/>
+          </p:cNvSpPr>
+          <p:nvPr>
+            <p:ph type="body" idx="1"/>
+          </p:nvPr>
+        </p:nvSpPr>
+        <p:spPr/>
+        <p:txBody>
+          <a:bodyPr/>
+          <a:lstStyle/>
+          <a:p>
+            <a:endParaRPr lang="pt-BR" dirty="0"/>
+          </a:p>
+        </p:txBody>
+      </p:sp>
+      <p:sp>
+        <p:nvSpPr>
+          <p:cNvPr id="4" name="Espaço Reservado para Número de Slide 3"/>
+          <p:cNvSpPr>
+            <a:spLocks noGrp="1"/>
+          </p:cNvSpPr>
+          <p:nvPr>
+            <p:ph type="sldNum" sz="quarter" idx="5"/>
+          </p:nvPr>
+        </p:nvSpPr>
+        <p:spPr/>
+        <p:txBody>
+          <a:bodyPr/>
+          <a:lstStyle/>
+          <a:p>
+            <a:fld id="{6FC8D850-966F-45A6-8DE7-15B891E7D40D}" type="slidenum">
+              <a:rPr lang="pt-BR" smtClean="0"/>
+              <a:t>22</a:t>
+            </a:fld>
+            <a:endParaRPr lang="pt-BR"/>
+          </a:p>
+        </p:txBody>
+      </p:sp>
+    </p:spTree>
+    <p:extLst>
+      <p:ext uri="{BB962C8B-B14F-4D97-AF65-F5344CB8AC3E}">
+        <p14:creationId xmlns:p14="http://schemas.microsoft.com/office/powerpoint/2010/main" val="2055374868"/>
+      </p:ext>
+    </p:extLst>
+  </p:cSld>
+  <p:clrMapOvr>
+    <a:masterClrMapping/>
+  </p:clrMapOvr>
+</p:notes>
+</file>
+
+<file path=ppt/notesSlides/notesSlide7.xml><?xml version="1.0" encoding="utf-8"?>
+<p:notes xmlns:a="http://schemas.openxmlformats.org/drawingml/2006/main" xmlns:r="http://schemas.openxmlformats.org/officeDocument/2006/relationships" xmlns:p="http://schemas.openxmlformats.org/presentationml/2006/main">
+  <p:cSld>
+    <p:spTree>
+      <p:nvGrpSpPr>
+        <p:cNvPr id="1" name=""/>
+        <p:cNvGrpSpPr/>
+        <p:nvPr/>
+      </p:nvGrpSpPr>
+      <p:grpSpPr>
+        <a:xfrm>
+          <a:off x="0" y="0"/>
+          <a:ext cx="0" cy="0"/>
+          <a:chOff x="0" y="0"/>
+          <a:chExt cx="0" cy="0"/>
+        </a:xfrm>
+      </p:grpSpPr>
+      <p:sp>
+        <p:nvSpPr>
+          <p:cNvPr id="2" name="Espaço Reservado para Imagem de Slide 1"/>
+          <p:cNvSpPr>
+            <a:spLocks noGrp="1" noRot="1" noChangeAspect="1"/>
+          </p:cNvSpPr>
+          <p:nvPr>
+            <p:ph type="sldImg"/>
+          </p:nvPr>
+        </p:nvSpPr>
+        <p:spPr/>
+      </p:sp>
+      <p:sp>
+        <p:nvSpPr>
+          <p:cNvPr id="3" name="Espaço Reservado para Anotações 2"/>
+          <p:cNvSpPr>
+            <a:spLocks noGrp="1"/>
+          </p:cNvSpPr>
+          <p:nvPr>
+            <p:ph type="body" idx="1"/>
+          </p:nvPr>
+        </p:nvSpPr>
+        <p:spPr/>
+        <p:txBody>
+          <a:bodyPr/>
+          <a:lstStyle/>
+          <a:p>
+            <a:endParaRPr lang="pt-BR" dirty="0"/>
+          </a:p>
+        </p:txBody>
+      </p:sp>
+      <p:sp>
+        <p:nvSpPr>
+          <p:cNvPr id="4" name="Espaço Reservado para Número de Slide 3"/>
+          <p:cNvSpPr>
+            <a:spLocks noGrp="1"/>
+          </p:cNvSpPr>
+          <p:nvPr>
+            <p:ph type="sldNum" sz="quarter" idx="5"/>
+          </p:nvPr>
+        </p:nvSpPr>
+        <p:spPr/>
+        <p:txBody>
+          <a:bodyPr/>
+          <a:lstStyle/>
+          <a:p>
+            <a:fld id="{6FC8D850-966F-45A6-8DE7-15B891E7D40D}" type="slidenum">
+              <a:rPr lang="pt-BR" smtClean="0"/>
+              <a:t>23</a:t>
+            </a:fld>
+            <a:endParaRPr lang="pt-BR"/>
+          </a:p>
+        </p:txBody>
+      </p:sp>
+    </p:spTree>
+    <p:extLst>
+      <p:ext uri="{BB962C8B-B14F-4D97-AF65-F5344CB8AC3E}">
+        <p14:creationId xmlns:p14="http://schemas.microsoft.com/office/powerpoint/2010/main" val="1634929396"/>
+      </p:ext>
+    </p:extLst>
+  </p:cSld>
+  <p:clrMapOvr>
+    <a:masterClrMapping/>
+  </p:clrMapOvr>
+</p:notes>
+</file>
+
+<file path=ppt/notesSlides/notesSlide8.xml><?xml version="1.0" encoding="utf-8"?>
+<p:notes xmlns:a="http://schemas.openxmlformats.org/drawingml/2006/main" xmlns:r="http://schemas.openxmlformats.org/officeDocument/2006/relationships" xmlns:p="http://schemas.openxmlformats.org/presentationml/2006/main">
+  <p:cSld>
+    <p:spTree>
+      <p:nvGrpSpPr>
+        <p:cNvPr id="1" name=""/>
+        <p:cNvGrpSpPr/>
+        <p:nvPr/>
+      </p:nvGrpSpPr>
+      <p:grpSpPr>
+        <a:xfrm>
+          <a:off x="0" y="0"/>
+          <a:ext cx="0" cy="0"/>
+          <a:chOff x="0" y="0"/>
+          <a:chExt cx="0" cy="0"/>
+        </a:xfrm>
+      </p:grpSpPr>
+      <p:sp>
+        <p:nvSpPr>
+          <p:cNvPr id="2" name="Espaço Reservado para Imagem de Slide 1"/>
+          <p:cNvSpPr>
+            <a:spLocks noGrp="1" noRot="1" noChangeAspect="1"/>
+          </p:cNvSpPr>
+          <p:nvPr>
+            <p:ph type="sldImg"/>
+          </p:nvPr>
+        </p:nvSpPr>
+        <p:spPr/>
+      </p:sp>
+      <p:sp>
+        <p:nvSpPr>
+          <p:cNvPr id="3" name="Espaço Reservado para Anotações 2"/>
+          <p:cNvSpPr>
+            <a:spLocks noGrp="1"/>
+          </p:cNvSpPr>
+          <p:nvPr>
+            <p:ph type="body" idx="1"/>
+          </p:nvPr>
+        </p:nvSpPr>
+        <p:spPr/>
+        <p:txBody>
+          <a:bodyPr/>
+          <a:lstStyle/>
+          <a:p>
+            <a:endParaRPr lang="pt-BR" dirty="0"/>
+          </a:p>
+        </p:txBody>
+      </p:sp>
+      <p:sp>
+        <p:nvSpPr>
+          <p:cNvPr id="4" name="Espaço Reservado para Número de Slide 3"/>
+          <p:cNvSpPr>
+            <a:spLocks noGrp="1"/>
+          </p:cNvSpPr>
+          <p:nvPr>
+            <p:ph type="sldNum" sz="quarter" idx="5"/>
+          </p:nvPr>
+        </p:nvSpPr>
+        <p:spPr/>
+        <p:txBody>
+          <a:bodyPr/>
+          <a:lstStyle/>
+          <a:p>
+            <a:fld id="{6FC8D850-966F-45A6-8DE7-15B891E7D40D}" type="slidenum">
+              <a:rPr lang="pt-BR" smtClean="0"/>
+              <a:t>25</a:t>
+            </a:fld>
+            <a:endParaRPr lang="pt-BR"/>
+          </a:p>
+        </p:txBody>
+      </p:sp>
+    </p:spTree>
+    <p:extLst>
+      <p:ext uri="{BB962C8B-B14F-4D97-AF65-F5344CB8AC3E}">
+        <p14:creationId xmlns:p14="http://schemas.microsoft.com/office/powerpoint/2010/main" val="437240058"/>
+      </p:ext>
+    </p:extLst>
+  </p:cSld>
+  <p:clrMapOvr>
+    <a:masterClrMapping/>
+  </p:clrMapOvr>
+</p:notes>
+</file>
+
 <file path=ppt/slideLayouts/slideLayout1.xml><?xml version="1.0" encoding="utf-8"?>
 <p:sldLayout xmlns:a="http://schemas.openxmlformats.org/drawingml/2006/main" xmlns:r="http://schemas.openxmlformats.org/officeDocument/2006/relationships" xmlns:p="http://schemas.openxmlformats.org/presentationml/2006/main" type="title" preserve="1">
   <p:cSld name="Slide de Título">
@@ -948,7 +1558,7 @@
           <a:p>
             <a:fld id="{63289F7E-B80B-496E-81B4-D396C37C9454}" type="datetimeFigureOut">
               <a:rPr lang="pt-BR" smtClean="0"/>
-              <a:t>01/03/2026</a:t>
+              <a:t>13/03/2026</a:t>
             </a:fld>
             <a:endParaRPr lang="pt-BR"/>
           </a:p>
@@ -1002,7 +1612,7 @@
           <a:p>
             <a:fld id="{1A7E88B7-70CE-4035-AE73-13FA6FB985D4}" type="slidenum">
               <a:rPr lang="pt-BR" smtClean="0"/>
-              <a:t>‹#›</a:t>
+              <a:t>‹nº›</a:t>
             </a:fld>
             <a:endParaRPr lang="pt-BR"/>
           </a:p>
@@ -1146,7 +1756,7 @@
           <a:p>
             <a:fld id="{63289F7E-B80B-496E-81B4-D396C37C9454}" type="datetimeFigureOut">
               <a:rPr lang="pt-BR" smtClean="0"/>
-              <a:t>01/03/2026</a:t>
+              <a:t>13/03/2026</a:t>
             </a:fld>
             <a:endParaRPr lang="pt-BR"/>
           </a:p>
@@ -1200,7 +1810,7 @@
           <a:p>
             <a:fld id="{1A7E88B7-70CE-4035-AE73-13FA6FB985D4}" type="slidenum">
               <a:rPr lang="pt-BR" smtClean="0"/>
-              <a:t>‹#›</a:t>
+              <a:t>‹nº›</a:t>
             </a:fld>
             <a:endParaRPr lang="pt-BR"/>
           </a:p>
@@ -1354,7 +1964,7 @@
           <a:p>
             <a:fld id="{63289F7E-B80B-496E-81B4-D396C37C9454}" type="datetimeFigureOut">
               <a:rPr lang="pt-BR" smtClean="0"/>
-              <a:t>01/03/2026</a:t>
+              <a:t>13/03/2026</a:t>
             </a:fld>
             <a:endParaRPr lang="pt-BR"/>
           </a:p>
@@ -1408,7 +2018,7 @@
           <a:p>
             <a:fld id="{1A7E88B7-70CE-4035-AE73-13FA6FB985D4}" type="slidenum">
               <a:rPr lang="pt-BR" smtClean="0"/>
-              <a:t>‹#›</a:t>
+              <a:t>‹nº›</a:t>
             </a:fld>
             <a:endParaRPr lang="pt-BR"/>
           </a:p>
@@ -1552,7 +2162,7 @@
           <a:p>
             <a:fld id="{63289F7E-B80B-496E-81B4-D396C37C9454}" type="datetimeFigureOut">
               <a:rPr lang="pt-BR" smtClean="0"/>
-              <a:t>01/03/2026</a:t>
+              <a:t>13/03/2026</a:t>
             </a:fld>
             <a:endParaRPr lang="pt-BR"/>
           </a:p>
@@ -1606,7 +2216,7 @@
           <a:p>
             <a:fld id="{1A7E88B7-70CE-4035-AE73-13FA6FB985D4}" type="slidenum">
               <a:rPr lang="pt-BR" smtClean="0"/>
-              <a:t>‹#›</a:t>
+              <a:t>‹nº›</a:t>
             </a:fld>
             <a:endParaRPr lang="pt-BR"/>
           </a:p>
@@ -1827,7 +2437,7 @@
           <a:p>
             <a:fld id="{63289F7E-B80B-496E-81B4-D396C37C9454}" type="datetimeFigureOut">
               <a:rPr lang="pt-BR" smtClean="0"/>
-              <a:t>01/03/2026</a:t>
+              <a:t>13/03/2026</a:t>
             </a:fld>
             <a:endParaRPr lang="pt-BR"/>
           </a:p>
@@ -1881,7 +2491,7 @@
           <a:p>
             <a:fld id="{1A7E88B7-70CE-4035-AE73-13FA6FB985D4}" type="slidenum">
               <a:rPr lang="pt-BR" smtClean="0"/>
-              <a:t>‹#›</a:t>
+              <a:t>‹nº›</a:t>
             </a:fld>
             <a:endParaRPr lang="pt-BR"/>
           </a:p>
@@ -2092,7 +2702,7 @@
           <a:p>
             <a:fld id="{63289F7E-B80B-496E-81B4-D396C37C9454}" type="datetimeFigureOut">
               <a:rPr lang="pt-BR" smtClean="0"/>
-              <a:t>01/03/2026</a:t>
+              <a:t>13/03/2026</a:t>
             </a:fld>
             <a:endParaRPr lang="pt-BR"/>
           </a:p>
@@ -2146,7 +2756,7 @@
           <a:p>
             <a:fld id="{1A7E88B7-70CE-4035-AE73-13FA6FB985D4}" type="slidenum">
               <a:rPr lang="pt-BR" smtClean="0"/>
-              <a:t>‹#›</a:t>
+              <a:t>‹nº›</a:t>
             </a:fld>
             <a:endParaRPr lang="pt-BR"/>
           </a:p>
@@ -2504,7 +3114,7 @@
           <a:p>
             <a:fld id="{63289F7E-B80B-496E-81B4-D396C37C9454}" type="datetimeFigureOut">
               <a:rPr lang="pt-BR" smtClean="0"/>
-              <a:t>01/03/2026</a:t>
+              <a:t>13/03/2026</a:t>
             </a:fld>
             <a:endParaRPr lang="pt-BR"/>
           </a:p>
@@ -2558,7 +3168,7 @@
           <a:p>
             <a:fld id="{1A7E88B7-70CE-4035-AE73-13FA6FB985D4}" type="slidenum">
               <a:rPr lang="pt-BR" smtClean="0"/>
-              <a:t>‹#›</a:t>
+              <a:t>‹nº›</a:t>
             </a:fld>
             <a:endParaRPr lang="pt-BR"/>
           </a:p>
@@ -2645,7 +3255,7 @@
           <a:p>
             <a:fld id="{63289F7E-B80B-496E-81B4-D396C37C9454}" type="datetimeFigureOut">
               <a:rPr lang="pt-BR" smtClean="0"/>
-              <a:t>01/03/2026</a:t>
+              <a:t>13/03/2026</a:t>
             </a:fld>
             <a:endParaRPr lang="pt-BR"/>
           </a:p>
@@ -2699,7 +3309,7 @@
           <a:p>
             <a:fld id="{1A7E88B7-70CE-4035-AE73-13FA6FB985D4}" type="slidenum">
               <a:rPr lang="pt-BR" smtClean="0"/>
-              <a:t>‹#›</a:t>
+              <a:t>‹nº›</a:t>
             </a:fld>
             <a:endParaRPr lang="pt-BR"/>
           </a:p>
@@ -2758,7 +3368,7 @@
           <a:p>
             <a:fld id="{63289F7E-B80B-496E-81B4-D396C37C9454}" type="datetimeFigureOut">
               <a:rPr lang="pt-BR" smtClean="0"/>
-              <a:t>01/03/2026</a:t>
+              <a:t>13/03/2026</a:t>
             </a:fld>
             <a:endParaRPr lang="pt-BR"/>
           </a:p>
@@ -2812,7 +3422,7 @@
           <a:p>
             <a:fld id="{1A7E88B7-70CE-4035-AE73-13FA6FB985D4}" type="slidenum">
               <a:rPr lang="pt-BR" smtClean="0"/>
-              <a:t>‹#›</a:t>
+              <a:t>‹nº›</a:t>
             </a:fld>
             <a:endParaRPr lang="pt-BR"/>
           </a:p>
@@ -3069,7 +3679,7 @@
           <a:p>
             <a:fld id="{63289F7E-B80B-496E-81B4-D396C37C9454}" type="datetimeFigureOut">
               <a:rPr lang="pt-BR" smtClean="0"/>
-              <a:t>01/03/2026</a:t>
+              <a:t>13/03/2026</a:t>
             </a:fld>
             <a:endParaRPr lang="pt-BR"/>
           </a:p>
@@ -3123,7 +3733,7 @@
           <a:p>
             <a:fld id="{1A7E88B7-70CE-4035-AE73-13FA6FB985D4}" type="slidenum">
               <a:rPr lang="pt-BR" smtClean="0"/>
-              <a:t>‹#›</a:t>
+              <a:t>‹nº›</a:t>
             </a:fld>
             <a:endParaRPr lang="pt-BR"/>
           </a:p>
@@ -3357,7 +3967,7 @@
           <a:p>
             <a:fld id="{63289F7E-B80B-496E-81B4-D396C37C9454}" type="datetimeFigureOut">
               <a:rPr lang="pt-BR" smtClean="0"/>
-              <a:t>01/03/2026</a:t>
+              <a:t>13/03/2026</a:t>
             </a:fld>
             <a:endParaRPr lang="pt-BR"/>
           </a:p>
@@ -3411,7 +4021,7 @@
           <a:p>
             <a:fld id="{1A7E88B7-70CE-4035-AE73-13FA6FB985D4}" type="slidenum">
               <a:rPr lang="pt-BR" smtClean="0"/>
-              <a:t>‹#›</a:t>
+              <a:t>‹nº›</a:t>
             </a:fld>
             <a:endParaRPr lang="pt-BR"/>
           </a:p>
@@ -3598,7 +4208,7 @@
           <a:p>
             <a:fld id="{63289F7E-B80B-496E-81B4-D396C37C9454}" type="datetimeFigureOut">
               <a:rPr lang="pt-BR" smtClean="0"/>
-              <a:t>01/03/2026</a:t>
+              <a:t>13/03/2026</a:t>
             </a:fld>
             <a:endParaRPr lang="pt-BR"/>
           </a:p>
@@ -3688,7 +4298,7 @@
           <a:p>
             <a:fld id="{1A7E88B7-70CE-4035-AE73-13FA6FB985D4}" type="slidenum">
               <a:rPr lang="pt-BR" smtClean="0"/>
-              <a:t>‹#›</a:t>
+              <a:t>‹nº›</a:t>
             </a:fld>
             <a:endParaRPr lang="pt-BR"/>
           </a:p>
@@ -4033,13 +4643,13 @@
         </p:nvSpPr>
         <p:spPr>
           <a:xfrm>
-            <a:off x="1524000" y="819807"/>
+            <a:off x="1524000" y="1039290"/>
             <a:ext cx="9144000" cy="2690156"/>
           </a:xfrm>
         </p:spPr>
         <p:txBody>
           <a:bodyPr>
-            <a:normAutofit/>
+            <a:normAutofit fontScale="90000"/>
           </a:bodyPr>
           <a:lstStyle/>
           <a:p>
@@ -4048,12 +4658,100 @@
               <a:t>TP558 - Tópicos avançados em Machine Learning:</a:t>
             </a:r>
             <a:br>
-              <a:rPr lang="pt-BR" dirty="0"/>
+              <a:rPr lang="pt-BR" sz="5400" dirty="0"/>
             </a:br>
-            <a:r>
-              <a:rPr lang="pt-BR" b="1" i="1" dirty="0"/>
-              <a:t>Adicione aqui seu tema</a:t>
-            </a:r>
+            <a:br>
+              <a:rPr lang="pt-BR" sz="3600" dirty="0"/>
+            </a:br>
+            <a:r>
+              <a:rPr lang="pt-BR" sz="3600" b="1" i="1" dirty="0"/>
+              <a:t>FANN-</a:t>
+            </a:r>
+            <a:r>
+              <a:rPr lang="pt-BR" sz="3600" b="1" i="1" dirty="0" err="1"/>
+              <a:t>on</a:t>
+            </a:r>
+            <a:r>
+              <a:rPr lang="pt-BR" sz="3600" b="1" i="1" dirty="0"/>
+              <a:t>-MCU: </a:t>
+            </a:r>
+            <a:r>
+              <a:rPr lang="pt-BR" sz="3600" b="1" i="1" dirty="0" err="1"/>
+              <a:t>An</a:t>
+            </a:r>
+            <a:r>
+              <a:rPr lang="pt-BR" sz="3600" b="1" i="1" dirty="0"/>
+              <a:t> Open-</a:t>
+            </a:r>
+            <a:r>
+              <a:rPr lang="pt-BR" sz="3600" b="1" i="1" dirty="0" err="1"/>
+              <a:t>Source</a:t>
+            </a:r>
+            <a:r>
+              <a:rPr lang="pt-BR" sz="3600" b="1" i="1" dirty="0"/>
+              <a:t> Toolkit for Energy-</a:t>
+            </a:r>
+            <a:r>
+              <a:rPr lang="pt-BR" sz="3600" b="1" i="1" dirty="0" err="1"/>
+              <a:t>Efficient</a:t>
+            </a:r>
+            <a:r>
+              <a:rPr lang="pt-BR" sz="3600" b="1" i="1" dirty="0"/>
+              <a:t> Neural Network </a:t>
+            </a:r>
+            <a:r>
+              <a:rPr lang="pt-BR" sz="3600" b="1" i="1" dirty="0" err="1"/>
+              <a:t>Inference</a:t>
+            </a:r>
+            <a:r>
+              <a:rPr lang="pt-BR" sz="3600" b="1" i="1" dirty="0"/>
+              <a:t> </a:t>
+            </a:r>
+            <a:r>
+              <a:rPr lang="pt-BR" sz="3600" b="1" i="1" dirty="0" err="1"/>
+              <a:t>at</a:t>
+            </a:r>
+            <a:r>
+              <a:rPr lang="pt-BR" sz="3600" b="1" i="1" dirty="0"/>
+              <a:t> </a:t>
+            </a:r>
+            <a:r>
+              <a:rPr lang="pt-BR" sz="3600" b="1" i="1" dirty="0" err="1"/>
+              <a:t>the</a:t>
+            </a:r>
+            <a:r>
+              <a:rPr lang="pt-BR" sz="3600" b="1" i="1" dirty="0"/>
+              <a:t> Edge </a:t>
+            </a:r>
+            <a:r>
+              <a:rPr lang="pt-BR" sz="3600" b="1" i="1" dirty="0" err="1"/>
+              <a:t>of</a:t>
+            </a:r>
+            <a:r>
+              <a:rPr lang="pt-BR" sz="3600" b="1" i="1" dirty="0"/>
+              <a:t> </a:t>
+            </a:r>
+            <a:r>
+              <a:rPr lang="pt-BR" sz="3600" b="1" i="1" dirty="0" err="1"/>
+              <a:t>the</a:t>
+            </a:r>
+            <a:r>
+              <a:rPr lang="pt-BR" sz="3600" b="1" i="1" dirty="0"/>
+              <a:t> Internet </a:t>
+            </a:r>
+            <a:r>
+              <a:rPr lang="pt-BR" sz="3600" b="1" i="1" dirty="0" err="1"/>
+              <a:t>of</a:t>
+            </a:r>
+            <a:r>
+              <a:rPr lang="pt-BR" sz="3600" b="1" i="1" dirty="0"/>
+              <a:t> </a:t>
+            </a:r>
+            <a:r>
+              <a:rPr lang="pt-BR" sz="3600" b="1" i="1" dirty="0" err="1"/>
+              <a:t>Things</a:t>
+            </a:r>
+            <a:endParaRPr lang="pt-BR" sz="3600" b="1" i="1" dirty="0"/>
           </a:p>
         </p:txBody>
       </p:sp>
@@ -4087,19 +4785,14 @@
           <a:p>
             <a:r>
               <a:rPr lang="pt-BR" sz="2000" dirty="0"/>
-              <a:t>Adicione aqui seu nome</a:t>
-            </a:r>
-          </a:p>
-          <a:p>
-            <a:r>
-              <a:rPr lang="pt-BR" dirty="0"/>
-              <a:t>Adicione aqui seu </a:t>
-            </a:r>
-            <a:r>
-              <a:rPr lang="pt-BR" dirty="0" err="1"/>
-              <a:t>email</a:t>
-            </a:r>
-            <a:endParaRPr lang="pt-BR" dirty="0"/>
+              <a:t>Gabriel Dias Scarpioni</a:t>
+            </a:r>
+          </a:p>
+          <a:p>
+            <a:r>
+              <a:rPr lang="pt-BR" dirty="0"/>
+              <a:t>gabriel.scarpioni@inatel.br</a:t>
+            </a:r>
           </a:p>
         </p:txBody>
       </p:sp>
@@ -4175,7 +4868,7 @@
         </p:blipFill>
         <p:spPr bwMode="auto">
           <a:xfrm>
-            <a:off x="4965305" y="3439886"/>
+            <a:off x="4965305" y="3673089"/>
             <a:ext cx="2261389" cy="2237061"/>
           </a:xfrm>
           <a:prstGeom prst="rect">
@@ -4228,7 +4921,7 @@
           <p:cNvPr id="2" name="Título 1">
             <a:extLst>
               <a:ext uri="{FF2B5EF4-FFF2-40B4-BE49-F238E27FC236}">
-                <a16:creationId xmlns:a16="http://schemas.microsoft.com/office/drawing/2014/main" id="{3CA32550-8C76-B013-2EC7-989D8C3B19BE}"/>
+                <a16:creationId xmlns:a16="http://schemas.microsoft.com/office/drawing/2014/main" id="{94AB8438-E56E-2412-517C-8456E4CA773C}"/>
               </a:ext>
             </a:extLst>
           </p:cNvPr>
@@ -4239,14 +4932,29 @@
             <p:ph type="title"/>
           </p:nvPr>
         </p:nvSpPr>
-        <p:spPr/>
-        <p:txBody>
-          <a:bodyPr/>
-          <a:lstStyle/>
-          <a:p>
-            <a:r>
-              <a:rPr lang="pt-BR" dirty="0"/>
-              <a:t>Referências</a:t>
+        <p:spPr>
+          <a:xfrm>
+            <a:off x="0" y="1629"/>
+            <a:ext cx="11198629" cy="1325563"/>
+          </a:xfrm>
+        </p:spPr>
+        <p:txBody>
+          <a:bodyPr>
+            <a:normAutofit/>
+          </a:bodyPr>
+          <a:lstStyle/>
+          <a:p>
+            <a:r>
+              <a:rPr lang="pt-BR" dirty="0"/>
+              <a:t>Fundamentação teórica – ARM </a:t>
+            </a:r>
+            <a:r>
+              <a:rPr lang="pt-BR" dirty="0" err="1"/>
+              <a:t>Cortex</a:t>
+            </a:r>
+            <a:r>
+              <a:rPr lang="pt-BR" dirty="0"/>
+              <a:t>-M Family</a:t>
             </a:r>
           </a:p>
         </p:txBody>
@@ -4256,7 +4964,7 @@
           <p:cNvPr id="3" name="Espaço Reservado para Conteúdo 2">
             <a:extLst>
               <a:ext uri="{FF2B5EF4-FFF2-40B4-BE49-F238E27FC236}">
-                <a16:creationId xmlns:a16="http://schemas.microsoft.com/office/drawing/2014/main" id="{EF043237-7757-7557-B63E-D4EB5152D44B}"/>
+                <a16:creationId xmlns:a16="http://schemas.microsoft.com/office/drawing/2014/main" id="{F7E2B09C-6D56-4C9F-A364-B904CCE2F1A0}"/>
               </a:ext>
             </a:extLst>
           </p:cNvPr>
@@ -4267,22 +4975,202 @@
             <p:ph idx="1"/>
           </p:nvPr>
         </p:nvSpPr>
-        <p:spPr/>
-        <p:txBody>
-          <a:bodyPr/>
-          <a:lstStyle/>
-          <a:p>
-            <a:r>
-              <a:rPr lang="pt-BR" dirty="0"/>
-              <a:t>Artigos, livros, blogs, etc. usados como referência para o desenvolvimento do seminário.</a:t>
-            </a:r>
+        <p:spPr>
+          <a:xfrm>
+            <a:off x="838199" y="1327192"/>
+            <a:ext cx="11057313" cy="4351338"/>
+          </a:xfrm>
+        </p:spPr>
+        <p:txBody>
+          <a:bodyPr>
+            <a:normAutofit lnSpcReduction="10000"/>
+          </a:bodyPr>
+          <a:lstStyle/>
+          <a:p>
+            <a:pPr fontAlgn="base"/>
+            <a:r>
+              <a:rPr lang="pt-BR" dirty="0"/>
+              <a:t>ARM </a:t>
+            </a:r>
+            <a:r>
+              <a:rPr lang="pt-BR" dirty="0" err="1"/>
+              <a:t>Cortex</a:t>
+            </a:r>
+            <a:r>
+              <a:rPr lang="pt-BR" dirty="0"/>
+              <a:t>-M (M0, M3, M4 e M7)</a:t>
+            </a:r>
+            <a:endParaRPr lang="pt-BR" dirty="0">
+              <a:solidFill>
+                <a:srgbClr val="303030"/>
+              </a:solidFill>
+              <a:latin typeface="Google Sans Text"/>
+            </a:endParaRPr>
+          </a:p>
+          <a:p>
+            <a:pPr fontAlgn="base"/>
+            <a:endParaRPr lang="pt-BR" dirty="0">
+              <a:solidFill>
+                <a:srgbClr val="303030"/>
+              </a:solidFill>
+              <a:latin typeface="Google Sans Text"/>
+            </a:endParaRPr>
+          </a:p>
+          <a:p>
+            <a:pPr fontAlgn="base"/>
+            <a:r>
+              <a:rPr lang="pt-BR" dirty="0">
+                <a:solidFill>
+                  <a:srgbClr val="303030"/>
+                </a:solidFill>
+                <a:latin typeface="Google Sans Text"/>
+              </a:rPr>
+              <a:t>Plataforma </a:t>
+            </a:r>
+            <a:r>
+              <a:rPr lang="pt-BR" dirty="0" err="1">
+                <a:solidFill>
+                  <a:srgbClr val="303030"/>
+                </a:solidFill>
+                <a:latin typeface="Google Sans Text"/>
+              </a:rPr>
+              <a:t>multicore</a:t>
+            </a:r>
+            <a:r>
+              <a:rPr lang="pt-BR" dirty="0">
+                <a:solidFill>
+                  <a:srgbClr val="303030"/>
+                </a:solidFill>
+                <a:latin typeface="Google Sans Text"/>
+              </a:rPr>
+              <a:t> open-</a:t>
+            </a:r>
+            <a:r>
+              <a:rPr lang="pt-BR" dirty="0" err="1">
+                <a:solidFill>
+                  <a:srgbClr val="303030"/>
+                </a:solidFill>
+                <a:latin typeface="Google Sans Text"/>
+              </a:rPr>
+              <a:t>source</a:t>
+            </a:r>
+            <a:r>
+              <a:rPr lang="pt-BR" dirty="0">
+                <a:solidFill>
+                  <a:srgbClr val="303030"/>
+                </a:solidFill>
+                <a:latin typeface="Google Sans Text"/>
+              </a:rPr>
+              <a:t> baseada em RISC-V</a:t>
+            </a:r>
+          </a:p>
+          <a:p>
+            <a:pPr fontAlgn="base"/>
+            <a:endParaRPr lang="pt-BR" dirty="0">
+              <a:solidFill>
+                <a:srgbClr val="303030"/>
+              </a:solidFill>
+              <a:latin typeface="Google Sans Text"/>
+            </a:endParaRPr>
+          </a:p>
+          <a:p>
+            <a:pPr lvl="1" fontAlgn="base"/>
+            <a:r>
+              <a:rPr lang="pt-BR" dirty="0" err="1">
+                <a:solidFill>
+                  <a:srgbClr val="303030"/>
+                </a:solidFill>
+                <a:latin typeface="Google Sans Text"/>
+              </a:rPr>
+              <a:t>Fabric</a:t>
+            </a:r>
+            <a:r>
+              <a:rPr lang="pt-BR" dirty="0">
+                <a:solidFill>
+                  <a:srgbClr val="303030"/>
+                </a:solidFill>
+                <a:latin typeface="Google Sans Text"/>
+              </a:rPr>
+              <a:t> </a:t>
+            </a:r>
+            <a:r>
+              <a:rPr lang="pt-BR" dirty="0" err="1">
+                <a:solidFill>
+                  <a:srgbClr val="303030"/>
+                </a:solidFill>
+                <a:latin typeface="Google Sans Text"/>
+              </a:rPr>
+              <a:t>Controller</a:t>
+            </a:r>
+            <a:r>
+              <a:rPr lang="pt-BR" dirty="0">
+                <a:solidFill>
+                  <a:srgbClr val="303030"/>
+                </a:solidFill>
+                <a:latin typeface="Google Sans Text"/>
+              </a:rPr>
+              <a:t> + Cluster múltiplos cores + memória hierárquica + DMA</a:t>
+            </a:r>
+          </a:p>
+          <a:p>
+            <a:pPr fontAlgn="base"/>
+            <a:endParaRPr lang="pt-BR" dirty="0">
+              <a:solidFill>
+                <a:srgbClr val="303030"/>
+              </a:solidFill>
+              <a:latin typeface="Google Sans Text"/>
+            </a:endParaRPr>
+          </a:p>
+          <a:p>
+            <a:pPr fontAlgn="base"/>
+            <a:r>
+              <a:rPr lang="pt-BR" dirty="0">
+                <a:solidFill>
+                  <a:srgbClr val="303030"/>
+                </a:solidFill>
+                <a:latin typeface="Google Sans Text"/>
+              </a:rPr>
+              <a:t>Projetada para alta eficiência energética</a:t>
+            </a:r>
+          </a:p>
+          <a:p>
+            <a:pPr fontAlgn="base"/>
+            <a:endParaRPr lang="pt-BR" dirty="0">
+              <a:solidFill>
+                <a:srgbClr val="303030"/>
+              </a:solidFill>
+              <a:latin typeface="Google Sans Text"/>
+            </a:endParaRPr>
+          </a:p>
+          <a:p>
+            <a:pPr fontAlgn="base"/>
+            <a:r>
+              <a:rPr lang="pt-BR" dirty="0">
+                <a:solidFill>
+                  <a:srgbClr val="303030"/>
+                </a:solidFill>
+                <a:latin typeface="Google Sans Text"/>
+              </a:rPr>
+              <a:t>Processador Mr. Wolf</a:t>
+            </a:r>
+          </a:p>
+          <a:p>
+            <a:pPr marL="0" indent="0" fontAlgn="base">
+              <a:buNone/>
+            </a:pPr>
+            <a:endParaRPr lang="pt-BR" dirty="0">
+              <a:solidFill>
+                <a:srgbClr val="303030"/>
+              </a:solidFill>
+              <a:latin typeface="Google Sans Text"/>
+            </a:endParaRPr>
           </a:p>
         </p:txBody>
       </p:sp>
     </p:spTree>
     <p:extLst>
       <p:ext uri="{BB962C8B-B14F-4D97-AF65-F5344CB8AC3E}">
-        <p14:creationId xmlns:p14="http://schemas.microsoft.com/office/powerpoint/2010/main" val="1787264919"/>
+        <p14:creationId xmlns:p14="http://schemas.microsoft.com/office/powerpoint/2010/main" val="4027610591"/>
       </p:ext>
     </p:extLst>
   </p:cSld>
@@ -4311,10 +5199,1137 @@
       </p:grpSpPr>
       <p:sp>
         <p:nvSpPr>
-          <p:cNvPr id="4" name="Título 1">
-            <a:extLst>
-              <a:ext uri="{FF2B5EF4-FFF2-40B4-BE49-F238E27FC236}">
-                <a16:creationId xmlns:a16="http://schemas.microsoft.com/office/drawing/2014/main" id="{32666AC8-2E17-4DB4-B0F5-60C640CCFD2E}"/>
+          <p:cNvPr id="2" name="Título 1">
+            <a:extLst>
+              <a:ext uri="{FF2B5EF4-FFF2-40B4-BE49-F238E27FC236}">
+                <a16:creationId xmlns:a16="http://schemas.microsoft.com/office/drawing/2014/main" id="{94AB8438-E56E-2412-517C-8456E4CA773C}"/>
+              </a:ext>
+            </a:extLst>
+          </p:cNvPr>
+          <p:cNvSpPr>
+            <a:spLocks noGrp="1"/>
+          </p:cNvSpPr>
+          <p:nvPr>
+            <p:ph type="title"/>
+          </p:nvPr>
+        </p:nvSpPr>
+        <p:spPr>
+          <a:xfrm>
+            <a:off x="0" y="1629"/>
+            <a:ext cx="11198629" cy="1325563"/>
+          </a:xfrm>
+        </p:spPr>
+        <p:txBody>
+          <a:bodyPr>
+            <a:normAutofit/>
+          </a:bodyPr>
+          <a:lstStyle/>
+          <a:p>
+            <a:r>
+              <a:rPr lang="pt-BR" dirty="0"/>
+              <a:t>Fundamentação teórica – PULP Processors </a:t>
+            </a:r>
+          </a:p>
+        </p:txBody>
+      </p:sp>
+      <p:sp>
+        <p:nvSpPr>
+          <p:cNvPr id="3" name="Espaço Reservado para Conteúdo 2">
+            <a:extLst>
+              <a:ext uri="{FF2B5EF4-FFF2-40B4-BE49-F238E27FC236}">
+                <a16:creationId xmlns:a16="http://schemas.microsoft.com/office/drawing/2014/main" id="{F7E2B09C-6D56-4C9F-A364-B904CCE2F1A0}"/>
+              </a:ext>
+            </a:extLst>
+          </p:cNvPr>
+          <p:cNvSpPr>
+            <a:spLocks noGrp="1"/>
+          </p:cNvSpPr>
+          <p:nvPr>
+            <p:ph idx="1"/>
+          </p:nvPr>
+        </p:nvSpPr>
+        <p:spPr>
+          <a:xfrm>
+            <a:off x="838199" y="1842251"/>
+            <a:ext cx="11057313" cy="4351338"/>
+          </a:xfrm>
+        </p:spPr>
+        <p:txBody>
+          <a:bodyPr>
+            <a:normAutofit lnSpcReduction="10000"/>
+          </a:bodyPr>
+          <a:lstStyle/>
+          <a:p>
+            <a:pPr fontAlgn="base"/>
+            <a:r>
+              <a:rPr lang="pt-BR" dirty="0" err="1">
+                <a:solidFill>
+                  <a:srgbClr val="303030"/>
+                </a:solidFill>
+                <a:latin typeface="Google Sans Text"/>
+              </a:rPr>
+              <a:t>Parallel</a:t>
+            </a:r>
+            <a:r>
+              <a:rPr lang="pt-BR" dirty="0">
+                <a:solidFill>
+                  <a:srgbClr val="303030"/>
+                </a:solidFill>
+                <a:latin typeface="Google Sans Text"/>
+              </a:rPr>
+              <a:t> Ultra </a:t>
+            </a:r>
+            <a:r>
+              <a:rPr lang="pt-BR" dirty="0" err="1">
+                <a:solidFill>
+                  <a:srgbClr val="303030"/>
+                </a:solidFill>
+                <a:latin typeface="Google Sans Text"/>
+              </a:rPr>
+              <a:t>Low</a:t>
+            </a:r>
+            <a:r>
+              <a:rPr lang="pt-BR" dirty="0">
+                <a:solidFill>
+                  <a:srgbClr val="303030"/>
+                </a:solidFill>
+                <a:latin typeface="Google Sans Text"/>
+              </a:rPr>
+              <a:t> Power (PULP)</a:t>
+            </a:r>
+          </a:p>
+          <a:p>
+            <a:pPr fontAlgn="base"/>
+            <a:endParaRPr lang="pt-BR" dirty="0">
+              <a:solidFill>
+                <a:srgbClr val="303030"/>
+              </a:solidFill>
+              <a:latin typeface="Google Sans Text"/>
+            </a:endParaRPr>
+          </a:p>
+          <a:p>
+            <a:pPr fontAlgn="base"/>
+            <a:r>
+              <a:rPr lang="pt-BR" dirty="0">
+                <a:solidFill>
+                  <a:srgbClr val="303030"/>
+                </a:solidFill>
+                <a:latin typeface="Google Sans Text"/>
+              </a:rPr>
+              <a:t>Plataforma </a:t>
+            </a:r>
+            <a:r>
+              <a:rPr lang="pt-BR" dirty="0" err="1">
+                <a:solidFill>
+                  <a:srgbClr val="303030"/>
+                </a:solidFill>
+                <a:latin typeface="Google Sans Text"/>
+              </a:rPr>
+              <a:t>multicore</a:t>
+            </a:r>
+            <a:r>
+              <a:rPr lang="pt-BR" dirty="0">
+                <a:solidFill>
+                  <a:srgbClr val="303030"/>
+                </a:solidFill>
+                <a:latin typeface="Google Sans Text"/>
+              </a:rPr>
+              <a:t> open-</a:t>
+            </a:r>
+            <a:r>
+              <a:rPr lang="pt-BR" dirty="0" err="1">
+                <a:solidFill>
+                  <a:srgbClr val="303030"/>
+                </a:solidFill>
+                <a:latin typeface="Google Sans Text"/>
+              </a:rPr>
+              <a:t>source</a:t>
+            </a:r>
+            <a:r>
+              <a:rPr lang="pt-BR" dirty="0">
+                <a:solidFill>
+                  <a:srgbClr val="303030"/>
+                </a:solidFill>
+                <a:latin typeface="Google Sans Text"/>
+              </a:rPr>
+              <a:t> baseada em RISC-V</a:t>
+            </a:r>
+          </a:p>
+          <a:p>
+            <a:pPr fontAlgn="base"/>
+            <a:endParaRPr lang="pt-BR" dirty="0">
+              <a:solidFill>
+                <a:srgbClr val="303030"/>
+              </a:solidFill>
+              <a:latin typeface="Google Sans Text"/>
+            </a:endParaRPr>
+          </a:p>
+          <a:p>
+            <a:pPr lvl="1" fontAlgn="base"/>
+            <a:r>
+              <a:rPr lang="pt-BR" dirty="0" err="1">
+                <a:solidFill>
+                  <a:srgbClr val="303030"/>
+                </a:solidFill>
+                <a:latin typeface="Google Sans Text"/>
+              </a:rPr>
+              <a:t>Fabric</a:t>
+            </a:r>
+            <a:r>
+              <a:rPr lang="pt-BR" dirty="0">
+                <a:solidFill>
+                  <a:srgbClr val="303030"/>
+                </a:solidFill>
+                <a:latin typeface="Google Sans Text"/>
+              </a:rPr>
+              <a:t> </a:t>
+            </a:r>
+            <a:r>
+              <a:rPr lang="pt-BR" dirty="0" err="1">
+                <a:solidFill>
+                  <a:srgbClr val="303030"/>
+                </a:solidFill>
+                <a:latin typeface="Google Sans Text"/>
+              </a:rPr>
+              <a:t>Controller</a:t>
+            </a:r>
+            <a:r>
+              <a:rPr lang="pt-BR" dirty="0">
+                <a:solidFill>
+                  <a:srgbClr val="303030"/>
+                </a:solidFill>
+                <a:latin typeface="Google Sans Text"/>
+              </a:rPr>
+              <a:t> + Cluster múltiplos cores + memória hierárquica + DMA</a:t>
+            </a:r>
+          </a:p>
+          <a:p>
+            <a:pPr fontAlgn="base"/>
+            <a:endParaRPr lang="pt-BR" dirty="0">
+              <a:solidFill>
+                <a:srgbClr val="303030"/>
+              </a:solidFill>
+              <a:latin typeface="Google Sans Text"/>
+            </a:endParaRPr>
+          </a:p>
+          <a:p>
+            <a:pPr fontAlgn="base"/>
+            <a:r>
+              <a:rPr lang="pt-BR" dirty="0">
+                <a:solidFill>
+                  <a:srgbClr val="303030"/>
+                </a:solidFill>
+                <a:latin typeface="Google Sans Text"/>
+              </a:rPr>
+              <a:t>Projetada para alta eficiência energética</a:t>
+            </a:r>
+          </a:p>
+          <a:p>
+            <a:pPr fontAlgn="base"/>
+            <a:endParaRPr lang="pt-BR" dirty="0">
+              <a:solidFill>
+                <a:srgbClr val="303030"/>
+              </a:solidFill>
+              <a:latin typeface="Google Sans Text"/>
+            </a:endParaRPr>
+          </a:p>
+          <a:p>
+            <a:pPr fontAlgn="base"/>
+            <a:r>
+              <a:rPr lang="pt-BR" dirty="0">
+                <a:solidFill>
+                  <a:srgbClr val="303030"/>
+                </a:solidFill>
+                <a:latin typeface="Google Sans Text"/>
+              </a:rPr>
+              <a:t>Processador Mr. Wolf</a:t>
+            </a:r>
+          </a:p>
+          <a:p>
+            <a:pPr marL="0" indent="0" fontAlgn="base">
+              <a:buNone/>
+            </a:pPr>
+            <a:endParaRPr lang="pt-BR" dirty="0">
+              <a:solidFill>
+                <a:srgbClr val="303030"/>
+              </a:solidFill>
+              <a:latin typeface="Google Sans Text"/>
+            </a:endParaRPr>
+          </a:p>
+        </p:txBody>
+      </p:sp>
+    </p:spTree>
+    <p:extLst>
+      <p:ext uri="{BB962C8B-B14F-4D97-AF65-F5344CB8AC3E}">
+        <p14:creationId xmlns:p14="http://schemas.microsoft.com/office/powerpoint/2010/main" val="1712027417"/>
+      </p:ext>
+    </p:extLst>
+  </p:cSld>
+  <p:clrMapOvr>
+    <a:masterClrMapping/>
+  </p:clrMapOvr>
+</p:sld>
+</file>
+
+<file path=ppt/slides/slide12.xml><?xml version="1.0" encoding="utf-8"?>
+<p:sld xmlns:a="http://schemas.openxmlformats.org/drawingml/2006/main" xmlns:r="http://schemas.openxmlformats.org/officeDocument/2006/relationships" xmlns:p="http://schemas.openxmlformats.org/presentationml/2006/main">
+  <p:cSld>
+    <p:spTree>
+      <p:nvGrpSpPr>
+        <p:cNvPr id="1" name=""/>
+        <p:cNvGrpSpPr/>
+        <p:nvPr/>
+      </p:nvGrpSpPr>
+      <p:grpSpPr>
+        <a:xfrm>
+          <a:off x="0" y="0"/>
+          <a:ext cx="0" cy="0"/>
+          <a:chOff x="0" y="0"/>
+          <a:chExt cx="0" cy="0"/>
+        </a:xfrm>
+      </p:grpSpPr>
+      <p:sp>
+        <p:nvSpPr>
+          <p:cNvPr id="2" name="Título 1">
+            <a:extLst>
+              <a:ext uri="{FF2B5EF4-FFF2-40B4-BE49-F238E27FC236}">
+                <a16:creationId xmlns:a16="http://schemas.microsoft.com/office/drawing/2014/main" id="{94AB8438-E56E-2412-517C-8456E4CA773C}"/>
+              </a:ext>
+            </a:extLst>
+          </p:cNvPr>
+          <p:cNvSpPr>
+            <a:spLocks noGrp="1"/>
+          </p:cNvSpPr>
+          <p:nvPr>
+            <p:ph type="title"/>
+          </p:nvPr>
+        </p:nvSpPr>
+        <p:spPr>
+          <a:xfrm>
+            <a:off x="0" y="0"/>
+            <a:ext cx="11198629" cy="1325563"/>
+          </a:xfrm>
+        </p:spPr>
+        <p:txBody>
+          <a:bodyPr>
+            <a:normAutofit/>
+          </a:bodyPr>
+          <a:lstStyle/>
+          <a:p>
+            <a:r>
+              <a:rPr lang="pt-BR" dirty="0"/>
+              <a:t>Fundamentação teórica – PULP Processors </a:t>
+            </a:r>
+          </a:p>
+        </p:txBody>
+      </p:sp>
+      <p:pic>
+        <p:nvPicPr>
+          <p:cNvPr id="7" name="Imagem 6">
+            <a:extLst>
+              <a:ext uri="{FF2B5EF4-FFF2-40B4-BE49-F238E27FC236}">
+                <a16:creationId xmlns:a16="http://schemas.microsoft.com/office/drawing/2014/main" id="{CFDC9EF6-EA34-1B7F-239C-357BC7F76AA4}"/>
+              </a:ext>
+            </a:extLst>
+          </p:cNvPr>
+          <p:cNvPicPr>
+            <a:picLocks noChangeAspect="1"/>
+          </p:cNvPicPr>
+          <p:nvPr/>
+        </p:nvPicPr>
+        <p:blipFill>
+          <a:blip r:embed="rId2"/>
+          <a:stretch>
+            <a:fillRect/>
+          </a:stretch>
+        </p:blipFill>
+        <p:spPr>
+          <a:xfrm>
+            <a:off x="2406881" y="1007865"/>
+            <a:ext cx="7378238" cy="5675568"/>
+          </a:xfrm>
+          <a:prstGeom prst="rect">
+            <a:avLst/>
+          </a:prstGeom>
+        </p:spPr>
+      </p:pic>
+    </p:spTree>
+    <p:extLst>
+      <p:ext uri="{BB962C8B-B14F-4D97-AF65-F5344CB8AC3E}">
+        <p14:creationId xmlns:p14="http://schemas.microsoft.com/office/powerpoint/2010/main" val="2343681896"/>
+      </p:ext>
+    </p:extLst>
+  </p:cSld>
+  <p:clrMapOvr>
+    <a:masterClrMapping/>
+  </p:clrMapOvr>
+</p:sld>
+</file>
+
+<file path=ppt/slides/slide13.xml><?xml version="1.0" encoding="utf-8"?>
+<p:sld xmlns:a="http://schemas.openxmlformats.org/drawingml/2006/main" xmlns:r="http://schemas.openxmlformats.org/officeDocument/2006/relationships" xmlns:p="http://schemas.openxmlformats.org/presentationml/2006/main">
+  <p:cSld>
+    <p:spTree>
+      <p:nvGrpSpPr>
+        <p:cNvPr id="1" name=""/>
+        <p:cNvGrpSpPr/>
+        <p:nvPr/>
+      </p:nvGrpSpPr>
+      <p:grpSpPr>
+        <a:xfrm>
+          <a:off x="0" y="0"/>
+          <a:ext cx="0" cy="0"/>
+          <a:chOff x="0" y="0"/>
+          <a:chExt cx="0" cy="0"/>
+        </a:xfrm>
+      </p:grpSpPr>
+      <p:sp>
+        <p:nvSpPr>
+          <p:cNvPr id="2" name="Título 1">
+            <a:extLst>
+              <a:ext uri="{FF2B5EF4-FFF2-40B4-BE49-F238E27FC236}">
+                <a16:creationId xmlns:a16="http://schemas.microsoft.com/office/drawing/2014/main" id="{94AB8438-E56E-2412-517C-8456E4CA773C}"/>
+              </a:ext>
+            </a:extLst>
+          </p:cNvPr>
+          <p:cNvSpPr>
+            <a:spLocks noGrp="1"/>
+          </p:cNvSpPr>
+          <p:nvPr>
+            <p:ph type="title"/>
+          </p:nvPr>
+        </p:nvSpPr>
+        <p:spPr>
+          <a:xfrm>
+            <a:off x="0" y="0"/>
+            <a:ext cx="11198629" cy="1325563"/>
+          </a:xfrm>
+        </p:spPr>
+        <p:txBody>
+          <a:bodyPr>
+            <a:normAutofit/>
+          </a:bodyPr>
+          <a:lstStyle/>
+          <a:p>
+            <a:r>
+              <a:rPr lang="pt-BR" dirty="0"/>
+              <a:t>Fundamentação teórica – PULP Processors </a:t>
+            </a:r>
+          </a:p>
+        </p:txBody>
+      </p:sp>
+      <p:pic>
+        <p:nvPicPr>
+          <p:cNvPr id="4" name="Imagem 3">
+            <a:extLst>
+              <a:ext uri="{FF2B5EF4-FFF2-40B4-BE49-F238E27FC236}">
+                <a16:creationId xmlns:a16="http://schemas.microsoft.com/office/drawing/2014/main" id="{1EA0F912-1741-0EB8-65C4-5AE8B93FC0FB}"/>
+              </a:ext>
+            </a:extLst>
+          </p:cNvPr>
+          <p:cNvPicPr>
+            <a:picLocks noChangeAspect="1"/>
+          </p:cNvPicPr>
+          <p:nvPr/>
+        </p:nvPicPr>
+        <p:blipFill>
+          <a:blip r:embed="rId2"/>
+          <a:stretch>
+            <a:fillRect/>
+          </a:stretch>
+        </p:blipFill>
+        <p:spPr>
+          <a:xfrm>
+            <a:off x="494518" y="1175567"/>
+            <a:ext cx="11202963" cy="4839375"/>
+          </a:xfrm>
+          <a:prstGeom prst="rect">
+            <a:avLst/>
+          </a:prstGeom>
+        </p:spPr>
+      </p:pic>
+    </p:spTree>
+    <p:extLst>
+      <p:ext uri="{BB962C8B-B14F-4D97-AF65-F5344CB8AC3E}">
+        <p14:creationId xmlns:p14="http://schemas.microsoft.com/office/powerpoint/2010/main" val="686191749"/>
+      </p:ext>
+    </p:extLst>
+  </p:cSld>
+  <p:clrMapOvr>
+    <a:masterClrMapping/>
+  </p:clrMapOvr>
+</p:sld>
+</file>
+
+<file path=ppt/slides/slide14.xml><?xml version="1.0" encoding="utf-8"?>
+<p:sld xmlns:a="http://schemas.openxmlformats.org/drawingml/2006/main" xmlns:r="http://schemas.openxmlformats.org/officeDocument/2006/relationships" xmlns:p="http://schemas.openxmlformats.org/presentationml/2006/main">
+  <p:cSld>
+    <p:spTree>
+      <p:nvGrpSpPr>
+        <p:cNvPr id="1" name=""/>
+        <p:cNvGrpSpPr/>
+        <p:nvPr/>
+      </p:nvGrpSpPr>
+      <p:grpSpPr>
+        <a:xfrm>
+          <a:off x="0" y="0"/>
+          <a:ext cx="0" cy="0"/>
+          <a:chOff x="0" y="0"/>
+          <a:chExt cx="0" cy="0"/>
+        </a:xfrm>
+      </p:grpSpPr>
+      <p:sp>
+        <p:nvSpPr>
+          <p:cNvPr id="2" name="Título 1">
+            <a:extLst>
+              <a:ext uri="{FF2B5EF4-FFF2-40B4-BE49-F238E27FC236}">
+                <a16:creationId xmlns:a16="http://schemas.microsoft.com/office/drawing/2014/main" id="{94AB8438-E56E-2412-517C-8456E4CA773C}"/>
+              </a:ext>
+            </a:extLst>
+          </p:cNvPr>
+          <p:cNvSpPr>
+            <a:spLocks noGrp="1"/>
+          </p:cNvSpPr>
+          <p:nvPr>
+            <p:ph type="title"/>
+          </p:nvPr>
+        </p:nvSpPr>
+        <p:spPr/>
+        <p:txBody>
+          <a:bodyPr/>
+          <a:lstStyle/>
+          <a:p>
+            <a:r>
+              <a:rPr lang="pt-BR" dirty="0"/>
+              <a:t>Fundamentação teórica </a:t>
+            </a:r>
+          </a:p>
+        </p:txBody>
+      </p:sp>
+      <p:sp>
+        <p:nvSpPr>
+          <p:cNvPr id="3" name="Espaço Reservado para Conteúdo 2">
+            <a:extLst>
+              <a:ext uri="{FF2B5EF4-FFF2-40B4-BE49-F238E27FC236}">
+                <a16:creationId xmlns:a16="http://schemas.microsoft.com/office/drawing/2014/main" id="{F7E2B09C-6D56-4C9F-A364-B904CCE2F1A0}"/>
+              </a:ext>
+            </a:extLst>
+          </p:cNvPr>
+          <p:cNvSpPr>
+            <a:spLocks noGrp="1"/>
+          </p:cNvSpPr>
+          <p:nvPr>
+            <p:ph idx="1"/>
+          </p:nvPr>
+        </p:nvSpPr>
+        <p:spPr/>
+        <p:txBody>
+          <a:bodyPr/>
+          <a:lstStyle/>
+          <a:p>
+            <a:pPr fontAlgn="base"/>
+            <a:r>
+              <a:rPr lang="pt-BR" dirty="0" err="1"/>
+              <a:t>Multilayer</a:t>
+            </a:r>
+            <a:r>
+              <a:rPr lang="pt-BR" dirty="0"/>
+              <a:t> </a:t>
+            </a:r>
+            <a:r>
+              <a:rPr lang="pt-BR" dirty="0" err="1"/>
+              <a:t>Perceptron</a:t>
+            </a:r>
+            <a:endParaRPr lang="pt-BR" dirty="0"/>
+          </a:p>
+          <a:p>
+            <a:pPr fontAlgn="base"/>
+            <a:r>
+              <a:rPr lang="pt-BR" dirty="0"/>
+              <a:t>Trabalhos relacionados mais importantes</a:t>
+            </a:r>
+            <a:endParaRPr lang="pt-BR" b="1" dirty="0"/>
+          </a:p>
+        </p:txBody>
+      </p:sp>
+    </p:spTree>
+    <p:extLst>
+      <p:ext uri="{BB962C8B-B14F-4D97-AF65-F5344CB8AC3E}">
+        <p14:creationId xmlns:p14="http://schemas.microsoft.com/office/powerpoint/2010/main" val="3019551586"/>
+      </p:ext>
+    </p:extLst>
+  </p:cSld>
+  <p:clrMapOvr>
+    <a:masterClrMapping/>
+  </p:clrMapOvr>
+</p:sld>
+</file>
+
+<file path=ppt/slides/slide15.xml><?xml version="1.0" encoding="utf-8"?>
+<p:sld xmlns:a="http://schemas.openxmlformats.org/drawingml/2006/main" xmlns:r="http://schemas.openxmlformats.org/officeDocument/2006/relationships" xmlns:p="http://schemas.openxmlformats.org/presentationml/2006/main">
+  <p:cSld>
+    <p:spTree>
+      <p:nvGrpSpPr>
+        <p:cNvPr id="1" name=""/>
+        <p:cNvGrpSpPr/>
+        <p:nvPr/>
+      </p:nvGrpSpPr>
+      <p:grpSpPr>
+        <a:xfrm>
+          <a:off x="0" y="0"/>
+          <a:ext cx="0" cy="0"/>
+          <a:chOff x="0" y="0"/>
+          <a:chExt cx="0" cy="0"/>
+        </a:xfrm>
+      </p:grpSpPr>
+      <p:sp>
+        <p:nvSpPr>
+          <p:cNvPr id="2" name="Título 1">
+            <a:extLst>
+              <a:ext uri="{FF2B5EF4-FFF2-40B4-BE49-F238E27FC236}">
+                <a16:creationId xmlns:a16="http://schemas.microsoft.com/office/drawing/2014/main" id="{94AB8438-E56E-2412-517C-8456E4CA773C}"/>
+              </a:ext>
+            </a:extLst>
+          </p:cNvPr>
+          <p:cNvSpPr>
+            <a:spLocks noGrp="1"/>
+          </p:cNvSpPr>
+          <p:nvPr>
+            <p:ph type="title"/>
+          </p:nvPr>
+        </p:nvSpPr>
+        <p:spPr/>
+        <p:txBody>
+          <a:bodyPr/>
+          <a:lstStyle/>
+          <a:p>
+            <a:r>
+              <a:rPr lang="pt-BR" dirty="0"/>
+              <a:t>Fundamentação teórica </a:t>
+            </a:r>
+          </a:p>
+        </p:txBody>
+      </p:sp>
+      <p:sp>
+        <p:nvSpPr>
+          <p:cNvPr id="5" name="Espaço Reservado para Conteúdo 4">
+            <a:extLst>
+              <a:ext uri="{FF2B5EF4-FFF2-40B4-BE49-F238E27FC236}">
+                <a16:creationId xmlns:a16="http://schemas.microsoft.com/office/drawing/2014/main" id="{FF72EB0E-87AB-C7B0-3B4A-A282ABDECEB1}"/>
+              </a:ext>
+            </a:extLst>
+          </p:cNvPr>
+          <p:cNvSpPr>
+            <a:spLocks noGrp="1"/>
+          </p:cNvSpPr>
+          <p:nvPr>
+            <p:ph idx="1"/>
+          </p:nvPr>
+        </p:nvSpPr>
+        <p:spPr/>
+        <p:txBody>
+          <a:bodyPr/>
+          <a:lstStyle/>
+          <a:p>
+            <a:endParaRPr lang="pt-BR"/>
+          </a:p>
+        </p:txBody>
+      </p:sp>
+      <p:pic>
+        <p:nvPicPr>
+          <p:cNvPr id="7" name="Imagem 6">
+            <a:extLst>
+              <a:ext uri="{FF2B5EF4-FFF2-40B4-BE49-F238E27FC236}">
+                <a16:creationId xmlns:a16="http://schemas.microsoft.com/office/drawing/2014/main" id="{7178E091-BB68-3B5A-659D-0EADBE127E38}"/>
+              </a:ext>
+            </a:extLst>
+          </p:cNvPr>
+          <p:cNvPicPr>
+            <a:picLocks noChangeAspect="1"/>
+          </p:cNvPicPr>
+          <p:nvPr/>
+        </p:nvPicPr>
+        <p:blipFill>
+          <a:blip r:embed="rId2"/>
+          <a:stretch>
+            <a:fillRect/>
+          </a:stretch>
+        </p:blipFill>
+        <p:spPr>
+          <a:xfrm>
+            <a:off x="324197" y="1825625"/>
+            <a:ext cx="12192000" cy="3413093"/>
+          </a:xfrm>
+          <a:prstGeom prst="rect">
+            <a:avLst/>
+          </a:prstGeom>
+        </p:spPr>
+      </p:pic>
+    </p:spTree>
+    <p:extLst>
+      <p:ext uri="{BB962C8B-B14F-4D97-AF65-F5344CB8AC3E}">
+        <p14:creationId xmlns:p14="http://schemas.microsoft.com/office/powerpoint/2010/main" val="4041789290"/>
+      </p:ext>
+    </p:extLst>
+  </p:cSld>
+  <p:clrMapOvr>
+    <a:masterClrMapping/>
+  </p:clrMapOvr>
+</p:sld>
+</file>
+
+<file path=ppt/slides/slide16.xml><?xml version="1.0" encoding="utf-8"?>
+<p:sld xmlns:a="http://schemas.openxmlformats.org/drawingml/2006/main" xmlns:r="http://schemas.openxmlformats.org/officeDocument/2006/relationships" xmlns:p="http://schemas.openxmlformats.org/presentationml/2006/main">
+  <p:cSld>
+    <p:spTree>
+      <p:nvGrpSpPr>
+        <p:cNvPr id="1" name=""/>
+        <p:cNvGrpSpPr/>
+        <p:nvPr/>
+      </p:nvGrpSpPr>
+      <p:grpSpPr>
+        <a:xfrm>
+          <a:off x="0" y="0"/>
+          <a:ext cx="0" cy="0"/>
+          <a:chOff x="0" y="0"/>
+          <a:chExt cx="0" cy="0"/>
+        </a:xfrm>
+      </p:grpSpPr>
+      <p:sp>
+        <p:nvSpPr>
+          <p:cNvPr id="2" name="Título 1">
+            <a:extLst>
+              <a:ext uri="{FF2B5EF4-FFF2-40B4-BE49-F238E27FC236}">
+                <a16:creationId xmlns:a16="http://schemas.microsoft.com/office/drawing/2014/main" id="{083FFF02-0FC8-9F0B-AAB0-565FC99EA70D}"/>
+              </a:ext>
+            </a:extLst>
+          </p:cNvPr>
+          <p:cNvSpPr>
+            <a:spLocks noGrp="1"/>
+          </p:cNvSpPr>
+          <p:nvPr>
+            <p:ph type="title"/>
+          </p:nvPr>
+        </p:nvSpPr>
+        <p:spPr/>
+        <p:txBody>
+          <a:bodyPr/>
+          <a:lstStyle/>
+          <a:p>
+            <a:r>
+              <a:rPr lang="pt-BR" dirty="0"/>
+              <a:t>Metodologia</a:t>
+            </a:r>
+          </a:p>
+        </p:txBody>
+      </p:sp>
+      <p:sp>
+        <p:nvSpPr>
+          <p:cNvPr id="3" name="Espaço Reservado para Conteúdo 2">
+            <a:extLst>
+              <a:ext uri="{FF2B5EF4-FFF2-40B4-BE49-F238E27FC236}">
+                <a16:creationId xmlns:a16="http://schemas.microsoft.com/office/drawing/2014/main" id="{8C5488AE-34B4-EF1D-F674-507FF2FCD122}"/>
+              </a:ext>
+            </a:extLst>
+          </p:cNvPr>
+          <p:cNvSpPr>
+            <a:spLocks noGrp="1"/>
+          </p:cNvSpPr>
+          <p:nvPr>
+            <p:ph idx="1"/>
+          </p:nvPr>
+        </p:nvSpPr>
+        <p:spPr/>
+        <p:txBody>
+          <a:bodyPr/>
+          <a:lstStyle/>
+          <a:p>
+            <a:pPr fontAlgn="base"/>
+            <a:r>
+              <a:rPr lang="pt-BR" dirty="0"/>
+              <a:t>Base de dados / cenário experimental</a:t>
+            </a:r>
+          </a:p>
+          <a:p>
+            <a:pPr fontAlgn="base"/>
+            <a:r>
+              <a:rPr lang="pt-BR" dirty="0"/>
+              <a:t>Modelos, algoritmos ou abordagem</a:t>
+            </a:r>
+          </a:p>
+          <a:p>
+            <a:pPr fontAlgn="base"/>
+            <a:r>
+              <a:rPr lang="pt-BR" dirty="0"/>
+              <a:t>Fluxo do método</a:t>
+            </a:r>
+          </a:p>
+        </p:txBody>
+      </p:sp>
+    </p:spTree>
+    <p:extLst>
+      <p:ext uri="{BB962C8B-B14F-4D97-AF65-F5344CB8AC3E}">
+        <p14:creationId xmlns:p14="http://schemas.microsoft.com/office/powerpoint/2010/main" val="1547259554"/>
+      </p:ext>
+    </p:extLst>
+  </p:cSld>
+  <p:clrMapOvr>
+    <a:masterClrMapping/>
+  </p:clrMapOvr>
+</p:sld>
+</file>
+
+<file path=ppt/slides/slide17.xml><?xml version="1.0" encoding="utf-8"?>
+<p:sld xmlns:a="http://schemas.openxmlformats.org/drawingml/2006/main" xmlns:r="http://schemas.openxmlformats.org/officeDocument/2006/relationships" xmlns:p="http://schemas.openxmlformats.org/presentationml/2006/main">
+  <p:cSld>
+    <p:spTree>
+      <p:nvGrpSpPr>
+        <p:cNvPr id="1" name=""/>
+        <p:cNvGrpSpPr/>
+        <p:nvPr/>
+      </p:nvGrpSpPr>
+      <p:grpSpPr>
+        <a:xfrm>
+          <a:off x="0" y="0"/>
+          <a:ext cx="0" cy="0"/>
+          <a:chOff x="0" y="0"/>
+          <a:chExt cx="0" cy="0"/>
+        </a:xfrm>
+      </p:grpSpPr>
+      <p:sp>
+        <p:nvSpPr>
+          <p:cNvPr id="2" name="Título 1">
+            <a:extLst>
+              <a:ext uri="{FF2B5EF4-FFF2-40B4-BE49-F238E27FC236}">
+                <a16:creationId xmlns:a16="http://schemas.microsoft.com/office/drawing/2014/main" id="{083FFF02-0FC8-9F0B-AAB0-565FC99EA70D}"/>
+              </a:ext>
+            </a:extLst>
+          </p:cNvPr>
+          <p:cNvSpPr>
+            <a:spLocks noGrp="1"/>
+          </p:cNvSpPr>
+          <p:nvPr>
+            <p:ph type="title"/>
+          </p:nvPr>
+        </p:nvSpPr>
+        <p:spPr/>
+        <p:txBody>
+          <a:bodyPr/>
+          <a:lstStyle/>
+          <a:p>
+            <a:r>
+              <a:rPr lang="pt-BR" dirty="0"/>
+              <a:t>Metodologia</a:t>
+            </a:r>
+          </a:p>
+        </p:txBody>
+      </p:sp>
+      <p:sp>
+        <p:nvSpPr>
+          <p:cNvPr id="3" name="Espaço Reservado para Conteúdo 2">
+            <a:extLst>
+              <a:ext uri="{FF2B5EF4-FFF2-40B4-BE49-F238E27FC236}">
+                <a16:creationId xmlns:a16="http://schemas.microsoft.com/office/drawing/2014/main" id="{8C5488AE-34B4-EF1D-F674-507FF2FCD122}"/>
+              </a:ext>
+            </a:extLst>
+          </p:cNvPr>
+          <p:cNvSpPr>
+            <a:spLocks noGrp="1"/>
+          </p:cNvSpPr>
+          <p:nvPr>
+            <p:ph idx="1"/>
+          </p:nvPr>
+        </p:nvSpPr>
+        <p:spPr/>
+        <p:txBody>
+          <a:bodyPr>
+            <a:normAutofit fontScale="92500" lnSpcReduction="20000"/>
+          </a:bodyPr>
+          <a:lstStyle/>
+          <a:p>
+            <a:r>
+              <a:rPr lang="pt-BR" b="1" dirty="0"/>
+              <a:t>Estrutura da Inferência</a:t>
+            </a:r>
+            <a:endParaRPr lang="pt-BR" dirty="0"/>
+          </a:p>
+          <a:p>
+            <a:pPr>
+              <a:buFont typeface="Arial" panose="020B0604020202020204" pitchFamily="34" charset="0"/>
+              <a:buChar char="•"/>
+            </a:pPr>
+            <a:r>
+              <a:rPr lang="pt-BR" dirty="0"/>
+              <a:t>A inferência de um </a:t>
+            </a:r>
+            <a:r>
+              <a:rPr lang="pt-BR" b="1" dirty="0"/>
+              <a:t>MLP</a:t>
+            </a:r>
+            <a:r>
+              <a:rPr lang="pt-BR" dirty="0"/>
+              <a:t> é composta por duas etapas principais:</a:t>
+            </a:r>
+          </a:p>
+          <a:p>
+            <a:pPr marL="742950" lvl="1" indent="-285750">
+              <a:buFont typeface="Arial" panose="020B0604020202020204" pitchFamily="34" charset="0"/>
+              <a:buChar char="•"/>
+            </a:pPr>
+            <a:r>
+              <a:rPr lang="pt-BR" dirty="0"/>
+              <a:t>Cálculo da </a:t>
+            </a:r>
+            <a:r>
+              <a:rPr lang="pt-BR" b="1" dirty="0"/>
+              <a:t>função linear</a:t>
+            </a:r>
+            <a:r>
+              <a:rPr lang="pt-BR" dirty="0"/>
+              <a:t> (produto escalar entre entradas e pesos)</a:t>
+            </a:r>
+          </a:p>
+          <a:p>
+            <a:pPr marL="742950" lvl="1" indent="-285750">
+              <a:buFont typeface="Arial" panose="020B0604020202020204" pitchFamily="34" charset="0"/>
+              <a:buChar char="•"/>
+            </a:pPr>
+            <a:r>
+              <a:rPr lang="pt-BR" dirty="0"/>
+              <a:t>Aplicação da </a:t>
+            </a:r>
+            <a:r>
+              <a:rPr lang="pt-BR" b="1" dirty="0"/>
+              <a:t>função de ativação não linear</a:t>
+            </a:r>
+            <a:endParaRPr lang="pt-BR" dirty="0"/>
+          </a:p>
+          <a:p>
+            <a:pPr>
+              <a:buFont typeface="Arial" panose="020B0604020202020204" pitchFamily="34" charset="0"/>
+              <a:buChar char="•"/>
+            </a:pPr>
+            <a:r>
+              <a:rPr lang="pt-BR" dirty="0"/>
+              <a:t>As avaliações foram realizadas </a:t>
+            </a:r>
+            <a:r>
+              <a:rPr lang="pt-BR" b="1" dirty="0"/>
+              <a:t>separando essas duas etapas</a:t>
+            </a:r>
+            <a:endParaRPr lang="pt-BR" dirty="0"/>
+          </a:p>
+          <a:p>
+            <a:r>
+              <a:rPr lang="pt-BR" b="1" dirty="0"/>
+              <a:t>Arquiteturas Avaliadas</a:t>
+            </a:r>
+            <a:endParaRPr lang="pt-BR" dirty="0"/>
+          </a:p>
+          <a:p>
+            <a:pPr>
+              <a:buFont typeface="Arial" panose="020B0604020202020204" pitchFamily="34" charset="0"/>
+              <a:buChar char="•"/>
+            </a:pPr>
+            <a:r>
+              <a:rPr lang="pt-BR" b="1" dirty="0"/>
+              <a:t>ARM Cortex-M4 (STM32L475VG)</a:t>
+            </a:r>
+            <a:endParaRPr lang="pt-BR" dirty="0"/>
+          </a:p>
+          <a:p>
+            <a:pPr>
+              <a:buFont typeface="Arial" panose="020B0604020202020204" pitchFamily="34" charset="0"/>
+              <a:buChar char="•"/>
+            </a:pPr>
+            <a:r>
+              <a:rPr lang="pt-BR" b="1" dirty="0"/>
+              <a:t>RI5CY (Plataforma Mr. Wolf – PULP)</a:t>
+            </a:r>
+            <a:endParaRPr lang="pt-BR" dirty="0"/>
+          </a:p>
+          <a:p>
+            <a:pPr>
+              <a:buFont typeface="Arial" panose="020B0604020202020204" pitchFamily="34" charset="0"/>
+              <a:buChar char="•"/>
+            </a:pPr>
+            <a:r>
+              <a:rPr lang="pt-BR" dirty="0"/>
+              <a:t>Implementações testadas em:</a:t>
+            </a:r>
+          </a:p>
+          <a:p>
+            <a:pPr marL="742950" lvl="1" indent="-285750">
+              <a:buFont typeface="Arial" panose="020B0604020202020204" pitchFamily="34" charset="0"/>
+              <a:buChar char="•"/>
+            </a:pPr>
+            <a:r>
+              <a:rPr lang="pt-BR" b="1" dirty="0"/>
+              <a:t>Floating-point</a:t>
+            </a:r>
+            <a:endParaRPr lang="pt-BR" dirty="0"/>
+          </a:p>
+          <a:p>
+            <a:pPr marL="742950" lvl="1" indent="-285750">
+              <a:buFont typeface="Arial" panose="020B0604020202020204" pitchFamily="34" charset="0"/>
+              <a:buChar char="•"/>
+            </a:pPr>
+            <a:r>
+              <a:rPr lang="pt-BR" b="1" dirty="0" err="1"/>
+              <a:t>Fixed</a:t>
+            </a:r>
+            <a:r>
+              <a:rPr lang="pt-BR" b="1" dirty="0"/>
+              <a:t>-point</a:t>
+            </a:r>
+            <a:r>
+              <a:rPr lang="pt-BR" dirty="0"/>
+              <a:t> (para dispositivos sem FPU)</a:t>
+            </a:r>
+          </a:p>
+        </p:txBody>
+      </p:sp>
+    </p:spTree>
+    <p:extLst>
+      <p:ext uri="{BB962C8B-B14F-4D97-AF65-F5344CB8AC3E}">
+        <p14:creationId xmlns:p14="http://schemas.microsoft.com/office/powerpoint/2010/main" val="3664050779"/>
+      </p:ext>
+    </p:extLst>
+  </p:cSld>
+  <p:clrMapOvr>
+    <a:masterClrMapping/>
+  </p:clrMapOvr>
+</p:sld>
+</file>
+
+<file path=ppt/slides/slide18.xml><?xml version="1.0" encoding="utf-8"?>
+<p:sld xmlns:a="http://schemas.openxmlformats.org/drawingml/2006/main" xmlns:r="http://schemas.openxmlformats.org/officeDocument/2006/relationships" xmlns:p="http://schemas.openxmlformats.org/presentationml/2006/main">
+  <p:cSld>
+    <p:spTree>
+      <p:nvGrpSpPr>
+        <p:cNvPr id="1" name="">
+          <a:extLst>
+            <a:ext uri="{FF2B5EF4-FFF2-40B4-BE49-F238E27FC236}">
+              <a16:creationId xmlns:a16="http://schemas.microsoft.com/office/drawing/2014/main" id="{E1C9F56A-97FC-7CCD-E5BA-3B5E230AD9AB}"/>
+            </a:ext>
+          </a:extLst>
+        </p:cNvPr>
+        <p:cNvGrpSpPr/>
+        <p:nvPr/>
+      </p:nvGrpSpPr>
+      <p:grpSpPr>
+        <a:xfrm>
+          <a:off x="0" y="0"/>
+          <a:ext cx="0" cy="0"/>
+          <a:chOff x="0" y="0"/>
+          <a:chExt cx="0" cy="0"/>
+        </a:xfrm>
+      </p:grpSpPr>
+      <p:sp>
+        <p:nvSpPr>
+          <p:cNvPr id="3" name="Espaço Reservado para Conteúdo 2">
+            <a:extLst>
+              <a:ext uri="{FF2B5EF4-FFF2-40B4-BE49-F238E27FC236}">
+                <a16:creationId xmlns:a16="http://schemas.microsoft.com/office/drawing/2014/main" id="{F22F88A5-87D1-340F-853F-8C2ED8F8C877}"/>
+              </a:ext>
+            </a:extLst>
+          </p:cNvPr>
+          <p:cNvSpPr>
+            <a:spLocks noGrp="1"/>
+          </p:cNvSpPr>
+          <p:nvPr>
+            <p:ph idx="1"/>
+          </p:nvPr>
+        </p:nvSpPr>
+        <p:spPr/>
+        <p:txBody>
+          <a:bodyPr>
+            <a:normAutofit fontScale="92500" lnSpcReduction="20000"/>
+          </a:bodyPr>
+          <a:lstStyle/>
+          <a:p>
+            <a:pPr fontAlgn="base"/>
+            <a:r>
+              <a:rPr lang="pt-BR" dirty="0"/>
+              <a:t>Identificação de ineficiência na biblioteca </a:t>
+            </a:r>
+            <a:r>
+              <a:rPr lang="pt-BR" dirty="0" err="1"/>
+              <a:t>FANNCortexM</a:t>
+            </a:r>
+            <a:endParaRPr lang="pt-BR" dirty="0"/>
+          </a:p>
+          <a:p>
+            <a:pPr fontAlgn="base"/>
+            <a:endParaRPr lang="pt-BR" dirty="0"/>
+          </a:p>
+          <a:p>
+            <a:pPr fontAlgn="base"/>
+            <a:r>
+              <a:rPr lang="pt-BR" dirty="0"/>
+              <a:t>O buffer intermediário do neurônio era:</a:t>
+            </a:r>
+          </a:p>
+          <a:p>
+            <a:pPr fontAlgn="base"/>
+            <a:endParaRPr lang="pt-BR" dirty="0"/>
+          </a:p>
+          <a:p>
+            <a:pPr lvl="1" fontAlgn="base"/>
+            <a:r>
+              <a:rPr lang="pt-BR" dirty="0"/>
+              <a:t>Inicializado com bias</a:t>
+            </a:r>
+          </a:p>
+          <a:p>
+            <a:pPr lvl="1" fontAlgn="base"/>
+            <a:endParaRPr lang="pt-BR" dirty="0"/>
+          </a:p>
+          <a:p>
+            <a:pPr lvl="1" fontAlgn="base"/>
+            <a:r>
+              <a:rPr lang="pt-BR" dirty="0"/>
+              <a:t>Sobrescrito imediatamente após o cálculo</a:t>
+            </a:r>
+          </a:p>
+          <a:p>
+            <a:pPr fontAlgn="base"/>
+            <a:endParaRPr lang="pt-BR" dirty="0"/>
+          </a:p>
+          <a:p>
+            <a:pPr fontAlgn="base"/>
+            <a:r>
+              <a:rPr lang="pt-BR" dirty="0"/>
+              <a:t>Melhoria Introduzida (FANN-</a:t>
+            </a:r>
+            <a:r>
+              <a:rPr lang="pt-BR" dirty="0" err="1"/>
+              <a:t>on</a:t>
+            </a:r>
+            <a:r>
+              <a:rPr lang="pt-BR" dirty="0"/>
+              <a:t>-MCU)</a:t>
+            </a:r>
+          </a:p>
+          <a:p>
+            <a:pPr fontAlgn="base"/>
+            <a:endParaRPr lang="pt-BR" dirty="0"/>
+          </a:p>
+          <a:p>
+            <a:pPr lvl="1" fontAlgn="base"/>
+            <a:r>
+              <a:rPr lang="pt-BR" dirty="0"/>
+              <a:t>Remoção da inicialização redundante do buffer</a:t>
+            </a:r>
+          </a:p>
+        </p:txBody>
+      </p:sp>
+      <p:sp>
+        <p:nvSpPr>
+          <p:cNvPr id="6" name="Título 1">
+            <a:extLst>
+              <a:ext uri="{FF2B5EF4-FFF2-40B4-BE49-F238E27FC236}">
+                <a16:creationId xmlns:a16="http://schemas.microsoft.com/office/drawing/2014/main" id="{4A65067B-A1B8-0DBB-495B-52AEED1F2696}"/>
               </a:ext>
             </a:extLst>
           </p:cNvPr>
@@ -4325,8 +6340,8 @@
         </p:nvSpPr>
         <p:spPr>
           <a:xfrm>
-            <a:off x="1431533" y="2720526"/>
-            <a:ext cx="9144000" cy="1029541"/>
+            <a:off x="0" y="0"/>
+            <a:ext cx="10515600" cy="1325563"/>
           </a:xfrm>
           <a:prstGeom prst="rect">
             <a:avLst/>
@@ -4356,25 +6371,420 @@
             </a:lvl1pPr>
           </a:lstStyle>
           <a:p>
-            <a:pPr algn="ctr"/>
-            <a:r>
-              <a:rPr lang="pt-BR" sz="6600" dirty="0"/>
-              <a:t>Obrigado!</a:t>
-            </a:r>
-            <a:endParaRPr lang="pt-BR" sz="6600" b="1" i="1" dirty="0"/>
+            <a:r>
+              <a:rPr lang="pt-BR" dirty="0"/>
+              <a:t>Resultados Experimentais</a:t>
+            </a:r>
           </a:p>
         </p:txBody>
       </p:sp>
     </p:spTree>
     <p:extLst>
       <p:ext uri="{BB962C8B-B14F-4D97-AF65-F5344CB8AC3E}">
-        <p14:creationId xmlns:p14="http://schemas.microsoft.com/office/powerpoint/2010/main" val="2655704619"/>
+        <p14:creationId xmlns:p14="http://schemas.microsoft.com/office/powerpoint/2010/main" val="2415937467"/>
       </p:ext>
     </p:extLst>
   </p:cSld>
   <p:clrMapOvr>
     <a:masterClrMapping/>
   </p:clrMapOvr>
+</p:sld>
+</file>
+
+<file path=ppt/slides/slide19.xml><?xml version="1.0" encoding="utf-8"?>
+<p:sld xmlns:a="http://schemas.openxmlformats.org/drawingml/2006/main" xmlns:r="http://schemas.openxmlformats.org/officeDocument/2006/relationships" xmlns:p="http://schemas.openxmlformats.org/presentationml/2006/main">
+  <p:cSld>
+    <p:spTree>
+      <p:nvGrpSpPr>
+        <p:cNvPr id="1" name="">
+          <a:extLst>
+            <a:ext uri="{FF2B5EF4-FFF2-40B4-BE49-F238E27FC236}">
+              <a16:creationId xmlns:a16="http://schemas.microsoft.com/office/drawing/2014/main" id="{E1C9F56A-97FC-7CCD-E5BA-3B5E230AD9AB}"/>
+            </a:ext>
+          </a:extLst>
+        </p:cNvPr>
+        <p:cNvGrpSpPr/>
+        <p:nvPr/>
+      </p:nvGrpSpPr>
+      <p:grpSpPr>
+        <a:xfrm>
+          <a:off x="0" y="0"/>
+          <a:ext cx="0" cy="0"/>
+          <a:chOff x="0" y="0"/>
+          <a:chExt cx="0" cy="0"/>
+        </a:xfrm>
+      </p:grpSpPr>
+      <p:pic>
+        <p:nvPicPr>
+          <p:cNvPr id="9" name="Imagem 8">
+            <a:extLst>
+              <a:ext uri="{FF2B5EF4-FFF2-40B4-BE49-F238E27FC236}">
+                <a16:creationId xmlns:a16="http://schemas.microsoft.com/office/drawing/2014/main" id="{7B15F691-67D2-0AC0-0D51-B98F4A71D9BC}"/>
+              </a:ext>
+            </a:extLst>
+          </p:cNvPr>
+          <p:cNvPicPr>
+            <a:picLocks noChangeAspect="1"/>
+          </p:cNvPicPr>
+          <p:nvPr/>
+        </p:nvPicPr>
+        <p:blipFill>
+          <a:blip r:embed="rId3"/>
+          <a:stretch>
+            <a:fillRect/>
+          </a:stretch>
+        </p:blipFill>
+        <p:spPr>
+          <a:xfrm>
+            <a:off x="308742" y="1325563"/>
+            <a:ext cx="6791498" cy="5254692"/>
+          </a:xfrm>
+          <a:prstGeom prst="rect">
+            <a:avLst/>
+          </a:prstGeom>
+        </p:spPr>
+      </p:pic>
+      <p:sp>
+        <p:nvSpPr>
+          <p:cNvPr id="14" name="Espaço Reservado para Conteúdo 2">
+            <a:extLst>
+              <a:ext uri="{FF2B5EF4-FFF2-40B4-BE49-F238E27FC236}">
+                <a16:creationId xmlns:a16="http://schemas.microsoft.com/office/drawing/2014/main" id="{EB27348A-93FF-69E9-0BE4-EB522C884FAD}"/>
+              </a:ext>
+            </a:extLst>
+          </p:cNvPr>
+          <p:cNvSpPr>
+            <a:spLocks noGrp="1"/>
+          </p:cNvSpPr>
+          <p:nvPr>
+            <p:ph idx="1"/>
+          </p:nvPr>
+        </p:nvSpPr>
+        <p:spPr>
+          <a:xfrm>
+            <a:off x="7503621" y="1546374"/>
+            <a:ext cx="4688379" cy="4813069"/>
+          </a:xfrm>
+        </p:spPr>
+        <p:txBody>
+          <a:bodyPr>
+            <a:normAutofit/>
+          </a:bodyPr>
+          <a:lstStyle/>
+          <a:p>
+            <a:pPr fontAlgn="base"/>
+            <a:r>
+              <a:rPr lang="pt-BR" dirty="0"/>
+              <a:t>Cortex-M4:</a:t>
+            </a:r>
+          </a:p>
+          <a:p>
+            <a:pPr marL="0" indent="0" fontAlgn="base">
+              <a:buNone/>
+            </a:pPr>
+            <a:endParaRPr lang="pt-BR" dirty="0"/>
+          </a:p>
+          <a:p>
+            <a:pPr lvl="1" fontAlgn="base"/>
+            <a:r>
+              <a:rPr lang="pt-BR" dirty="0"/>
+              <a:t>Melhoria de 3.1% no floating-point e 7.7% no </a:t>
+            </a:r>
+            <a:r>
+              <a:rPr lang="pt-BR" dirty="0" err="1"/>
+              <a:t>fixed</a:t>
+            </a:r>
+            <a:r>
+              <a:rPr lang="pt-BR" dirty="0"/>
+              <a:t>-point</a:t>
+            </a:r>
+          </a:p>
+          <a:p>
+            <a:pPr marL="0" indent="0" fontAlgn="base">
+              <a:buNone/>
+            </a:pPr>
+            <a:endParaRPr lang="pt-BR" dirty="0"/>
+          </a:p>
+          <a:p>
+            <a:pPr lvl="1" fontAlgn="base"/>
+            <a:r>
+              <a:rPr lang="pt-BR" dirty="0" err="1"/>
+              <a:t>fixed</a:t>
+            </a:r>
+            <a:r>
+              <a:rPr lang="pt-BR" dirty="0"/>
+              <a:t>-point ≈ 15% mais rápida (7/8 &gt; número de instruções)</a:t>
+            </a:r>
+          </a:p>
+          <a:p>
+            <a:pPr lvl="1" fontAlgn="base"/>
+            <a:endParaRPr lang="pt-BR" dirty="0"/>
+          </a:p>
+          <a:p>
+            <a:pPr lvl="1" fontAlgn="base"/>
+            <a:r>
+              <a:rPr lang="pt-BR" dirty="0"/>
+              <a:t>matrizes de pesos = 88% do tempo total de computação (melhor caso)</a:t>
+            </a:r>
+          </a:p>
+          <a:p>
+            <a:pPr lvl="1" fontAlgn="base"/>
+            <a:endParaRPr lang="pt-BR" dirty="0"/>
+          </a:p>
+          <a:p>
+            <a:pPr fontAlgn="base"/>
+            <a:endParaRPr lang="pt-BR" dirty="0"/>
+          </a:p>
+        </p:txBody>
+      </p:sp>
+      <p:sp>
+        <p:nvSpPr>
+          <p:cNvPr id="15" name="CaixaDeTexto 14">
+            <a:extLst>
+              <a:ext uri="{FF2B5EF4-FFF2-40B4-BE49-F238E27FC236}">
+                <a16:creationId xmlns:a16="http://schemas.microsoft.com/office/drawing/2014/main" id="{BAA247AF-3C10-E0B1-45C0-AFA4FD5FA43A}"/>
+              </a:ext>
+            </a:extLst>
+          </p:cNvPr>
+          <p:cNvSpPr txBox="1"/>
+          <p:nvPr/>
+        </p:nvSpPr>
+        <p:spPr>
+          <a:xfrm>
+            <a:off x="3948545" y="2518756"/>
+            <a:ext cx="606829" cy="369332"/>
+          </a:xfrm>
+          <a:prstGeom prst="rect">
+            <a:avLst/>
+          </a:prstGeom>
+          <a:noFill/>
+        </p:spPr>
+        <p:txBody>
+          <a:bodyPr wrap="square" rtlCol="0">
+            <a:spAutoFit/>
+          </a:bodyPr>
+          <a:lstStyle/>
+          <a:p>
+            <a:r>
+              <a:rPr lang="pt-BR" dirty="0">
+                <a:solidFill>
+                  <a:srgbClr val="FF0000"/>
+                </a:solidFill>
+              </a:rPr>
+              <a:t>95%</a:t>
+            </a:r>
+          </a:p>
+        </p:txBody>
+      </p:sp>
+      <p:sp>
+        <p:nvSpPr>
+          <p:cNvPr id="16" name="CaixaDeTexto 15">
+            <a:extLst>
+              <a:ext uri="{FF2B5EF4-FFF2-40B4-BE49-F238E27FC236}">
+                <a16:creationId xmlns:a16="http://schemas.microsoft.com/office/drawing/2014/main" id="{C70AA6EA-2BFF-4AA4-FAD5-482652DF7300}"/>
+              </a:ext>
+            </a:extLst>
+          </p:cNvPr>
+          <p:cNvSpPr txBox="1"/>
+          <p:nvPr/>
+        </p:nvSpPr>
+        <p:spPr>
+          <a:xfrm>
+            <a:off x="3203170" y="1814946"/>
+            <a:ext cx="606829" cy="369332"/>
+          </a:xfrm>
+          <a:prstGeom prst="rect">
+            <a:avLst/>
+          </a:prstGeom>
+          <a:noFill/>
+        </p:spPr>
+        <p:txBody>
+          <a:bodyPr wrap="square" rtlCol="0">
+            <a:spAutoFit/>
+          </a:bodyPr>
+          <a:lstStyle/>
+          <a:p>
+            <a:r>
+              <a:rPr lang="pt-BR" dirty="0">
+                <a:solidFill>
+                  <a:srgbClr val="FF0000"/>
+                </a:solidFill>
+              </a:rPr>
+              <a:t>89%</a:t>
+            </a:r>
+          </a:p>
+        </p:txBody>
+      </p:sp>
+      <p:sp>
+        <p:nvSpPr>
+          <p:cNvPr id="19" name="Título 1">
+            <a:extLst>
+              <a:ext uri="{FF2B5EF4-FFF2-40B4-BE49-F238E27FC236}">
+                <a16:creationId xmlns:a16="http://schemas.microsoft.com/office/drawing/2014/main" id="{D8F1E9E7-4EFC-141F-8C0A-23D2D186CC63}"/>
+              </a:ext>
+            </a:extLst>
+          </p:cNvPr>
+          <p:cNvSpPr txBox="1">
+            <a:spLocks/>
+          </p:cNvSpPr>
+          <p:nvPr/>
+        </p:nvSpPr>
+        <p:spPr>
+          <a:xfrm>
+            <a:off x="0" y="0"/>
+            <a:ext cx="10515600" cy="1325563"/>
+          </a:xfrm>
+          <a:prstGeom prst="rect">
+            <a:avLst/>
+          </a:prstGeom>
+        </p:spPr>
+        <p:txBody>
+          <a:bodyPr vert="horz" lIns="91440" tIns="45720" rIns="91440" bIns="45720" rtlCol="0" anchor="ctr">
+            <a:normAutofit/>
+          </a:bodyPr>
+          <a:lstStyle>
+            <a:lvl1pPr algn="l" defTabSz="914400" rtl="0" eaLnBrk="1" latinLnBrk="0" hangingPunct="1">
+              <a:lnSpc>
+                <a:spcPct val="90000"/>
+              </a:lnSpc>
+              <a:spcBef>
+                <a:spcPct val="0"/>
+              </a:spcBef>
+              <a:buNone/>
+              <a:defRPr sz="4400" kern="1200">
+                <a:solidFill>
+                  <a:schemeClr val="tx1"/>
+                </a:solidFill>
+                <a:latin typeface="+mj-lt"/>
+                <a:ea typeface="+mj-ea"/>
+                <a:cs typeface="+mj-cs"/>
+              </a:defRPr>
+            </a:lvl1pPr>
+          </a:lstStyle>
+          <a:p>
+            <a:r>
+              <a:rPr lang="pt-BR" dirty="0"/>
+              <a:t>Resultados Experimentais</a:t>
+            </a:r>
+          </a:p>
+        </p:txBody>
+      </p:sp>
+    </p:spTree>
+    <p:extLst>
+      <p:ext uri="{BB962C8B-B14F-4D97-AF65-F5344CB8AC3E}">
+        <p14:creationId xmlns:p14="http://schemas.microsoft.com/office/powerpoint/2010/main" val="3906980817"/>
+      </p:ext>
+    </p:extLst>
+  </p:cSld>
+  <p:clrMapOvr>
+    <a:masterClrMapping/>
+  </p:clrMapOvr>
+  <p:timing>
+    <p:tnLst>
+      <p:par>
+        <p:cTn id="1" dur="indefinite" restart="never" nodeType="tmRoot">
+          <p:childTnLst>
+            <p:seq concurrent="1" nextAc="seek">
+              <p:cTn id="2" dur="indefinite" nodeType="mainSeq">
+                <p:childTnLst>
+                  <p:par>
+                    <p:cTn id="3" fill="hold">
+                      <p:stCondLst>
+                        <p:cond delay="indefinite"/>
+                      </p:stCondLst>
+                      <p:childTnLst>
+                        <p:par>
+                          <p:cTn id="4" fill="hold">
+                            <p:stCondLst>
+                              <p:cond delay="0"/>
+                            </p:stCondLst>
+                            <p:childTnLst>
+                              <p:par>
+                                <p:cTn id="5" presetID="1" presetClass="entr" presetSubtype="0" fill="hold" grpId="0" nodeType="clickEffect">
+                                  <p:stCondLst>
+                                    <p:cond delay="0"/>
+                                  </p:stCondLst>
+                                  <p:childTnLst>
+                                    <p:set>
+                                      <p:cBhvr>
+                                        <p:cTn id="6" dur="1" fill="hold">
+                                          <p:stCondLst>
+                                            <p:cond delay="0"/>
+                                          </p:stCondLst>
+                                        </p:cTn>
+                                        <p:tgtEl>
+                                          <p:spTgt spid="16"/>
+                                        </p:tgtEl>
+                                        <p:attrNameLst>
+                                          <p:attrName>style.visibility</p:attrName>
+                                        </p:attrNameLst>
+                                      </p:cBhvr>
+                                      <p:to>
+                                        <p:strVal val="visible"/>
+                                      </p:to>
+                                    </p:set>
+                                  </p:childTnLst>
+                                </p:cTn>
+                              </p:par>
+                              <p:par>
+                                <p:cTn id="7" presetID="1" presetClass="entr" presetSubtype="0" fill="hold" grpId="0" nodeType="withEffect">
+                                  <p:stCondLst>
+                                    <p:cond delay="0"/>
+                                  </p:stCondLst>
+                                  <p:childTnLst>
+                                    <p:set>
+                                      <p:cBhvr>
+                                        <p:cTn id="8" dur="1" fill="hold">
+                                          <p:stCondLst>
+                                            <p:cond delay="0"/>
+                                          </p:stCondLst>
+                                        </p:cTn>
+                                        <p:tgtEl>
+                                          <p:spTgt spid="15"/>
+                                        </p:tgtEl>
+                                        <p:attrNameLst>
+                                          <p:attrName>style.visibility</p:attrName>
+                                        </p:attrNameLst>
+                                      </p:cBhvr>
+                                      <p:to>
+                                        <p:strVal val="visible"/>
+                                      </p:to>
+                                    </p:set>
+                                  </p:childTnLst>
+                                </p:cTn>
+                              </p:par>
+                            </p:childTnLst>
+                          </p:cTn>
+                        </p:par>
+                      </p:childTnLst>
+                    </p:cTn>
+                  </p:par>
+                </p:childTnLst>
+              </p:cTn>
+              <p:prevCondLst>
+                <p:cond evt="onPrev" delay="0">
+                  <p:tgtEl>
+                    <p:sldTgt/>
+                  </p:tgtEl>
+                </p:cond>
+              </p:prevCondLst>
+              <p:nextCondLst>
+                <p:cond evt="onNext" delay="0">
+                  <p:tgtEl>
+                    <p:sldTgt/>
+                  </p:tgtEl>
+                </p:cond>
+              </p:nextCondLst>
+            </p:seq>
+          </p:childTnLst>
+        </p:cTn>
+      </p:par>
+    </p:tnLst>
+    <p:bldLst>
+      <p:bldP spid="15" grpId="0"/>
+      <p:bldP spid="16" grpId="0"/>
+    </p:bldLst>
+  </p:timing>
 </p:sld>
 </file>
 
@@ -4411,14 +6821,19 @@
             <p:ph type="title"/>
           </p:nvPr>
         </p:nvSpPr>
-        <p:spPr/>
+        <p:spPr>
+          <a:xfrm>
+            <a:off x="0" y="0"/>
+            <a:ext cx="10515600" cy="1325563"/>
+          </a:xfrm>
+        </p:spPr>
         <p:txBody>
           <a:bodyPr/>
           <a:lstStyle/>
           <a:p>
             <a:r>
               <a:rPr lang="pt-BR" dirty="0"/>
-              <a:t>Abertura</a:t>
+              <a:t>Abertura </a:t>
             </a:r>
           </a:p>
         </p:txBody>
@@ -4439,29 +6854,105 @@
             <p:ph idx="1"/>
           </p:nvPr>
         </p:nvSpPr>
-        <p:spPr/>
-        <p:txBody>
-          <a:bodyPr/>
-          <a:lstStyle/>
-          <a:p>
-            <a:pPr fontAlgn="base"/>
-            <a:r>
-              <a:rPr lang="pt-BR" dirty="0"/>
-              <a:t>Contexto do tema</a:t>
-            </a:r>
-          </a:p>
-          <a:p>
-            <a:pPr fontAlgn="base"/>
-            <a:r>
-              <a:rPr lang="pt-BR" dirty="0"/>
-              <a:t>Problema geral da área</a:t>
-            </a:r>
-          </a:p>
-          <a:p>
-            <a:pPr fontAlgn="base"/>
-            <a:r>
-              <a:rPr lang="pt-BR" dirty="0"/>
-              <a:t>Motivação do artigo</a:t>
+        <p:spPr>
+          <a:xfrm>
+            <a:off x="838200" y="1690688"/>
+            <a:ext cx="10850880" cy="4351338"/>
+          </a:xfrm>
+        </p:spPr>
+        <p:txBody>
+          <a:bodyPr>
+            <a:normAutofit fontScale="85000" lnSpcReduction="20000"/>
+          </a:bodyPr>
+          <a:lstStyle/>
+          <a:p>
+            <a:pPr fontAlgn="base"/>
+            <a:r>
+              <a:rPr lang="pt-BR" dirty="0"/>
+              <a:t>Expansão das aplicações de Internet das Coisas (IoT):</a:t>
+            </a:r>
+          </a:p>
+          <a:p>
+            <a:pPr lvl="1" fontAlgn="base"/>
+            <a:r>
+              <a:rPr lang="pt-BR" dirty="0"/>
+              <a:t>Dispositivos de baixa potência.</a:t>
+            </a:r>
+          </a:p>
+          <a:p>
+            <a:pPr fontAlgn="base"/>
+            <a:endParaRPr lang="pt-BR" dirty="0"/>
+          </a:p>
+          <a:p>
+            <a:pPr fontAlgn="base"/>
+            <a:r>
+              <a:rPr lang="pt-BR" dirty="0"/>
+              <a:t>Necessidade de processamento de dados próximo à fonte:</a:t>
+            </a:r>
+          </a:p>
+          <a:p>
+            <a:pPr lvl="1" fontAlgn="base"/>
+            <a:r>
+              <a:rPr lang="pt-BR" dirty="0"/>
+              <a:t>Edge </a:t>
+            </a:r>
+            <a:r>
+              <a:rPr lang="pt-BR" dirty="0" err="1"/>
+              <a:t>Computing</a:t>
+            </a:r>
+            <a:r>
+              <a:rPr lang="pt-BR" dirty="0"/>
+              <a:t>.</a:t>
+            </a:r>
+          </a:p>
+          <a:p>
+            <a:pPr lvl="1" fontAlgn="base"/>
+            <a:endParaRPr lang="pt-BR" dirty="0"/>
+          </a:p>
+          <a:p>
+            <a:pPr fontAlgn="base"/>
+            <a:r>
+              <a:rPr lang="pt-BR" dirty="0"/>
+              <a:t>Limitações de hardware:</a:t>
+            </a:r>
+          </a:p>
+          <a:p>
+            <a:pPr marL="0" indent="0" fontAlgn="base">
+              <a:buNone/>
+            </a:pPr>
+            <a:endParaRPr lang="pt-BR" dirty="0"/>
+          </a:p>
+          <a:p>
+            <a:pPr lvl="1" fontAlgn="base"/>
+            <a:r>
+              <a:rPr lang="pt-BR" dirty="0"/>
+              <a:t>memória reduzida;</a:t>
+            </a:r>
+          </a:p>
+          <a:p>
+            <a:pPr marL="457200" lvl="1" indent="0" fontAlgn="base">
+              <a:buNone/>
+            </a:pPr>
+            <a:endParaRPr lang="pt-BR" dirty="0"/>
+          </a:p>
+          <a:p>
+            <a:pPr lvl="1" fontAlgn="base"/>
+            <a:r>
+              <a:rPr lang="pt-BR" dirty="0"/>
+              <a:t>capacidade computacional limitada;</a:t>
+            </a:r>
+          </a:p>
+          <a:p>
+            <a:pPr marL="457200" lvl="1" indent="0" fontAlgn="base">
+              <a:buNone/>
+            </a:pPr>
+            <a:endParaRPr lang="pt-BR" dirty="0"/>
+          </a:p>
+          <a:p>
+            <a:pPr lvl="1" fontAlgn="base"/>
+            <a:r>
+              <a:rPr lang="pt-BR" dirty="0"/>
+              <a:t>restrições energéticas.</a:t>
             </a:r>
           </a:p>
         </p:txBody>
@@ -4479,7 +6970,2662 @@
 </p:sld>
 </file>
 
+<file path=ppt/slides/slide20.xml><?xml version="1.0" encoding="utf-8"?>
+<p:sld xmlns:a="http://schemas.openxmlformats.org/drawingml/2006/main" xmlns:r="http://schemas.openxmlformats.org/officeDocument/2006/relationships" xmlns:p="http://schemas.openxmlformats.org/presentationml/2006/main">
+  <p:cSld>
+    <p:spTree>
+      <p:nvGrpSpPr>
+        <p:cNvPr id="1" name="">
+          <a:extLst>
+            <a:ext uri="{FF2B5EF4-FFF2-40B4-BE49-F238E27FC236}">
+              <a16:creationId xmlns:a16="http://schemas.microsoft.com/office/drawing/2014/main" id="{E1C9F56A-97FC-7CCD-E5BA-3B5E230AD9AB}"/>
+            </a:ext>
+          </a:extLst>
+        </p:cNvPr>
+        <p:cNvGrpSpPr/>
+        <p:nvPr/>
+      </p:nvGrpSpPr>
+      <p:grpSpPr>
+        <a:xfrm>
+          <a:off x="0" y="0"/>
+          <a:ext cx="0" cy="0"/>
+          <a:chOff x="0" y="0"/>
+          <a:chExt cx="0" cy="0"/>
+        </a:xfrm>
+      </p:grpSpPr>
+      <p:pic>
+        <p:nvPicPr>
+          <p:cNvPr id="9" name="Imagem 8">
+            <a:extLst>
+              <a:ext uri="{FF2B5EF4-FFF2-40B4-BE49-F238E27FC236}">
+                <a16:creationId xmlns:a16="http://schemas.microsoft.com/office/drawing/2014/main" id="{7B15F691-67D2-0AC0-0D51-B98F4A71D9BC}"/>
+              </a:ext>
+            </a:extLst>
+          </p:cNvPr>
+          <p:cNvPicPr>
+            <a:picLocks noChangeAspect="1"/>
+          </p:cNvPicPr>
+          <p:nvPr/>
+        </p:nvPicPr>
+        <p:blipFill>
+          <a:blip r:embed="rId3"/>
+          <a:stretch>
+            <a:fillRect/>
+          </a:stretch>
+        </p:blipFill>
+        <p:spPr>
+          <a:xfrm>
+            <a:off x="304907" y="1325563"/>
+            <a:ext cx="6791498" cy="5254692"/>
+          </a:xfrm>
+          <a:prstGeom prst="rect">
+            <a:avLst/>
+          </a:prstGeom>
+        </p:spPr>
+      </p:pic>
+      <p:sp>
+        <p:nvSpPr>
+          <p:cNvPr id="14" name="Espaço Reservado para Conteúdo 2">
+            <a:extLst>
+              <a:ext uri="{FF2B5EF4-FFF2-40B4-BE49-F238E27FC236}">
+                <a16:creationId xmlns:a16="http://schemas.microsoft.com/office/drawing/2014/main" id="{EB27348A-93FF-69E9-0BE4-EB522C884FAD}"/>
+              </a:ext>
+            </a:extLst>
+          </p:cNvPr>
+          <p:cNvSpPr>
+            <a:spLocks noGrp="1"/>
+          </p:cNvSpPr>
+          <p:nvPr>
+            <p:ph idx="1"/>
+          </p:nvPr>
+        </p:nvSpPr>
+        <p:spPr>
+          <a:xfrm>
+            <a:off x="7365076" y="1546374"/>
+            <a:ext cx="4688379" cy="4813069"/>
+          </a:xfrm>
+        </p:spPr>
+        <p:txBody>
+          <a:bodyPr>
+            <a:normAutofit/>
+          </a:bodyPr>
+          <a:lstStyle/>
+          <a:p>
+            <a:pPr fontAlgn="base"/>
+            <a:r>
+              <a:rPr lang="pt-BR" sz="2400" dirty="0"/>
+              <a:t>RI5CY (single core) versus Cortex-M4:</a:t>
+            </a:r>
+          </a:p>
+          <a:p>
+            <a:pPr lvl="1" fontAlgn="base"/>
+            <a:r>
+              <a:rPr lang="pt-BR" dirty="0"/>
+              <a:t>1.3× mais rápido (</a:t>
+            </a:r>
+            <a:r>
+              <a:rPr lang="pt-BR" dirty="0" err="1"/>
+              <a:t>float</a:t>
+            </a:r>
+            <a:r>
+              <a:rPr lang="pt-BR" dirty="0"/>
+              <a:t>)</a:t>
+            </a:r>
+          </a:p>
+          <a:p>
+            <a:pPr lvl="1" fontAlgn="base"/>
+            <a:endParaRPr lang="pt-BR" dirty="0"/>
+          </a:p>
+          <a:p>
+            <a:pPr lvl="1" fontAlgn="base"/>
+            <a:r>
+              <a:rPr lang="pt-BR" dirty="0"/>
+              <a:t>1.4× mais rápido (</a:t>
+            </a:r>
+            <a:r>
+              <a:rPr lang="pt-BR" dirty="0" err="1"/>
+              <a:t>fixed</a:t>
+            </a:r>
+            <a:r>
+              <a:rPr lang="pt-BR" dirty="0"/>
+              <a:t>)</a:t>
+            </a:r>
+          </a:p>
+          <a:p>
+            <a:pPr marL="457200" lvl="1" indent="0" fontAlgn="base">
+              <a:buNone/>
+            </a:pPr>
+            <a:endParaRPr lang="pt-BR" dirty="0"/>
+          </a:p>
+          <a:p>
+            <a:pPr fontAlgn="base"/>
+            <a:r>
+              <a:rPr lang="pt-BR" dirty="0"/>
+              <a:t>Paralelização = até 6× de </a:t>
+            </a:r>
+            <a:r>
+              <a:rPr lang="pt-BR" dirty="0" err="1"/>
+              <a:t>speedup</a:t>
+            </a:r>
+            <a:endParaRPr lang="pt-BR" dirty="0"/>
+          </a:p>
+          <a:p>
+            <a:pPr fontAlgn="base"/>
+            <a:endParaRPr lang="pt-BR" dirty="0"/>
+          </a:p>
+          <a:p>
+            <a:pPr fontAlgn="base"/>
+            <a:r>
+              <a:rPr lang="pt-BR" dirty="0">
+                <a:solidFill>
+                  <a:srgbClr val="FF0000"/>
+                </a:solidFill>
+              </a:rPr>
+              <a:t>Ativação passa a representar uma fração maior do </a:t>
+            </a:r>
+            <a:r>
+              <a:rPr lang="pt-BR" dirty="0" err="1">
+                <a:solidFill>
+                  <a:srgbClr val="FF0000"/>
+                </a:solidFill>
+              </a:rPr>
+              <a:t>runtime</a:t>
+            </a:r>
+            <a:endParaRPr lang="pt-BR" dirty="0">
+              <a:solidFill>
+                <a:srgbClr val="FF0000"/>
+              </a:solidFill>
+            </a:endParaRPr>
+          </a:p>
+          <a:p>
+            <a:pPr marL="457200" lvl="1" indent="0" fontAlgn="base">
+              <a:buNone/>
+            </a:pPr>
+            <a:endParaRPr lang="pt-BR" dirty="0"/>
+          </a:p>
+          <a:p>
+            <a:pPr fontAlgn="base"/>
+            <a:endParaRPr lang="pt-BR" dirty="0"/>
+          </a:p>
+        </p:txBody>
+      </p:sp>
+      <p:sp>
+        <p:nvSpPr>
+          <p:cNvPr id="5" name="Título 1">
+            <a:extLst>
+              <a:ext uri="{FF2B5EF4-FFF2-40B4-BE49-F238E27FC236}">
+                <a16:creationId xmlns:a16="http://schemas.microsoft.com/office/drawing/2014/main" id="{37A4BC5B-64A3-BB1D-C08A-8F19A87E688D}"/>
+              </a:ext>
+            </a:extLst>
+          </p:cNvPr>
+          <p:cNvSpPr txBox="1">
+            <a:spLocks/>
+          </p:cNvSpPr>
+          <p:nvPr/>
+        </p:nvSpPr>
+        <p:spPr>
+          <a:xfrm>
+            <a:off x="0" y="0"/>
+            <a:ext cx="10515600" cy="1325563"/>
+          </a:xfrm>
+          <a:prstGeom prst="rect">
+            <a:avLst/>
+          </a:prstGeom>
+        </p:spPr>
+        <p:txBody>
+          <a:bodyPr vert="horz" lIns="91440" tIns="45720" rIns="91440" bIns="45720" rtlCol="0" anchor="ctr">
+            <a:normAutofit/>
+          </a:bodyPr>
+          <a:lstStyle>
+            <a:lvl1pPr algn="l" defTabSz="914400" rtl="0" eaLnBrk="1" latinLnBrk="0" hangingPunct="1">
+              <a:lnSpc>
+                <a:spcPct val="90000"/>
+              </a:lnSpc>
+              <a:spcBef>
+                <a:spcPct val="0"/>
+              </a:spcBef>
+              <a:buNone/>
+              <a:defRPr sz="4400" kern="1200">
+                <a:solidFill>
+                  <a:schemeClr val="tx1"/>
+                </a:solidFill>
+                <a:latin typeface="+mj-lt"/>
+                <a:ea typeface="+mj-ea"/>
+                <a:cs typeface="+mj-cs"/>
+              </a:defRPr>
+            </a:lvl1pPr>
+          </a:lstStyle>
+          <a:p>
+            <a:r>
+              <a:rPr lang="pt-BR" dirty="0"/>
+              <a:t>Resultados Experimentais</a:t>
+            </a:r>
+          </a:p>
+        </p:txBody>
+      </p:sp>
+    </p:spTree>
+    <p:extLst>
+      <p:ext uri="{BB962C8B-B14F-4D97-AF65-F5344CB8AC3E}">
+        <p14:creationId xmlns:p14="http://schemas.microsoft.com/office/powerpoint/2010/main" val="2827362996"/>
+      </p:ext>
+    </p:extLst>
+  </p:cSld>
+  <p:clrMapOvr>
+    <a:masterClrMapping/>
+  </p:clrMapOvr>
+</p:sld>
+</file>
+
+<file path=ppt/slides/slide21.xml><?xml version="1.0" encoding="utf-8"?>
+<p:sld xmlns:a="http://schemas.openxmlformats.org/drawingml/2006/main" xmlns:r="http://schemas.openxmlformats.org/officeDocument/2006/relationships" xmlns:p="http://schemas.openxmlformats.org/presentationml/2006/main">
+  <p:cSld>
+    <p:spTree>
+      <p:nvGrpSpPr>
+        <p:cNvPr id="1" name="">
+          <a:extLst>
+            <a:ext uri="{FF2B5EF4-FFF2-40B4-BE49-F238E27FC236}">
+              <a16:creationId xmlns:a16="http://schemas.microsoft.com/office/drawing/2014/main" id="{E1C9F56A-97FC-7CCD-E5BA-3B5E230AD9AB}"/>
+            </a:ext>
+          </a:extLst>
+        </p:cNvPr>
+        <p:cNvGrpSpPr/>
+        <p:nvPr/>
+      </p:nvGrpSpPr>
+      <p:grpSpPr>
+        <a:xfrm>
+          <a:off x="0" y="0"/>
+          <a:ext cx="0" cy="0"/>
+          <a:chOff x="0" y="0"/>
+          <a:chExt cx="0" cy="0"/>
+        </a:xfrm>
+      </p:grpSpPr>
+      <p:sp>
+        <p:nvSpPr>
+          <p:cNvPr id="3" name="Espaço Reservado para Conteúdo 2">
+            <a:extLst>
+              <a:ext uri="{FF2B5EF4-FFF2-40B4-BE49-F238E27FC236}">
+                <a16:creationId xmlns:a16="http://schemas.microsoft.com/office/drawing/2014/main" id="{F22F88A5-87D1-340F-853F-8C2ED8F8C877}"/>
+              </a:ext>
+            </a:extLst>
+          </p:cNvPr>
+          <p:cNvSpPr>
+            <a:spLocks noGrp="1"/>
+          </p:cNvSpPr>
+          <p:nvPr>
+            <p:ph idx="1"/>
+          </p:nvPr>
+        </p:nvSpPr>
+        <p:spPr>
+          <a:xfrm>
+            <a:off x="838200" y="1325563"/>
+            <a:ext cx="10515600" cy="5133852"/>
+          </a:xfrm>
+        </p:spPr>
+        <p:txBody>
+          <a:bodyPr>
+            <a:normAutofit lnSpcReduction="10000"/>
+          </a:bodyPr>
+          <a:lstStyle/>
+          <a:p>
+            <a:pPr fontAlgn="base"/>
+            <a:r>
+              <a:rPr lang="pt-BR" dirty="0"/>
+              <a:t>Análise de desempenho de uma única camada</a:t>
+            </a:r>
+          </a:p>
+          <a:p>
+            <a:pPr fontAlgn="base"/>
+            <a:endParaRPr lang="pt-BR" dirty="0"/>
+          </a:p>
+          <a:p>
+            <a:pPr fontAlgn="base"/>
+            <a:r>
+              <a:rPr lang="pt-BR" dirty="0"/>
+              <a:t>Cálculo das matrizes de pesos sem considerar as funções de ativação</a:t>
+            </a:r>
+          </a:p>
+          <a:p>
+            <a:pPr fontAlgn="base"/>
+            <a:endParaRPr lang="pt-BR" dirty="0"/>
+          </a:p>
+          <a:p>
+            <a:pPr fontAlgn="base"/>
+            <a:r>
+              <a:rPr lang="pt-BR" dirty="0"/>
+              <a:t>STM32L475VG com ARM Cortex-M4, utilizando implementação em ponto fixo</a:t>
+            </a:r>
+          </a:p>
+          <a:p>
+            <a:pPr fontAlgn="base"/>
+            <a:endParaRPr lang="pt-BR" dirty="0"/>
+          </a:p>
+          <a:p>
+            <a:pPr fontAlgn="base"/>
+            <a:r>
+              <a:rPr lang="pt-BR" dirty="0"/>
+              <a:t>Núcleo IBEX utilizando o conjunto básico de instruções RV32IM</a:t>
+            </a:r>
+          </a:p>
+          <a:p>
+            <a:pPr fontAlgn="base"/>
+            <a:endParaRPr lang="pt-BR" dirty="0"/>
+          </a:p>
+          <a:p>
+            <a:pPr fontAlgn="base"/>
+            <a:r>
+              <a:rPr lang="pt-BR" dirty="0"/>
+              <a:t>Tempo de execução em número de ciclos de uma única camada ao variar o número de entradas e o número de saídas da camada</a:t>
+            </a:r>
+          </a:p>
+          <a:p>
+            <a:pPr fontAlgn="base"/>
+            <a:endParaRPr lang="pt-BR" dirty="0"/>
+          </a:p>
+          <a:p>
+            <a:pPr fontAlgn="base"/>
+            <a:endParaRPr lang="pt-BR" dirty="0"/>
+          </a:p>
+        </p:txBody>
+      </p:sp>
+      <p:sp>
+        <p:nvSpPr>
+          <p:cNvPr id="6" name="Título 1">
+            <a:extLst>
+              <a:ext uri="{FF2B5EF4-FFF2-40B4-BE49-F238E27FC236}">
+                <a16:creationId xmlns:a16="http://schemas.microsoft.com/office/drawing/2014/main" id="{4A65067B-A1B8-0DBB-495B-52AEED1F2696}"/>
+              </a:ext>
+            </a:extLst>
+          </p:cNvPr>
+          <p:cNvSpPr txBox="1">
+            <a:spLocks/>
+          </p:cNvSpPr>
+          <p:nvPr/>
+        </p:nvSpPr>
+        <p:spPr>
+          <a:xfrm>
+            <a:off x="0" y="0"/>
+            <a:ext cx="10515600" cy="1325563"/>
+          </a:xfrm>
+          <a:prstGeom prst="rect">
+            <a:avLst/>
+          </a:prstGeom>
+        </p:spPr>
+        <p:txBody>
+          <a:bodyPr vert="horz" lIns="91440" tIns="45720" rIns="91440" bIns="45720" rtlCol="0" anchor="ctr">
+            <a:normAutofit/>
+          </a:bodyPr>
+          <a:lstStyle>
+            <a:lvl1pPr algn="l" defTabSz="914400" rtl="0" eaLnBrk="1" latinLnBrk="0" hangingPunct="1">
+              <a:lnSpc>
+                <a:spcPct val="90000"/>
+              </a:lnSpc>
+              <a:spcBef>
+                <a:spcPct val="0"/>
+              </a:spcBef>
+              <a:buNone/>
+              <a:defRPr sz="4400" kern="1200">
+                <a:solidFill>
+                  <a:schemeClr val="tx1"/>
+                </a:solidFill>
+                <a:latin typeface="+mj-lt"/>
+                <a:ea typeface="+mj-ea"/>
+                <a:cs typeface="+mj-cs"/>
+              </a:defRPr>
+            </a:lvl1pPr>
+          </a:lstStyle>
+          <a:p>
+            <a:r>
+              <a:rPr lang="pt-BR" dirty="0"/>
+              <a:t>Resultados Experimentais</a:t>
+            </a:r>
+          </a:p>
+        </p:txBody>
+      </p:sp>
+    </p:spTree>
+    <p:extLst>
+      <p:ext uri="{BB962C8B-B14F-4D97-AF65-F5344CB8AC3E}">
+        <p14:creationId xmlns:p14="http://schemas.microsoft.com/office/powerpoint/2010/main" val="2527822661"/>
+      </p:ext>
+    </p:extLst>
+  </p:cSld>
+  <p:clrMapOvr>
+    <a:masterClrMapping/>
+  </p:clrMapOvr>
+</p:sld>
+</file>
+
+<file path=ppt/slides/slide22.xml><?xml version="1.0" encoding="utf-8"?>
+<p:sld xmlns:a="http://schemas.openxmlformats.org/drawingml/2006/main" xmlns:r="http://schemas.openxmlformats.org/officeDocument/2006/relationships" xmlns:p="http://schemas.openxmlformats.org/presentationml/2006/main">
+  <p:cSld>
+    <p:spTree>
+      <p:nvGrpSpPr>
+        <p:cNvPr id="1" name="">
+          <a:extLst>
+            <a:ext uri="{FF2B5EF4-FFF2-40B4-BE49-F238E27FC236}">
+              <a16:creationId xmlns:a16="http://schemas.microsoft.com/office/drawing/2014/main" id="{E1C9F56A-97FC-7CCD-E5BA-3B5E230AD9AB}"/>
+            </a:ext>
+          </a:extLst>
+        </p:cNvPr>
+        <p:cNvGrpSpPr/>
+        <p:nvPr/>
+      </p:nvGrpSpPr>
+      <p:grpSpPr>
+        <a:xfrm>
+          <a:off x="0" y="0"/>
+          <a:ext cx="0" cy="0"/>
+          <a:chOff x="0" y="0"/>
+          <a:chExt cx="0" cy="0"/>
+        </a:xfrm>
+      </p:grpSpPr>
+      <p:pic>
+        <p:nvPicPr>
+          <p:cNvPr id="13" name="Imagem 12">
+            <a:extLst>
+              <a:ext uri="{FF2B5EF4-FFF2-40B4-BE49-F238E27FC236}">
+                <a16:creationId xmlns:a16="http://schemas.microsoft.com/office/drawing/2014/main" id="{3088DDCE-D85B-47DA-48D6-F1B6A1A2F52A}"/>
+              </a:ext>
+            </a:extLst>
+          </p:cNvPr>
+          <p:cNvPicPr>
+            <a:picLocks noChangeAspect="1"/>
+          </p:cNvPicPr>
+          <p:nvPr/>
+        </p:nvPicPr>
+        <p:blipFill>
+          <a:blip r:embed="rId3"/>
+          <a:stretch>
+            <a:fillRect/>
+          </a:stretch>
+        </p:blipFill>
+        <p:spPr>
+          <a:xfrm>
+            <a:off x="206803" y="143326"/>
+            <a:ext cx="11778393" cy="6714674"/>
+          </a:xfrm>
+          <a:prstGeom prst="rect">
+            <a:avLst/>
+          </a:prstGeom>
+        </p:spPr>
+      </p:pic>
+      <p:cxnSp>
+        <p:nvCxnSpPr>
+          <p:cNvPr id="3" name="Conector de Seta Reta 2">
+            <a:extLst>
+              <a:ext uri="{FF2B5EF4-FFF2-40B4-BE49-F238E27FC236}">
+                <a16:creationId xmlns:a16="http://schemas.microsoft.com/office/drawing/2014/main" id="{94BEA342-8272-5659-B659-0613EA474AE5}"/>
+              </a:ext>
+            </a:extLst>
+          </p:cNvPr>
+          <p:cNvCxnSpPr/>
+          <p:nvPr/>
+        </p:nvCxnSpPr>
+        <p:spPr>
+          <a:xfrm flipH="1">
+            <a:off x="1547446" y="2508738"/>
+            <a:ext cx="2180492" cy="1524000"/>
+          </a:xfrm>
+          <a:prstGeom prst="straightConnector1">
+            <a:avLst/>
+          </a:prstGeom>
+          <a:ln w="38100">
+            <a:solidFill>
+              <a:srgbClr val="FF0000"/>
+            </a:solidFill>
+            <a:tailEnd type="triangle"/>
+          </a:ln>
+        </p:spPr>
+        <p:style>
+          <a:lnRef idx="1">
+            <a:schemeClr val="accent1"/>
+          </a:lnRef>
+          <a:fillRef idx="0">
+            <a:schemeClr val="accent1"/>
+          </a:fillRef>
+          <a:effectRef idx="0">
+            <a:schemeClr val="accent1"/>
+          </a:effectRef>
+          <a:fontRef idx="minor">
+            <a:schemeClr val="tx1"/>
+          </a:fontRef>
+        </p:style>
+      </p:cxnSp>
+      <p:sp>
+        <p:nvSpPr>
+          <p:cNvPr id="4" name="CaixaDeTexto 3">
+            <a:extLst>
+              <a:ext uri="{FF2B5EF4-FFF2-40B4-BE49-F238E27FC236}">
+                <a16:creationId xmlns:a16="http://schemas.microsoft.com/office/drawing/2014/main" id="{432C0DDA-02DF-937E-FB17-0D5A9416B736}"/>
+              </a:ext>
+            </a:extLst>
+          </p:cNvPr>
+          <p:cNvSpPr txBox="1"/>
+          <p:nvPr/>
+        </p:nvSpPr>
+        <p:spPr>
+          <a:xfrm>
+            <a:off x="3474242" y="2139406"/>
+            <a:ext cx="1594339" cy="369332"/>
+          </a:xfrm>
+          <a:prstGeom prst="rect">
+            <a:avLst/>
+          </a:prstGeom>
+          <a:noFill/>
+        </p:spPr>
+        <p:txBody>
+          <a:bodyPr wrap="square" rtlCol="0">
+            <a:spAutoFit/>
+          </a:bodyPr>
+          <a:lstStyle/>
+          <a:p>
+            <a:pPr algn="ctr"/>
+            <a:r>
+              <a:rPr lang="pt-BR" dirty="0">
+                <a:solidFill>
+                  <a:srgbClr val="FF0000"/>
+                </a:solidFill>
+              </a:rPr>
+              <a:t>RAM + FLASH</a:t>
+            </a:r>
+          </a:p>
+        </p:txBody>
+      </p:sp>
+      <p:cxnSp>
+        <p:nvCxnSpPr>
+          <p:cNvPr id="5" name="Conector de Seta Reta 4">
+            <a:extLst>
+              <a:ext uri="{FF2B5EF4-FFF2-40B4-BE49-F238E27FC236}">
+                <a16:creationId xmlns:a16="http://schemas.microsoft.com/office/drawing/2014/main" id="{EB50CEA8-CCF3-2484-A401-5B3AFB8C0CC3}"/>
+              </a:ext>
+            </a:extLst>
+          </p:cNvPr>
+          <p:cNvCxnSpPr/>
+          <p:nvPr/>
+        </p:nvCxnSpPr>
+        <p:spPr>
+          <a:xfrm flipH="1">
+            <a:off x="7373818" y="2930769"/>
+            <a:ext cx="2180492" cy="1524000"/>
+          </a:xfrm>
+          <a:prstGeom prst="straightConnector1">
+            <a:avLst/>
+          </a:prstGeom>
+          <a:ln w="38100">
+            <a:solidFill>
+              <a:srgbClr val="FF0000"/>
+            </a:solidFill>
+            <a:tailEnd type="triangle"/>
+          </a:ln>
+        </p:spPr>
+        <p:style>
+          <a:lnRef idx="1">
+            <a:schemeClr val="accent1"/>
+          </a:lnRef>
+          <a:fillRef idx="0">
+            <a:schemeClr val="accent1"/>
+          </a:fillRef>
+          <a:effectRef idx="0">
+            <a:schemeClr val="accent1"/>
+          </a:effectRef>
+          <a:fontRef idx="minor">
+            <a:schemeClr val="tx1"/>
+          </a:fontRef>
+        </p:style>
+      </p:cxnSp>
+      <p:sp>
+        <p:nvSpPr>
+          <p:cNvPr id="6" name="CaixaDeTexto 5">
+            <a:extLst>
+              <a:ext uri="{FF2B5EF4-FFF2-40B4-BE49-F238E27FC236}">
+                <a16:creationId xmlns:a16="http://schemas.microsoft.com/office/drawing/2014/main" id="{FE9F041E-95C6-8508-16CA-5B55094DABF4}"/>
+              </a:ext>
+            </a:extLst>
+          </p:cNvPr>
+          <p:cNvSpPr txBox="1"/>
+          <p:nvPr/>
+        </p:nvSpPr>
+        <p:spPr>
+          <a:xfrm>
+            <a:off x="9384780" y="2508738"/>
+            <a:ext cx="2180492" cy="646331"/>
+          </a:xfrm>
+          <a:prstGeom prst="rect">
+            <a:avLst/>
+          </a:prstGeom>
+          <a:noFill/>
+        </p:spPr>
+        <p:txBody>
+          <a:bodyPr wrap="square" rtlCol="0">
+            <a:spAutoFit/>
+          </a:bodyPr>
+          <a:lstStyle/>
+          <a:p>
+            <a:pPr algn="ctr"/>
+            <a:r>
+              <a:rPr lang="pt-BR" dirty="0">
+                <a:solidFill>
+                  <a:srgbClr val="FF0000"/>
+                </a:solidFill>
+              </a:rPr>
+              <a:t>L2 DEDIDACA + L2 COMPARTILHADA</a:t>
+            </a:r>
+          </a:p>
+        </p:txBody>
+      </p:sp>
+    </p:spTree>
+    <p:extLst>
+      <p:ext uri="{BB962C8B-B14F-4D97-AF65-F5344CB8AC3E}">
+        <p14:creationId xmlns:p14="http://schemas.microsoft.com/office/powerpoint/2010/main" val="3443472341"/>
+      </p:ext>
+    </p:extLst>
+  </p:cSld>
+  <p:clrMapOvr>
+    <a:masterClrMapping/>
+  </p:clrMapOvr>
+  <p:timing>
+    <p:tnLst>
+      <p:par>
+        <p:cTn id="1" dur="indefinite" restart="never" nodeType="tmRoot">
+          <p:childTnLst>
+            <p:seq concurrent="1" nextAc="seek">
+              <p:cTn id="2" dur="indefinite" nodeType="mainSeq">
+                <p:childTnLst>
+                  <p:par>
+                    <p:cTn id="3" fill="hold">
+                      <p:stCondLst>
+                        <p:cond delay="indefinite"/>
+                      </p:stCondLst>
+                      <p:childTnLst>
+                        <p:par>
+                          <p:cTn id="4" fill="hold">
+                            <p:stCondLst>
+                              <p:cond delay="0"/>
+                            </p:stCondLst>
+                            <p:childTnLst>
+                              <p:par>
+                                <p:cTn id="5" presetID="1" presetClass="entr" presetSubtype="0" fill="hold" nodeType="clickEffect">
+                                  <p:stCondLst>
+                                    <p:cond delay="0"/>
+                                  </p:stCondLst>
+                                  <p:childTnLst>
+                                    <p:set>
+                                      <p:cBhvr>
+                                        <p:cTn id="6" dur="1" fill="hold">
+                                          <p:stCondLst>
+                                            <p:cond delay="0"/>
+                                          </p:stCondLst>
+                                        </p:cTn>
+                                        <p:tgtEl>
+                                          <p:spTgt spid="3"/>
+                                        </p:tgtEl>
+                                        <p:attrNameLst>
+                                          <p:attrName>style.visibility</p:attrName>
+                                        </p:attrNameLst>
+                                      </p:cBhvr>
+                                      <p:to>
+                                        <p:strVal val="visible"/>
+                                      </p:to>
+                                    </p:set>
+                                  </p:childTnLst>
+                                </p:cTn>
+                              </p:par>
+                              <p:par>
+                                <p:cTn id="7" presetID="1" presetClass="entr" presetSubtype="0" fill="hold" grpId="0" nodeType="withEffect">
+                                  <p:stCondLst>
+                                    <p:cond delay="0"/>
+                                  </p:stCondLst>
+                                  <p:childTnLst>
+                                    <p:set>
+                                      <p:cBhvr>
+                                        <p:cTn id="8" dur="1" fill="hold">
+                                          <p:stCondLst>
+                                            <p:cond delay="0"/>
+                                          </p:stCondLst>
+                                        </p:cTn>
+                                        <p:tgtEl>
+                                          <p:spTgt spid="4"/>
+                                        </p:tgtEl>
+                                        <p:attrNameLst>
+                                          <p:attrName>style.visibility</p:attrName>
+                                        </p:attrNameLst>
+                                      </p:cBhvr>
+                                      <p:to>
+                                        <p:strVal val="visible"/>
+                                      </p:to>
+                                    </p:set>
+                                  </p:childTnLst>
+                                </p:cTn>
+                              </p:par>
+                            </p:childTnLst>
+                          </p:cTn>
+                        </p:par>
+                      </p:childTnLst>
+                    </p:cTn>
+                  </p:par>
+                  <p:par>
+                    <p:cTn id="9" fill="hold">
+                      <p:stCondLst>
+                        <p:cond delay="indefinite"/>
+                      </p:stCondLst>
+                      <p:childTnLst>
+                        <p:par>
+                          <p:cTn id="10" fill="hold">
+                            <p:stCondLst>
+                              <p:cond delay="0"/>
+                            </p:stCondLst>
+                            <p:childTnLst>
+                              <p:par>
+                                <p:cTn id="11" presetID="1" presetClass="entr" presetSubtype="0" fill="hold" nodeType="clickEffect">
+                                  <p:stCondLst>
+                                    <p:cond delay="0"/>
+                                  </p:stCondLst>
+                                  <p:childTnLst>
+                                    <p:set>
+                                      <p:cBhvr>
+                                        <p:cTn id="12" dur="1" fill="hold">
+                                          <p:stCondLst>
+                                            <p:cond delay="0"/>
+                                          </p:stCondLst>
+                                        </p:cTn>
+                                        <p:tgtEl>
+                                          <p:spTgt spid="5"/>
+                                        </p:tgtEl>
+                                        <p:attrNameLst>
+                                          <p:attrName>style.visibility</p:attrName>
+                                        </p:attrNameLst>
+                                      </p:cBhvr>
+                                      <p:to>
+                                        <p:strVal val="visible"/>
+                                      </p:to>
+                                    </p:set>
+                                  </p:childTnLst>
+                                </p:cTn>
+                              </p:par>
+                              <p:par>
+                                <p:cTn id="13" presetID="1" presetClass="entr" presetSubtype="0" fill="hold" grpId="0" nodeType="withEffect">
+                                  <p:stCondLst>
+                                    <p:cond delay="0"/>
+                                  </p:stCondLst>
+                                  <p:childTnLst>
+                                    <p:set>
+                                      <p:cBhvr>
+                                        <p:cTn id="14" dur="1" fill="hold">
+                                          <p:stCondLst>
+                                            <p:cond delay="0"/>
+                                          </p:stCondLst>
+                                        </p:cTn>
+                                        <p:tgtEl>
+                                          <p:spTgt spid="6"/>
+                                        </p:tgtEl>
+                                        <p:attrNameLst>
+                                          <p:attrName>style.visibility</p:attrName>
+                                        </p:attrNameLst>
+                                      </p:cBhvr>
+                                      <p:to>
+                                        <p:strVal val="visible"/>
+                                      </p:to>
+                                    </p:set>
+                                  </p:childTnLst>
+                                </p:cTn>
+                              </p:par>
+                            </p:childTnLst>
+                          </p:cTn>
+                        </p:par>
+                      </p:childTnLst>
+                    </p:cTn>
+                  </p:par>
+                </p:childTnLst>
+              </p:cTn>
+              <p:prevCondLst>
+                <p:cond evt="onPrev" delay="0">
+                  <p:tgtEl>
+                    <p:sldTgt/>
+                  </p:tgtEl>
+                </p:cond>
+              </p:prevCondLst>
+              <p:nextCondLst>
+                <p:cond evt="onNext" delay="0">
+                  <p:tgtEl>
+                    <p:sldTgt/>
+                  </p:tgtEl>
+                </p:cond>
+              </p:nextCondLst>
+            </p:seq>
+          </p:childTnLst>
+        </p:cTn>
+      </p:par>
+    </p:tnLst>
+    <p:bldLst>
+      <p:bldP spid="4" grpId="0"/>
+      <p:bldP spid="6" grpId="0"/>
+    </p:bldLst>
+  </p:timing>
+</p:sld>
+</file>
+
+<file path=ppt/slides/slide23.xml><?xml version="1.0" encoding="utf-8"?>
+<p:sld xmlns:a="http://schemas.openxmlformats.org/drawingml/2006/main" xmlns:r="http://schemas.openxmlformats.org/officeDocument/2006/relationships" xmlns:p="http://schemas.openxmlformats.org/presentationml/2006/main">
+  <p:cSld>
+    <p:spTree>
+      <p:nvGrpSpPr>
+        <p:cNvPr id="1" name="">
+          <a:extLst>
+            <a:ext uri="{FF2B5EF4-FFF2-40B4-BE49-F238E27FC236}">
+              <a16:creationId xmlns:a16="http://schemas.microsoft.com/office/drawing/2014/main" id="{E1C9F56A-97FC-7CCD-E5BA-3B5E230AD9AB}"/>
+            </a:ext>
+          </a:extLst>
+        </p:cNvPr>
+        <p:cNvGrpSpPr/>
+        <p:nvPr/>
+      </p:nvGrpSpPr>
+      <p:grpSpPr>
+        <a:xfrm>
+          <a:off x="0" y="0"/>
+          <a:ext cx="0" cy="0"/>
+          <a:chOff x="0" y="0"/>
+          <a:chExt cx="0" cy="0"/>
+        </a:xfrm>
+      </p:grpSpPr>
+      <p:pic>
+        <p:nvPicPr>
+          <p:cNvPr id="7" name="Imagem 6">
+            <a:extLst>
+              <a:ext uri="{FF2B5EF4-FFF2-40B4-BE49-F238E27FC236}">
+                <a16:creationId xmlns:a16="http://schemas.microsoft.com/office/drawing/2014/main" id="{65538D94-D43C-F3E0-A496-24537B0750FC}"/>
+              </a:ext>
+            </a:extLst>
+          </p:cNvPr>
+          <p:cNvPicPr>
+            <a:picLocks noChangeAspect="1"/>
+          </p:cNvPicPr>
+          <p:nvPr/>
+        </p:nvPicPr>
+        <p:blipFill>
+          <a:blip r:embed="rId3"/>
+          <a:stretch>
+            <a:fillRect/>
+          </a:stretch>
+        </p:blipFill>
+        <p:spPr>
+          <a:xfrm>
+            <a:off x="307965" y="0"/>
+            <a:ext cx="11576070" cy="6858000"/>
+          </a:xfrm>
+          <a:prstGeom prst="rect">
+            <a:avLst/>
+          </a:prstGeom>
+        </p:spPr>
+      </p:pic>
+      <p:cxnSp>
+        <p:nvCxnSpPr>
+          <p:cNvPr id="3" name="Conector de Seta Reta 2">
+            <a:extLst>
+              <a:ext uri="{FF2B5EF4-FFF2-40B4-BE49-F238E27FC236}">
+                <a16:creationId xmlns:a16="http://schemas.microsoft.com/office/drawing/2014/main" id="{94BEA342-8272-5659-B659-0613EA474AE5}"/>
+              </a:ext>
+            </a:extLst>
+          </p:cNvPr>
+          <p:cNvCxnSpPr/>
+          <p:nvPr/>
+        </p:nvCxnSpPr>
+        <p:spPr>
+          <a:xfrm flipH="1">
+            <a:off x="1547446" y="2508738"/>
+            <a:ext cx="2180492" cy="1524000"/>
+          </a:xfrm>
+          <a:prstGeom prst="straightConnector1">
+            <a:avLst/>
+          </a:prstGeom>
+          <a:ln w="38100">
+            <a:solidFill>
+              <a:srgbClr val="FF0000"/>
+            </a:solidFill>
+            <a:tailEnd type="triangle"/>
+          </a:ln>
+        </p:spPr>
+        <p:style>
+          <a:lnRef idx="1">
+            <a:schemeClr val="accent1"/>
+          </a:lnRef>
+          <a:fillRef idx="0">
+            <a:schemeClr val="accent1"/>
+          </a:fillRef>
+          <a:effectRef idx="0">
+            <a:schemeClr val="accent1"/>
+          </a:effectRef>
+          <a:fontRef idx="minor">
+            <a:schemeClr val="tx1"/>
+          </a:fontRef>
+        </p:style>
+      </p:cxnSp>
+      <p:sp>
+        <p:nvSpPr>
+          <p:cNvPr id="4" name="CaixaDeTexto 3">
+            <a:extLst>
+              <a:ext uri="{FF2B5EF4-FFF2-40B4-BE49-F238E27FC236}">
+                <a16:creationId xmlns:a16="http://schemas.microsoft.com/office/drawing/2014/main" id="{432C0DDA-02DF-937E-FB17-0D5A9416B736}"/>
+              </a:ext>
+            </a:extLst>
+          </p:cNvPr>
+          <p:cNvSpPr txBox="1"/>
+          <p:nvPr/>
+        </p:nvSpPr>
+        <p:spPr>
+          <a:xfrm>
+            <a:off x="3090150" y="2221468"/>
+            <a:ext cx="1594339" cy="369332"/>
+          </a:xfrm>
+          <a:prstGeom prst="rect">
+            <a:avLst/>
+          </a:prstGeom>
+          <a:noFill/>
+        </p:spPr>
+        <p:txBody>
+          <a:bodyPr wrap="square" rtlCol="0">
+            <a:spAutoFit/>
+          </a:bodyPr>
+          <a:lstStyle/>
+          <a:p>
+            <a:pPr algn="ctr"/>
+            <a:r>
+              <a:rPr lang="pt-BR" dirty="0">
+                <a:solidFill>
+                  <a:srgbClr val="FF0000"/>
+                </a:solidFill>
+              </a:rPr>
+              <a:t>L2</a:t>
+            </a:r>
+          </a:p>
+        </p:txBody>
+      </p:sp>
+    </p:spTree>
+    <p:extLst>
+      <p:ext uri="{BB962C8B-B14F-4D97-AF65-F5344CB8AC3E}">
+        <p14:creationId xmlns:p14="http://schemas.microsoft.com/office/powerpoint/2010/main" val="3449768972"/>
+      </p:ext>
+    </p:extLst>
+  </p:cSld>
+  <p:clrMapOvr>
+    <a:masterClrMapping/>
+  </p:clrMapOvr>
+  <p:timing>
+    <p:tnLst>
+      <p:par>
+        <p:cTn id="1" dur="indefinite" restart="never" nodeType="tmRoot">
+          <p:childTnLst>
+            <p:seq concurrent="1" nextAc="seek">
+              <p:cTn id="2" dur="indefinite" nodeType="mainSeq">
+                <p:childTnLst>
+                  <p:par>
+                    <p:cTn id="3" fill="hold">
+                      <p:stCondLst>
+                        <p:cond delay="indefinite"/>
+                      </p:stCondLst>
+                      <p:childTnLst>
+                        <p:par>
+                          <p:cTn id="4" fill="hold">
+                            <p:stCondLst>
+                              <p:cond delay="0"/>
+                            </p:stCondLst>
+                            <p:childTnLst>
+                              <p:par>
+                                <p:cTn id="5" presetID="1" presetClass="entr" presetSubtype="0" fill="hold" nodeType="clickEffect">
+                                  <p:stCondLst>
+                                    <p:cond delay="0"/>
+                                  </p:stCondLst>
+                                  <p:childTnLst>
+                                    <p:set>
+                                      <p:cBhvr>
+                                        <p:cTn id="6" dur="1" fill="hold">
+                                          <p:stCondLst>
+                                            <p:cond delay="0"/>
+                                          </p:stCondLst>
+                                        </p:cTn>
+                                        <p:tgtEl>
+                                          <p:spTgt spid="3"/>
+                                        </p:tgtEl>
+                                        <p:attrNameLst>
+                                          <p:attrName>style.visibility</p:attrName>
+                                        </p:attrNameLst>
+                                      </p:cBhvr>
+                                      <p:to>
+                                        <p:strVal val="visible"/>
+                                      </p:to>
+                                    </p:set>
+                                  </p:childTnLst>
+                                </p:cTn>
+                              </p:par>
+                              <p:par>
+                                <p:cTn id="7" presetID="1" presetClass="entr" presetSubtype="0" fill="hold" grpId="0" nodeType="withEffect">
+                                  <p:stCondLst>
+                                    <p:cond delay="0"/>
+                                  </p:stCondLst>
+                                  <p:childTnLst>
+                                    <p:set>
+                                      <p:cBhvr>
+                                        <p:cTn id="8" dur="1" fill="hold">
+                                          <p:stCondLst>
+                                            <p:cond delay="0"/>
+                                          </p:stCondLst>
+                                        </p:cTn>
+                                        <p:tgtEl>
+                                          <p:spTgt spid="4"/>
+                                        </p:tgtEl>
+                                        <p:attrNameLst>
+                                          <p:attrName>style.visibility</p:attrName>
+                                        </p:attrNameLst>
+                                      </p:cBhvr>
+                                      <p:to>
+                                        <p:strVal val="visible"/>
+                                      </p:to>
+                                    </p:set>
+                                  </p:childTnLst>
+                                </p:cTn>
+                              </p:par>
+                            </p:childTnLst>
+                          </p:cTn>
+                        </p:par>
+                      </p:childTnLst>
+                    </p:cTn>
+                  </p:par>
+                </p:childTnLst>
+              </p:cTn>
+              <p:prevCondLst>
+                <p:cond evt="onPrev" delay="0">
+                  <p:tgtEl>
+                    <p:sldTgt/>
+                  </p:tgtEl>
+                </p:cond>
+              </p:prevCondLst>
+              <p:nextCondLst>
+                <p:cond evt="onNext" delay="0">
+                  <p:tgtEl>
+                    <p:sldTgt/>
+                  </p:tgtEl>
+                </p:cond>
+              </p:nextCondLst>
+            </p:seq>
+          </p:childTnLst>
+        </p:cTn>
+      </p:par>
+    </p:tnLst>
+    <p:bldLst>
+      <p:bldP spid="4" grpId="0"/>
+    </p:bldLst>
+  </p:timing>
+</p:sld>
+</file>
+
+<file path=ppt/slides/slide24.xml><?xml version="1.0" encoding="utf-8"?>
+<p:sld xmlns:a="http://schemas.openxmlformats.org/drawingml/2006/main" xmlns:r="http://schemas.openxmlformats.org/officeDocument/2006/relationships" xmlns:p="http://schemas.openxmlformats.org/presentationml/2006/main">
+  <p:cSld>
+    <p:spTree>
+      <p:nvGrpSpPr>
+        <p:cNvPr id="1" name="">
+          <a:extLst>
+            <a:ext uri="{FF2B5EF4-FFF2-40B4-BE49-F238E27FC236}">
+              <a16:creationId xmlns:a16="http://schemas.microsoft.com/office/drawing/2014/main" id="{E1C9F56A-97FC-7CCD-E5BA-3B5E230AD9AB}"/>
+            </a:ext>
+          </a:extLst>
+        </p:cNvPr>
+        <p:cNvGrpSpPr/>
+        <p:nvPr/>
+      </p:nvGrpSpPr>
+      <p:grpSpPr>
+        <a:xfrm>
+          <a:off x="0" y="0"/>
+          <a:ext cx="0" cy="0"/>
+          <a:chOff x="0" y="0"/>
+          <a:chExt cx="0" cy="0"/>
+        </a:xfrm>
+      </p:grpSpPr>
+      <p:sp>
+        <p:nvSpPr>
+          <p:cNvPr id="3" name="Espaço Reservado para Conteúdo 2">
+            <a:extLst>
+              <a:ext uri="{FF2B5EF4-FFF2-40B4-BE49-F238E27FC236}">
+                <a16:creationId xmlns:a16="http://schemas.microsoft.com/office/drawing/2014/main" id="{F22F88A5-87D1-340F-853F-8C2ED8F8C877}"/>
+              </a:ext>
+            </a:extLst>
+          </p:cNvPr>
+          <p:cNvSpPr>
+            <a:spLocks noGrp="1"/>
+          </p:cNvSpPr>
+          <p:nvPr>
+            <p:ph idx="1"/>
+          </p:nvPr>
+        </p:nvSpPr>
+        <p:spPr>
+          <a:xfrm>
+            <a:off x="838200" y="1325563"/>
+            <a:ext cx="10515600" cy="5133852"/>
+          </a:xfrm>
+        </p:spPr>
+        <p:txBody>
+          <a:bodyPr>
+            <a:normAutofit fontScale="92500" lnSpcReduction="10000"/>
+          </a:bodyPr>
+          <a:lstStyle/>
+          <a:p>
+            <a:pPr fontAlgn="base"/>
+            <a:r>
+              <a:rPr lang="pt-BR" dirty="0"/>
+              <a:t>2,2× de aceleração utilizando um único núcleo RI5CY em relação ao IBEX</a:t>
+            </a:r>
+          </a:p>
+          <a:p>
+            <a:pPr fontAlgn="base"/>
+            <a:endParaRPr lang="pt-BR" dirty="0"/>
+          </a:p>
+          <a:p>
+            <a:pPr fontAlgn="base"/>
+            <a:r>
+              <a:rPr lang="pt-BR" dirty="0"/>
+              <a:t>Adição de extensões personalizadas ao conjunto de instruções</a:t>
+            </a:r>
+          </a:p>
+          <a:p>
+            <a:pPr fontAlgn="base"/>
+            <a:endParaRPr lang="pt-BR" dirty="0"/>
+          </a:p>
+          <a:p>
+            <a:pPr fontAlgn="base"/>
+            <a:r>
+              <a:rPr lang="pt-BR" dirty="0"/>
+              <a:t>Double-</a:t>
+            </a:r>
+            <a:r>
+              <a:rPr lang="pt-BR" dirty="0" err="1"/>
+              <a:t>buffering</a:t>
+            </a:r>
+            <a:r>
+              <a:rPr lang="pt-BR" dirty="0"/>
+              <a:t> + DMA</a:t>
+            </a:r>
+          </a:p>
+          <a:p>
+            <a:pPr fontAlgn="base"/>
+            <a:endParaRPr lang="pt-BR" dirty="0"/>
+          </a:p>
+          <a:p>
+            <a:pPr fontAlgn="base"/>
+            <a:r>
+              <a:rPr lang="pt-BR" dirty="0"/>
+              <a:t>Entradas maiores </a:t>
+            </a:r>
+            <a:r>
+              <a:rPr lang="pt-BR" dirty="0">
+                <a:latin typeface="Calibri" panose="020F0502020204030204" pitchFamily="34" charset="0"/>
+                <a:ea typeface="Calibri" panose="020F0502020204030204" pitchFamily="34" charset="0"/>
+                <a:cs typeface="Calibri" panose="020F0502020204030204" pitchFamily="34" charset="0"/>
+              </a:rPr>
+              <a:t>→ maiores ganhos </a:t>
+            </a:r>
+          </a:p>
+          <a:p>
+            <a:pPr fontAlgn="base"/>
+            <a:endParaRPr lang="pt-BR" dirty="0">
+              <a:latin typeface="Calibri" panose="020F0502020204030204" pitchFamily="34" charset="0"/>
+              <a:ea typeface="Calibri" panose="020F0502020204030204" pitchFamily="34" charset="0"/>
+              <a:cs typeface="Calibri" panose="020F0502020204030204" pitchFamily="34" charset="0"/>
+            </a:endParaRPr>
+          </a:p>
+          <a:p>
+            <a:pPr lvl="1" fontAlgn="base"/>
+            <a:r>
+              <a:rPr lang="pt-BR" dirty="0">
+                <a:latin typeface="Calibri" panose="020F0502020204030204" pitchFamily="34" charset="0"/>
+                <a:ea typeface="Calibri" panose="020F0502020204030204" pitchFamily="34" charset="0"/>
+                <a:cs typeface="Calibri" panose="020F0502020204030204" pitchFamily="34" charset="0"/>
+              </a:rPr>
+              <a:t>Overhead DMA desprezível frente ao tempo de computação</a:t>
+            </a:r>
+          </a:p>
+          <a:p>
+            <a:pPr fontAlgn="base"/>
+            <a:endParaRPr lang="pt-BR" dirty="0">
+              <a:latin typeface="Calibri" panose="020F0502020204030204" pitchFamily="34" charset="0"/>
+              <a:ea typeface="Calibri" panose="020F0502020204030204" pitchFamily="34" charset="0"/>
+              <a:cs typeface="Calibri" panose="020F0502020204030204" pitchFamily="34" charset="0"/>
+            </a:endParaRPr>
+          </a:p>
+          <a:p>
+            <a:pPr fontAlgn="base"/>
+            <a:r>
+              <a:rPr lang="pt-BR" dirty="0"/>
+              <a:t>Execução paralela em relação à execução com um único núcleo RI5CY </a:t>
+            </a:r>
+            <a:r>
+              <a:rPr lang="pt-BR" dirty="0">
+                <a:latin typeface="Calibri" panose="020F0502020204030204" pitchFamily="34" charset="0"/>
+                <a:ea typeface="Calibri" panose="020F0502020204030204" pitchFamily="34" charset="0"/>
+                <a:cs typeface="Calibri" panose="020F0502020204030204" pitchFamily="34" charset="0"/>
+              </a:rPr>
+              <a:t>→  7,7x </a:t>
+            </a:r>
+            <a:r>
+              <a:rPr lang="pt-BR" dirty="0"/>
+              <a:t>de aceleração </a:t>
+            </a:r>
+          </a:p>
+          <a:p>
+            <a:pPr lvl="1" fontAlgn="base"/>
+            <a:endParaRPr lang="pt-BR" dirty="0">
+              <a:latin typeface="Calibri" panose="020F0502020204030204" pitchFamily="34" charset="0"/>
+              <a:ea typeface="Calibri" panose="020F0502020204030204" pitchFamily="34" charset="0"/>
+              <a:cs typeface="Calibri" panose="020F0502020204030204" pitchFamily="34" charset="0"/>
+            </a:endParaRPr>
+          </a:p>
+          <a:p>
+            <a:pPr lvl="1" fontAlgn="base"/>
+            <a:endParaRPr lang="pt-BR" dirty="0"/>
+          </a:p>
+          <a:p>
+            <a:pPr lvl="1" fontAlgn="base"/>
+            <a:endParaRPr lang="pt-BR" dirty="0"/>
+          </a:p>
+          <a:p>
+            <a:pPr fontAlgn="base"/>
+            <a:endParaRPr lang="pt-BR" dirty="0"/>
+          </a:p>
+          <a:p>
+            <a:pPr fontAlgn="base"/>
+            <a:endParaRPr lang="pt-BR" dirty="0"/>
+          </a:p>
+          <a:p>
+            <a:pPr fontAlgn="base"/>
+            <a:endParaRPr lang="pt-BR" dirty="0"/>
+          </a:p>
+        </p:txBody>
+      </p:sp>
+      <p:sp>
+        <p:nvSpPr>
+          <p:cNvPr id="6" name="Título 1">
+            <a:extLst>
+              <a:ext uri="{FF2B5EF4-FFF2-40B4-BE49-F238E27FC236}">
+                <a16:creationId xmlns:a16="http://schemas.microsoft.com/office/drawing/2014/main" id="{4A65067B-A1B8-0DBB-495B-52AEED1F2696}"/>
+              </a:ext>
+            </a:extLst>
+          </p:cNvPr>
+          <p:cNvSpPr txBox="1">
+            <a:spLocks/>
+          </p:cNvSpPr>
+          <p:nvPr/>
+        </p:nvSpPr>
+        <p:spPr>
+          <a:xfrm>
+            <a:off x="0" y="0"/>
+            <a:ext cx="10515600" cy="1325563"/>
+          </a:xfrm>
+          <a:prstGeom prst="rect">
+            <a:avLst/>
+          </a:prstGeom>
+        </p:spPr>
+        <p:txBody>
+          <a:bodyPr vert="horz" lIns="91440" tIns="45720" rIns="91440" bIns="45720" rtlCol="0" anchor="ctr">
+            <a:normAutofit/>
+          </a:bodyPr>
+          <a:lstStyle>
+            <a:lvl1pPr algn="l" defTabSz="914400" rtl="0" eaLnBrk="1" latinLnBrk="0" hangingPunct="1">
+              <a:lnSpc>
+                <a:spcPct val="90000"/>
+              </a:lnSpc>
+              <a:spcBef>
+                <a:spcPct val="0"/>
+              </a:spcBef>
+              <a:buNone/>
+              <a:defRPr sz="4400" kern="1200">
+                <a:solidFill>
+                  <a:schemeClr val="tx1"/>
+                </a:solidFill>
+                <a:latin typeface="+mj-lt"/>
+                <a:ea typeface="+mj-ea"/>
+                <a:cs typeface="+mj-cs"/>
+              </a:defRPr>
+            </a:lvl1pPr>
+          </a:lstStyle>
+          <a:p>
+            <a:r>
+              <a:rPr lang="pt-BR" dirty="0"/>
+              <a:t>Resultados Experimentais</a:t>
+            </a:r>
+          </a:p>
+        </p:txBody>
+      </p:sp>
+    </p:spTree>
+    <p:extLst>
+      <p:ext uri="{BB962C8B-B14F-4D97-AF65-F5344CB8AC3E}">
+        <p14:creationId xmlns:p14="http://schemas.microsoft.com/office/powerpoint/2010/main" val="1278591555"/>
+      </p:ext>
+    </p:extLst>
+  </p:cSld>
+  <p:clrMapOvr>
+    <a:masterClrMapping/>
+  </p:clrMapOvr>
+</p:sld>
+</file>
+
+<file path=ppt/slides/slide25.xml><?xml version="1.0" encoding="utf-8"?>
+<p:sld xmlns:a="http://schemas.openxmlformats.org/drawingml/2006/main" xmlns:r="http://schemas.openxmlformats.org/officeDocument/2006/relationships" xmlns:p="http://schemas.openxmlformats.org/presentationml/2006/main">
+  <p:cSld>
+    <p:spTree>
+      <p:nvGrpSpPr>
+        <p:cNvPr id="1" name="">
+          <a:extLst>
+            <a:ext uri="{FF2B5EF4-FFF2-40B4-BE49-F238E27FC236}">
+              <a16:creationId xmlns:a16="http://schemas.microsoft.com/office/drawing/2014/main" id="{E1C9F56A-97FC-7CCD-E5BA-3B5E230AD9AB}"/>
+            </a:ext>
+          </a:extLst>
+        </p:cNvPr>
+        <p:cNvGrpSpPr/>
+        <p:nvPr/>
+      </p:nvGrpSpPr>
+      <p:grpSpPr>
+        <a:xfrm>
+          <a:off x="0" y="0"/>
+          <a:ext cx="0" cy="0"/>
+          <a:chOff x="0" y="0"/>
+          <a:chExt cx="0" cy="0"/>
+        </a:xfrm>
+      </p:grpSpPr>
+      <p:pic>
+        <p:nvPicPr>
+          <p:cNvPr id="5" name="Imagem 4">
+            <a:extLst>
+              <a:ext uri="{FF2B5EF4-FFF2-40B4-BE49-F238E27FC236}">
+                <a16:creationId xmlns:a16="http://schemas.microsoft.com/office/drawing/2014/main" id="{DC02F567-7453-B253-BBD8-5FACF48E1B95}"/>
+              </a:ext>
+            </a:extLst>
+          </p:cNvPr>
+          <p:cNvPicPr>
+            <a:picLocks noChangeAspect="1"/>
+          </p:cNvPicPr>
+          <p:nvPr/>
+        </p:nvPicPr>
+        <p:blipFill>
+          <a:blip r:embed="rId3"/>
+          <a:stretch>
+            <a:fillRect/>
+          </a:stretch>
+        </p:blipFill>
+        <p:spPr>
+          <a:xfrm>
+            <a:off x="420777" y="0"/>
+            <a:ext cx="11350446" cy="6858000"/>
+          </a:xfrm>
+          <a:prstGeom prst="rect">
+            <a:avLst/>
+          </a:prstGeom>
+        </p:spPr>
+      </p:pic>
+    </p:spTree>
+    <p:extLst>
+      <p:ext uri="{BB962C8B-B14F-4D97-AF65-F5344CB8AC3E}">
+        <p14:creationId xmlns:p14="http://schemas.microsoft.com/office/powerpoint/2010/main" val="86944700"/>
+      </p:ext>
+    </p:extLst>
+  </p:cSld>
+  <p:clrMapOvr>
+    <a:masterClrMapping/>
+  </p:clrMapOvr>
+</p:sld>
+</file>
+
+<file path=ppt/slides/slide26.xml><?xml version="1.0" encoding="utf-8"?>
+<p:sld xmlns:a="http://schemas.openxmlformats.org/drawingml/2006/main" xmlns:r="http://schemas.openxmlformats.org/officeDocument/2006/relationships" xmlns:p="http://schemas.openxmlformats.org/presentationml/2006/main">
+  <p:cSld>
+    <p:spTree>
+      <p:nvGrpSpPr>
+        <p:cNvPr id="1" name="">
+          <a:extLst>
+            <a:ext uri="{FF2B5EF4-FFF2-40B4-BE49-F238E27FC236}">
+              <a16:creationId xmlns:a16="http://schemas.microsoft.com/office/drawing/2014/main" id="{E1C9F56A-97FC-7CCD-E5BA-3B5E230AD9AB}"/>
+            </a:ext>
+          </a:extLst>
+        </p:cNvPr>
+        <p:cNvGrpSpPr/>
+        <p:nvPr/>
+      </p:nvGrpSpPr>
+      <p:grpSpPr>
+        <a:xfrm>
+          <a:off x="0" y="0"/>
+          <a:ext cx="0" cy="0"/>
+          <a:chOff x="0" y="0"/>
+          <a:chExt cx="0" cy="0"/>
+        </a:xfrm>
+      </p:grpSpPr>
+      <p:sp>
+        <p:nvSpPr>
+          <p:cNvPr id="3" name="Espaço Reservado para Conteúdo 2">
+            <a:extLst>
+              <a:ext uri="{FF2B5EF4-FFF2-40B4-BE49-F238E27FC236}">
+                <a16:creationId xmlns:a16="http://schemas.microsoft.com/office/drawing/2014/main" id="{F22F88A5-87D1-340F-853F-8C2ED8F8C877}"/>
+              </a:ext>
+            </a:extLst>
+          </p:cNvPr>
+          <p:cNvSpPr>
+            <a:spLocks noGrp="1"/>
+          </p:cNvSpPr>
+          <p:nvPr>
+            <p:ph idx="1"/>
+          </p:nvPr>
+        </p:nvSpPr>
+        <p:spPr>
+          <a:xfrm>
+            <a:off x="838200" y="1325563"/>
+            <a:ext cx="10515600" cy="5133852"/>
+          </a:xfrm>
+        </p:spPr>
+        <p:txBody>
+          <a:bodyPr>
+            <a:normAutofit/>
+          </a:bodyPr>
+          <a:lstStyle/>
+          <a:p>
+            <a:pPr fontAlgn="base"/>
+            <a:r>
+              <a:rPr lang="pt-BR" dirty="0"/>
+              <a:t>Single- RI5CY x Cortex-M4 = 2x de aceleração </a:t>
+            </a:r>
+          </a:p>
+          <a:p>
+            <a:pPr fontAlgn="base"/>
+            <a:endParaRPr lang="pt-BR" dirty="0"/>
+          </a:p>
+          <a:p>
+            <a:pPr fontAlgn="base"/>
+            <a:endParaRPr lang="pt-BR" dirty="0"/>
+          </a:p>
+          <a:p>
+            <a:pPr fontAlgn="base"/>
+            <a:r>
+              <a:rPr lang="pt-BR" dirty="0" err="1"/>
+              <a:t>Multi</a:t>
+            </a:r>
+            <a:r>
+              <a:rPr lang="pt-BR" dirty="0"/>
+              <a:t> RI5CY x Cortex-M4 = 13,5x de aceleração </a:t>
+            </a:r>
+          </a:p>
+          <a:p>
+            <a:pPr fontAlgn="base"/>
+            <a:endParaRPr lang="pt-BR" dirty="0"/>
+          </a:p>
+          <a:p>
+            <a:pPr fontAlgn="base"/>
+            <a:endParaRPr lang="pt-BR" dirty="0"/>
+          </a:p>
+          <a:p>
+            <a:pPr fontAlgn="base"/>
+            <a:endParaRPr lang="pt-BR" dirty="0"/>
+          </a:p>
+          <a:p>
+            <a:pPr fontAlgn="base"/>
+            <a:endParaRPr lang="pt-BR" dirty="0"/>
+          </a:p>
+          <a:p>
+            <a:pPr marL="457200" lvl="1" indent="0" fontAlgn="base">
+              <a:buNone/>
+            </a:pPr>
+            <a:endParaRPr lang="pt-BR" dirty="0">
+              <a:latin typeface="Calibri" panose="020F0502020204030204" pitchFamily="34" charset="0"/>
+              <a:ea typeface="Calibri" panose="020F0502020204030204" pitchFamily="34" charset="0"/>
+              <a:cs typeface="Calibri" panose="020F0502020204030204" pitchFamily="34" charset="0"/>
+            </a:endParaRPr>
+          </a:p>
+          <a:p>
+            <a:pPr lvl="1" fontAlgn="base"/>
+            <a:endParaRPr lang="pt-BR" dirty="0"/>
+          </a:p>
+          <a:p>
+            <a:pPr lvl="1" fontAlgn="base"/>
+            <a:endParaRPr lang="pt-BR" dirty="0"/>
+          </a:p>
+          <a:p>
+            <a:pPr fontAlgn="base"/>
+            <a:endParaRPr lang="pt-BR" dirty="0"/>
+          </a:p>
+          <a:p>
+            <a:pPr fontAlgn="base"/>
+            <a:endParaRPr lang="pt-BR" dirty="0"/>
+          </a:p>
+          <a:p>
+            <a:pPr fontAlgn="base"/>
+            <a:endParaRPr lang="pt-BR" dirty="0"/>
+          </a:p>
+        </p:txBody>
+      </p:sp>
+      <p:sp>
+        <p:nvSpPr>
+          <p:cNvPr id="6" name="Título 1">
+            <a:extLst>
+              <a:ext uri="{FF2B5EF4-FFF2-40B4-BE49-F238E27FC236}">
+                <a16:creationId xmlns:a16="http://schemas.microsoft.com/office/drawing/2014/main" id="{4A65067B-A1B8-0DBB-495B-52AEED1F2696}"/>
+              </a:ext>
+            </a:extLst>
+          </p:cNvPr>
+          <p:cNvSpPr txBox="1">
+            <a:spLocks/>
+          </p:cNvSpPr>
+          <p:nvPr/>
+        </p:nvSpPr>
+        <p:spPr>
+          <a:xfrm>
+            <a:off x="0" y="0"/>
+            <a:ext cx="10515600" cy="1325563"/>
+          </a:xfrm>
+          <a:prstGeom prst="rect">
+            <a:avLst/>
+          </a:prstGeom>
+        </p:spPr>
+        <p:txBody>
+          <a:bodyPr vert="horz" lIns="91440" tIns="45720" rIns="91440" bIns="45720" rtlCol="0" anchor="ctr">
+            <a:normAutofit/>
+          </a:bodyPr>
+          <a:lstStyle>
+            <a:lvl1pPr algn="l" defTabSz="914400" rtl="0" eaLnBrk="1" latinLnBrk="0" hangingPunct="1">
+              <a:lnSpc>
+                <a:spcPct val="90000"/>
+              </a:lnSpc>
+              <a:spcBef>
+                <a:spcPct val="0"/>
+              </a:spcBef>
+              <a:buNone/>
+              <a:defRPr sz="4400" kern="1200">
+                <a:solidFill>
+                  <a:schemeClr val="tx1"/>
+                </a:solidFill>
+                <a:latin typeface="+mj-lt"/>
+                <a:ea typeface="+mj-ea"/>
+                <a:cs typeface="+mj-cs"/>
+              </a:defRPr>
+            </a:lvl1pPr>
+          </a:lstStyle>
+          <a:p>
+            <a:r>
+              <a:rPr lang="pt-BR" dirty="0"/>
+              <a:t>Resultados Experimentais</a:t>
+            </a:r>
+          </a:p>
+        </p:txBody>
+      </p:sp>
+    </p:spTree>
+    <p:extLst>
+      <p:ext uri="{BB962C8B-B14F-4D97-AF65-F5344CB8AC3E}">
+        <p14:creationId xmlns:p14="http://schemas.microsoft.com/office/powerpoint/2010/main" val="1053522533"/>
+      </p:ext>
+    </p:extLst>
+  </p:cSld>
+  <p:clrMapOvr>
+    <a:masterClrMapping/>
+  </p:clrMapOvr>
+</p:sld>
+</file>
+
+<file path=ppt/slides/slide27.xml><?xml version="1.0" encoding="utf-8"?>
+<p:sld xmlns:a="http://schemas.openxmlformats.org/drawingml/2006/main" xmlns:r="http://schemas.openxmlformats.org/officeDocument/2006/relationships" xmlns:p="http://schemas.openxmlformats.org/presentationml/2006/main">
+  <p:cSld>
+    <p:spTree>
+      <p:nvGrpSpPr>
+        <p:cNvPr id="1" name="">
+          <a:extLst>
+            <a:ext uri="{FF2B5EF4-FFF2-40B4-BE49-F238E27FC236}">
+              <a16:creationId xmlns:a16="http://schemas.microsoft.com/office/drawing/2014/main" id="{E1C9F56A-97FC-7CCD-E5BA-3B5E230AD9AB}"/>
+            </a:ext>
+          </a:extLst>
+        </p:cNvPr>
+        <p:cNvGrpSpPr/>
+        <p:nvPr/>
+      </p:nvGrpSpPr>
+      <p:grpSpPr>
+        <a:xfrm>
+          <a:off x="0" y="0"/>
+          <a:ext cx="0" cy="0"/>
+          <a:chOff x="0" y="0"/>
+          <a:chExt cx="0" cy="0"/>
+        </a:xfrm>
+      </p:grpSpPr>
+      <p:sp>
+        <p:nvSpPr>
+          <p:cNvPr id="3" name="Espaço Reservado para Conteúdo 2">
+            <a:extLst>
+              <a:ext uri="{FF2B5EF4-FFF2-40B4-BE49-F238E27FC236}">
+                <a16:creationId xmlns:a16="http://schemas.microsoft.com/office/drawing/2014/main" id="{F22F88A5-87D1-340F-853F-8C2ED8F8C877}"/>
+              </a:ext>
+            </a:extLst>
+          </p:cNvPr>
+          <p:cNvSpPr>
+            <a:spLocks noGrp="1"/>
+          </p:cNvSpPr>
+          <p:nvPr>
+            <p:ph idx="1"/>
+          </p:nvPr>
+        </p:nvSpPr>
+        <p:spPr>
+          <a:xfrm>
+            <a:off x="838200" y="1325563"/>
+            <a:ext cx="10515600" cy="5133852"/>
+          </a:xfrm>
+        </p:spPr>
+        <p:txBody>
+          <a:bodyPr>
+            <a:normAutofit fontScale="92500" lnSpcReduction="10000"/>
+          </a:bodyPr>
+          <a:lstStyle/>
+          <a:p>
+            <a:pPr fontAlgn="base"/>
+            <a:r>
+              <a:rPr lang="pt-BR" dirty="0"/>
+              <a:t>2,2× de aceleração utilizando um único núcleo RI5CY em relação ao IBEX</a:t>
+            </a:r>
+          </a:p>
+          <a:p>
+            <a:pPr fontAlgn="base"/>
+            <a:endParaRPr lang="pt-BR" dirty="0"/>
+          </a:p>
+          <a:p>
+            <a:pPr fontAlgn="base"/>
+            <a:r>
+              <a:rPr lang="pt-BR" dirty="0"/>
+              <a:t>Adição de extensões personalizadas ao conjunto de instruções</a:t>
+            </a:r>
+          </a:p>
+          <a:p>
+            <a:pPr fontAlgn="base"/>
+            <a:endParaRPr lang="pt-BR" dirty="0"/>
+          </a:p>
+          <a:p>
+            <a:pPr fontAlgn="base"/>
+            <a:r>
+              <a:rPr lang="pt-BR" dirty="0"/>
+              <a:t>Double-</a:t>
+            </a:r>
+            <a:r>
+              <a:rPr lang="pt-BR" dirty="0" err="1"/>
+              <a:t>buffering</a:t>
+            </a:r>
+            <a:r>
+              <a:rPr lang="pt-BR" dirty="0"/>
+              <a:t> + DMA</a:t>
+            </a:r>
+          </a:p>
+          <a:p>
+            <a:pPr fontAlgn="base"/>
+            <a:endParaRPr lang="pt-BR" dirty="0"/>
+          </a:p>
+          <a:p>
+            <a:pPr fontAlgn="base"/>
+            <a:r>
+              <a:rPr lang="pt-BR" dirty="0"/>
+              <a:t>Entradas maiores </a:t>
+            </a:r>
+            <a:r>
+              <a:rPr lang="pt-BR" dirty="0">
+                <a:latin typeface="Calibri" panose="020F0502020204030204" pitchFamily="34" charset="0"/>
+                <a:ea typeface="Calibri" panose="020F0502020204030204" pitchFamily="34" charset="0"/>
+                <a:cs typeface="Calibri" panose="020F0502020204030204" pitchFamily="34" charset="0"/>
+              </a:rPr>
+              <a:t>→ maiores ganhos </a:t>
+            </a:r>
+          </a:p>
+          <a:p>
+            <a:pPr fontAlgn="base"/>
+            <a:endParaRPr lang="pt-BR" dirty="0">
+              <a:latin typeface="Calibri" panose="020F0502020204030204" pitchFamily="34" charset="0"/>
+              <a:ea typeface="Calibri" panose="020F0502020204030204" pitchFamily="34" charset="0"/>
+              <a:cs typeface="Calibri" panose="020F0502020204030204" pitchFamily="34" charset="0"/>
+            </a:endParaRPr>
+          </a:p>
+          <a:p>
+            <a:pPr lvl="1" fontAlgn="base"/>
+            <a:r>
+              <a:rPr lang="pt-BR" dirty="0">
+                <a:latin typeface="Calibri" panose="020F0502020204030204" pitchFamily="34" charset="0"/>
+                <a:ea typeface="Calibri" panose="020F0502020204030204" pitchFamily="34" charset="0"/>
+                <a:cs typeface="Calibri" panose="020F0502020204030204" pitchFamily="34" charset="0"/>
+              </a:rPr>
+              <a:t>Overhead DMA desprezível frente ao tempo de computação</a:t>
+            </a:r>
+          </a:p>
+          <a:p>
+            <a:pPr fontAlgn="base"/>
+            <a:endParaRPr lang="pt-BR" dirty="0">
+              <a:latin typeface="Calibri" panose="020F0502020204030204" pitchFamily="34" charset="0"/>
+              <a:ea typeface="Calibri" panose="020F0502020204030204" pitchFamily="34" charset="0"/>
+              <a:cs typeface="Calibri" panose="020F0502020204030204" pitchFamily="34" charset="0"/>
+            </a:endParaRPr>
+          </a:p>
+          <a:p>
+            <a:pPr fontAlgn="base"/>
+            <a:r>
+              <a:rPr lang="pt-BR" dirty="0"/>
+              <a:t>Execução paralela em relação à execução com um único núcleo RI5CY </a:t>
+            </a:r>
+            <a:r>
+              <a:rPr lang="pt-BR" dirty="0">
+                <a:latin typeface="Calibri" panose="020F0502020204030204" pitchFamily="34" charset="0"/>
+                <a:ea typeface="Calibri" panose="020F0502020204030204" pitchFamily="34" charset="0"/>
+                <a:cs typeface="Calibri" panose="020F0502020204030204" pitchFamily="34" charset="0"/>
+              </a:rPr>
+              <a:t>→  7,7x </a:t>
+            </a:r>
+            <a:r>
+              <a:rPr lang="pt-BR" dirty="0"/>
+              <a:t>de aceleração </a:t>
+            </a:r>
+          </a:p>
+          <a:p>
+            <a:pPr lvl="1" fontAlgn="base"/>
+            <a:endParaRPr lang="pt-BR" dirty="0">
+              <a:latin typeface="Calibri" panose="020F0502020204030204" pitchFamily="34" charset="0"/>
+              <a:ea typeface="Calibri" panose="020F0502020204030204" pitchFamily="34" charset="0"/>
+              <a:cs typeface="Calibri" panose="020F0502020204030204" pitchFamily="34" charset="0"/>
+            </a:endParaRPr>
+          </a:p>
+          <a:p>
+            <a:pPr lvl="1" fontAlgn="base"/>
+            <a:endParaRPr lang="pt-BR" dirty="0"/>
+          </a:p>
+          <a:p>
+            <a:pPr lvl="1" fontAlgn="base"/>
+            <a:endParaRPr lang="pt-BR" dirty="0"/>
+          </a:p>
+          <a:p>
+            <a:pPr fontAlgn="base"/>
+            <a:endParaRPr lang="pt-BR" dirty="0"/>
+          </a:p>
+          <a:p>
+            <a:pPr fontAlgn="base"/>
+            <a:endParaRPr lang="pt-BR" dirty="0"/>
+          </a:p>
+          <a:p>
+            <a:pPr fontAlgn="base"/>
+            <a:endParaRPr lang="pt-BR" dirty="0"/>
+          </a:p>
+        </p:txBody>
+      </p:sp>
+      <p:sp>
+        <p:nvSpPr>
+          <p:cNvPr id="6" name="Título 1">
+            <a:extLst>
+              <a:ext uri="{FF2B5EF4-FFF2-40B4-BE49-F238E27FC236}">
+                <a16:creationId xmlns:a16="http://schemas.microsoft.com/office/drawing/2014/main" id="{4A65067B-A1B8-0DBB-495B-52AEED1F2696}"/>
+              </a:ext>
+            </a:extLst>
+          </p:cNvPr>
+          <p:cNvSpPr txBox="1">
+            <a:spLocks/>
+          </p:cNvSpPr>
+          <p:nvPr/>
+        </p:nvSpPr>
+        <p:spPr>
+          <a:xfrm>
+            <a:off x="0" y="0"/>
+            <a:ext cx="10515600" cy="1325563"/>
+          </a:xfrm>
+          <a:prstGeom prst="rect">
+            <a:avLst/>
+          </a:prstGeom>
+        </p:spPr>
+        <p:txBody>
+          <a:bodyPr vert="horz" lIns="91440" tIns="45720" rIns="91440" bIns="45720" rtlCol="0" anchor="ctr">
+            <a:normAutofit/>
+          </a:bodyPr>
+          <a:lstStyle>
+            <a:lvl1pPr algn="l" defTabSz="914400" rtl="0" eaLnBrk="1" latinLnBrk="0" hangingPunct="1">
+              <a:lnSpc>
+                <a:spcPct val="90000"/>
+              </a:lnSpc>
+              <a:spcBef>
+                <a:spcPct val="0"/>
+              </a:spcBef>
+              <a:buNone/>
+              <a:defRPr sz="4400" kern="1200">
+                <a:solidFill>
+                  <a:schemeClr val="tx1"/>
+                </a:solidFill>
+                <a:latin typeface="+mj-lt"/>
+                <a:ea typeface="+mj-ea"/>
+                <a:cs typeface="+mj-cs"/>
+              </a:defRPr>
+            </a:lvl1pPr>
+          </a:lstStyle>
+          <a:p>
+            <a:r>
+              <a:rPr lang="pt-BR" dirty="0"/>
+              <a:t>Resultados Experimentais</a:t>
+            </a:r>
+          </a:p>
+        </p:txBody>
+      </p:sp>
+    </p:spTree>
+    <p:extLst>
+      <p:ext uri="{BB962C8B-B14F-4D97-AF65-F5344CB8AC3E}">
+        <p14:creationId xmlns:p14="http://schemas.microsoft.com/office/powerpoint/2010/main" val="42768687"/>
+      </p:ext>
+    </p:extLst>
+  </p:cSld>
+  <p:clrMapOvr>
+    <a:masterClrMapping/>
+  </p:clrMapOvr>
+</p:sld>
+</file>
+
+<file path=ppt/slides/slide28.xml><?xml version="1.0" encoding="utf-8"?>
+<p:sld xmlns:a="http://schemas.openxmlformats.org/drawingml/2006/main" xmlns:r="http://schemas.openxmlformats.org/officeDocument/2006/relationships" xmlns:p="http://schemas.openxmlformats.org/presentationml/2006/main">
+  <p:cSld>
+    <p:spTree>
+      <p:nvGrpSpPr>
+        <p:cNvPr id="1" name="">
+          <a:extLst>
+            <a:ext uri="{FF2B5EF4-FFF2-40B4-BE49-F238E27FC236}">
+              <a16:creationId xmlns:a16="http://schemas.microsoft.com/office/drawing/2014/main" id="{E1C9F56A-97FC-7CCD-E5BA-3B5E230AD9AB}"/>
+            </a:ext>
+          </a:extLst>
+        </p:cNvPr>
+        <p:cNvGrpSpPr/>
+        <p:nvPr/>
+      </p:nvGrpSpPr>
+      <p:grpSpPr>
+        <a:xfrm>
+          <a:off x="0" y="0"/>
+          <a:ext cx="0" cy="0"/>
+          <a:chOff x="0" y="0"/>
+          <a:chExt cx="0" cy="0"/>
+        </a:xfrm>
+      </p:grpSpPr>
+      <p:sp>
+        <p:nvSpPr>
+          <p:cNvPr id="2" name="Título 1">
+            <a:extLst>
+              <a:ext uri="{FF2B5EF4-FFF2-40B4-BE49-F238E27FC236}">
+                <a16:creationId xmlns:a16="http://schemas.microsoft.com/office/drawing/2014/main" id="{A979DAB9-0612-F0CD-7BB1-AF52B98B3210}"/>
+              </a:ext>
+            </a:extLst>
+          </p:cNvPr>
+          <p:cNvSpPr>
+            <a:spLocks noGrp="1"/>
+          </p:cNvSpPr>
+          <p:nvPr>
+            <p:ph type="title"/>
+          </p:nvPr>
+        </p:nvSpPr>
+        <p:spPr/>
+        <p:txBody>
+          <a:bodyPr/>
+          <a:lstStyle/>
+          <a:p>
+            <a:r>
+              <a:rPr lang="pt-BR" dirty="0"/>
+              <a:t>Resultados</a:t>
+            </a:r>
+          </a:p>
+        </p:txBody>
+      </p:sp>
+      <p:sp>
+        <p:nvSpPr>
+          <p:cNvPr id="3" name="Espaço Reservado para Conteúdo 2">
+            <a:extLst>
+              <a:ext uri="{FF2B5EF4-FFF2-40B4-BE49-F238E27FC236}">
+                <a16:creationId xmlns:a16="http://schemas.microsoft.com/office/drawing/2014/main" id="{F22F88A5-87D1-340F-853F-8C2ED8F8C877}"/>
+              </a:ext>
+            </a:extLst>
+          </p:cNvPr>
+          <p:cNvSpPr>
+            <a:spLocks noGrp="1"/>
+          </p:cNvSpPr>
+          <p:nvPr>
+            <p:ph idx="1"/>
+          </p:nvPr>
+        </p:nvSpPr>
+        <p:spPr/>
+        <p:txBody>
+          <a:bodyPr/>
+          <a:lstStyle/>
+          <a:p>
+            <a:pPr fontAlgn="base"/>
+            <a:r>
+              <a:rPr lang="pt-BR" dirty="0"/>
+              <a:t>Principais gráficos/tabelas</a:t>
+            </a:r>
+          </a:p>
+          <a:p>
+            <a:pPr fontAlgn="base"/>
+            <a:r>
+              <a:rPr lang="pt-BR" dirty="0"/>
+              <a:t>Comparação com estado da arte</a:t>
+            </a:r>
+          </a:p>
+          <a:p>
+            <a:pPr fontAlgn="base"/>
+            <a:r>
+              <a:rPr lang="pt-BR" dirty="0"/>
+              <a:t>O que funcionou e o que não funcionou</a:t>
+            </a:r>
+          </a:p>
+          <a:p>
+            <a:pPr fontAlgn="base"/>
+            <a:r>
+              <a:rPr lang="pt-BR" dirty="0"/>
+              <a:t>Reproduzir os resultados ou parte deles é importante.</a:t>
+            </a:r>
+          </a:p>
+        </p:txBody>
+      </p:sp>
+    </p:spTree>
+    <p:extLst>
+      <p:ext uri="{BB962C8B-B14F-4D97-AF65-F5344CB8AC3E}">
+        <p14:creationId xmlns:p14="http://schemas.microsoft.com/office/powerpoint/2010/main" val="523013194"/>
+      </p:ext>
+    </p:extLst>
+  </p:cSld>
+  <p:clrMapOvr>
+    <a:masterClrMapping/>
+  </p:clrMapOvr>
+</p:sld>
+</file>
+
+<file path=ppt/slides/slide29.xml><?xml version="1.0" encoding="utf-8"?>
+<p:sld xmlns:a="http://schemas.openxmlformats.org/drawingml/2006/main" xmlns:r="http://schemas.openxmlformats.org/officeDocument/2006/relationships" xmlns:p="http://schemas.openxmlformats.org/presentationml/2006/main">
+  <p:cSld>
+    <p:spTree>
+      <p:nvGrpSpPr>
+        <p:cNvPr id="1" name="">
+          <a:extLst>
+            <a:ext uri="{FF2B5EF4-FFF2-40B4-BE49-F238E27FC236}">
+              <a16:creationId xmlns:a16="http://schemas.microsoft.com/office/drawing/2014/main" id="{B28A9759-CA4F-DA4F-85C2-F6E51DCED2D9}"/>
+            </a:ext>
+          </a:extLst>
+        </p:cNvPr>
+        <p:cNvGrpSpPr/>
+        <p:nvPr/>
+      </p:nvGrpSpPr>
+      <p:grpSpPr>
+        <a:xfrm>
+          <a:off x="0" y="0"/>
+          <a:ext cx="0" cy="0"/>
+          <a:chOff x="0" y="0"/>
+          <a:chExt cx="0" cy="0"/>
+        </a:xfrm>
+      </p:grpSpPr>
+      <p:sp>
+        <p:nvSpPr>
+          <p:cNvPr id="2" name="Título 1">
+            <a:extLst>
+              <a:ext uri="{FF2B5EF4-FFF2-40B4-BE49-F238E27FC236}">
+                <a16:creationId xmlns:a16="http://schemas.microsoft.com/office/drawing/2014/main" id="{072F732D-34CE-6153-324F-D7F6821577F0}"/>
+              </a:ext>
+            </a:extLst>
+          </p:cNvPr>
+          <p:cNvSpPr>
+            <a:spLocks noGrp="1"/>
+          </p:cNvSpPr>
+          <p:nvPr>
+            <p:ph type="title"/>
+          </p:nvPr>
+        </p:nvSpPr>
+        <p:spPr/>
+        <p:txBody>
+          <a:bodyPr/>
+          <a:lstStyle/>
+          <a:p>
+            <a:r>
+              <a:rPr lang="pt-BR" dirty="0"/>
+              <a:t>Análise crítica do trabalho</a:t>
+            </a:r>
+          </a:p>
+        </p:txBody>
+      </p:sp>
+      <p:sp>
+        <p:nvSpPr>
+          <p:cNvPr id="3" name="Espaço Reservado para Conteúdo 2">
+            <a:extLst>
+              <a:ext uri="{FF2B5EF4-FFF2-40B4-BE49-F238E27FC236}">
+                <a16:creationId xmlns:a16="http://schemas.microsoft.com/office/drawing/2014/main" id="{62A55622-8E11-E5D7-8EAF-7AE2CCAA3321}"/>
+              </a:ext>
+            </a:extLst>
+          </p:cNvPr>
+          <p:cNvSpPr>
+            <a:spLocks noGrp="1"/>
+          </p:cNvSpPr>
+          <p:nvPr>
+            <p:ph idx="1"/>
+          </p:nvPr>
+        </p:nvSpPr>
+        <p:spPr/>
+        <p:txBody>
+          <a:bodyPr/>
+          <a:lstStyle/>
+          <a:p>
+            <a:pPr fontAlgn="base"/>
+            <a:r>
+              <a:rPr lang="pt-BR" dirty="0"/>
+              <a:t>Pontos fortes</a:t>
+            </a:r>
+          </a:p>
+          <a:p>
+            <a:pPr fontAlgn="base"/>
+            <a:r>
+              <a:rPr lang="pt-BR" dirty="0"/>
+              <a:t>Limitações</a:t>
+            </a:r>
+          </a:p>
+          <a:p>
+            <a:pPr fontAlgn="base"/>
+            <a:r>
+              <a:rPr lang="pt-BR" dirty="0"/>
+              <a:t>Possíveis melhorias</a:t>
+            </a:r>
+          </a:p>
+          <a:p>
+            <a:pPr fontAlgn="base"/>
+            <a:r>
+              <a:rPr lang="pt-BR" dirty="0"/>
+              <a:t>Aplicações práticas</a:t>
+            </a:r>
+          </a:p>
+        </p:txBody>
+      </p:sp>
+    </p:spTree>
+    <p:extLst>
+      <p:ext uri="{BB962C8B-B14F-4D97-AF65-F5344CB8AC3E}">
+        <p14:creationId xmlns:p14="http://schemas.microsoft.com/office/powerpoint/2010/main" val="1521811257"/>
+      </p:ext>
+    </p:extLst>
+  </p:cSld>
+  <p:clrMapOvr>
+    <a:masterClrMapping/>
+  </p:clrMapOvr>
+</p:sld>
+</file>
+
 <file path=ppt/slides/slide3.xml><?xml version="1.0" encoding="utf-8"?>
+<p:sld xmlns:a="http://schemas.openxmlformats.org/drawingml/2006/main" xmlns:r="http://schemas.openxmlformats.org/officeDocument/2006/relationships" xmlns:p="http://schemas.openxmlformats.org/presentationml/2006/main">
+  <p:cSld>
+    <p:spTree>
+      <p:nvGrpSpPr>
+        <p:cNvPr id="1" name=""/>
+        <p:cNvGrpSpPr/>
+        <p:nvPr/>
+      </p:nvGrpSpPr>
+      <p:grpSpPr>
+        <a:xfrm>
+          <a:off x="0" y="0"/>
+          <a:ext cx="0" cy="0"/>
+          <a:chOff x="0" y="0"/>
+          <a:chExt cx="0" cy="0"/>
+        </a:xfrm>
+      </p:grpSpPr>
+      <p:sp>
+        <p:nvSpPr>
+          <p:cNvPr id="2" name="Título 1">
+            <a:extLst>
+              <a:ext uri="{FF2B5EF4-FFF2-40B4-BE49-F238E27FC236}">
+                <a16:creationId xmlns:a16="http://schemas.microsoft.com/office/drawing/2014/main" id="{7F5FF925-67DE-CC62-E869-C6E3C1D771E6}"/>
+              </a:ext>
+            </a:extLst>
+          </p:cNvPr>
+          <p:cNvSpPr>
+            <a:spLocks noGrp="1"/>
+          </p:cNvSpPr>
+          <p:nvPr>
+            <p:ph type="title"/>
+          </p:nvPr>
+        </p:nvSpPr>
+        <p:spPr>
+          <a:xfrm>
+            <a:off x="0" y="0"/>
+            <a:ext cx="10515600" cy="1325563"/>
+          </a:xfrm>
+        </p:spPr>
+        <p:txBody>
+          <a:bodyPr/>
+          <a:lstStyle/>
+          <a:p>
+            <a:r>
+              <a:rPr lang="pt-BR" dirty="0"/>
+              <a:t>Abertura </a:t>
+            </a:r>
+          </a:p>
+        </p:txBody>
+      </p:sp>
+      <p:sp>
+        <p:nvSpPr>
+          <p:cNvPr id="3" name="Espaço Reservado para Conteúdo 2">
+            <a:extLst>
+              <a:ext uri="{FF2B5EF4-FFF2-40B4-BE49-F238E27FC236}">
+                <a16:creationId xmlns:a16="http://schemas.microsoft.com/office/drawing/2014/main" id="{7DA84068-671A-9D40-4F76-2C57E4F720C2}"/>
+              </a:ext>
+            </a:extLst>
+          </p:cNvPr>
+          <p:cNvSpPr>
+            <a:spLocks noGrp="1"/>
+          </p:cNvSpPr>
+          <p:nvPr>
+            <p:ph idx="1"/>
+          </p:nvPr>
+        </p:nvSpPr>
+        <p:spPr>
+          <a:xfrm>
+            <a:off x="838200" y="1690688"/>
+            <a:ext cx="10850880" cy="4679632"/>
+          </a:xfrm>
+        </p:spPr>
+        <p:txBody>
+          <a:bodyPr>
+            <a:normAutofit fontScale="92500" lnSpcReduction="10000"/>
+          </a:bodyPr>
+          <a:lstStyle/>
+          <a:p>
+            <a:pPr fontAlgn="base"/>
+            <a:r>
+              <a:rPr lang="pt-BR" dirty="0"/>
+              <a:t>FANN-</a:t>
+            </a:r>
+            <a:r>
+              <a:rPr lang="pt-BR" dirty="0" err="1"/>
+              <a:t>on</a:t>
+            </a:r>
+            <a:r>
+              <a:rPr lang="pt-BR" dirty="0"/>
+              <a:t>-MCU:</a:t>
+            </a:r>
+          </a:p>
+          <a:p>
+            <a:pPr lvl="1" fontAlgn="base"/>
+            <a:r>
+              <a:rPr lang="pt-BR" dirty="0"/>
+              <a:t>Toolkit open-</a:t>
+            </a:r>
+            <a:r>
+              <a:rPr lang="pt-BR" dirty="0" err="1"/>
+              <a:t>source</a:t>
+            </a:r>
+            <a:r>
+              <a:rPr lang="pt-BR" dirty="0"/>
+              <a:t>;</a:t>
+            </a:r>
+          </a:p>
+          <a:p>
+            <a:pPr lvl="1" fontAlgn="base"/>
+            <a:r>
+              <a:rPr lang="en-US" dirty="0"/>
+              <a:t>Fast Artificial Neural Network (FANN);</a:t>
+            </a:r>
+            <a:endParaRPr lang="pt-BR" dirty="0"/>
+          </a:p>
+          <a:p>
+            <a:pPr lvl="1" fontAlgn="base"/>
+            <a:r>
+              <a:rPr lang="pt-BR" dirty="0"/>
+              <a:t>Geração de código otimizado para </a:t>
+            </a:r>
+            <a:r>
+              <a:rPr lang="pt-BR" dirty="0" err="1"/>
+              <a:t>microcotroladores</a:t>
+            </a:r>
+            <a:r>
+              <a:rPr lang="pt-BR" dirty="0"/>
+              <a:t>.</a:t>
+            </a:r>
+          </a:p>
+          <a:p>
+            <a:pPr marL="457200" lvl="1" indent="0" fontAlgn="base">
+              <a:buNone/>
+            </a:pPr>
+            <a:endParaRPr lang="pt-BR" dirty="0"/>
+          </a:p>
+          <a:p>
+            <a:pPr fontAlgn="base"/>
+            <a:r>
+              <a:rPr lang="pt-BR" dirty="0">
+                <a:solidFill>
+                  <a:srgbClr val="303030"/>
+                </a:solidFill>
+                <a:latin typeface="Google Sans Text"/>
+              </a:rPr>
+              <a:t>A</a:t>
+            </a:r>
+            <a:r>
+              <a:rPr lang="pt-BR" b="0" i="0" dirty="0">
+                <a:solidFill>
+                  <a:srgbClr val="303030"/>
+                </a:solidFill>
+                <a:effectLst/>
+                <a:latin typeface="Google Sans Text"/>
+              </a:rPr>
+              <a:t>nálise de eficiência energética entre diferentes núcleos;</a:t>
+            </a:r>
+          </a:p>
+          <a:p>
+            <a:pPr fontAlgn="base"/>
+            <a:endParaRPr lang="pt-BR" dirty="0">
+              <a:solidFill>
+                <a:srgbClr val="303030"/>
+              </a:solidFill>
+              <a:latin typeface="Google Sans Text"/>
+            </a:endParaRPr>
+          </a:p>
+          <a:p>
+            <a:pPr fontAlgn="base"/>
+            <a:r>
+              <a:rPr lang="pt-BR" dirty="0">
+                <a:solidFill>
+                  <a:srgbClr val="303030"/>
+                </a:solidFill>
+                <a:latin typeface="Google Sans Text"/>
+              </a:rPr>
+              <a:t>A</a:t>
+            </a:r>
+            <a:r>
+              <a:rPr lang="pt-BR" b="0" i="0" dirty="0">
+                <a:solidFill>
+                  <a:srgbClr val="303030"/>
+                </a:solidFill>
+                <a:effectLst/>
+                <a:latin typeface="Google Sans Text"/>
+              </a:rPr>
+              <a:t>nálise das acelerações paralelas e das degradações devido à sobrecarga de paralelização e transferências de memória.</a:t>
+            </a:r>
+          </a:p>
+          <a:p>
+            <a:pPr fontAlgn="base"/>
+            <a:endParaRPr lang="pt-BR" dirty="0">
+              <a:solidFill>
+                <a:srgbClr val="303030"/>
+              </a:solidFill>
+              <a:latin typeface="Google Sans Text"/>
+            </a:endParaRPr>
+          </a:p>
+          <a:p>
+            <a:pPr fontAlgn="base"/>
+            <a:r>
+              <a:rPr lang="pt-BR" b="0" i="0" dirty="0">
+                <a:solidFill>
+                  <a:srgbClr val="303030"/>
+                </a:solidFill>
+                <a:effectLst/>
+                <a:latin typeface="Google Sans Text"/>
+              </a:rPr>
+              <a:t>Resultados experimentais.</a:t>
+            </a:r>
+            <a:endParaRPr lang="pt-BR" dirty="0"/>
+          </a:p>
+        </p:txBody>
+      </p:sp>
+    </p:spTree>
+    <p:extLst>
+      <p:ext uri="{BB962C8B-B14F-4D97-AF65-F5344CB8AC3E}">
+        <p14:creationId xmlns:p14="http://schemas.microsoft.com/office/powerpoint/2010/main" val="4294187898"/>
+      </p:ext>
+    </p:extLst>
+  </p:cSld>
+  <p:clrMapOvr>
+    <a:masterClrMapping/>
+  </p:clrMapOvr>
+</p:sld>
+</file>
+
+<file path=ppt/slides/slide30.xml><?xml version="1.0" encoding="utf-8"?>
+<p:sld xmlns:a="http://schemas.openxmlformats.org/drawingml/2006/main" xmlns:r="http://schemas.openxmlformats.org/officeDocument/2006/relationships" xmlns:p="http://schemas.openxmlformats.org/presentationml/2006/main">
+  <p:cSld>
+    <p:spTree>
+      <p:nvGrpSpPr>
+        <p:cNvPr id="1" name=""/>
+        <p:cNvGrpSpPr/>
+        <p:nvPr/>
+      </p:nvGrpSpPr>
+      <p:grpSpPr>
+        <a:xfrm>
+          <a:off x="0" y="0"/>
+          <a:ext cx="0" cy="0"/>
+          <a:chOff x="0" y="0"/>
+          <a:chExt cx="0" cy="0"/>
+        </a:xfrm>
+      </p:grpSpPr>
+      <p:sp>
+        <p:nvSpPr>
+          <p:cNvPr id="2" name="Título 1">
+            <a:extLst>
+              <a:ext uri="{FF2B5EF4-FFF2-40B4-BE49-F238E27FC236}">
+                <a16:creationId xmlns:a16="http://schemas.microsoft.com/office/drawing/2014/main" id="{B9E502FC-4440-F5DA-F299-69CD15E702AE}"/>
+              </a:ext>
+            </a:extLst>
+          </p:cNvPr>
+          <p:cNvSpPr>
+            <a:spLocks noGrp="1"/>
+          </p:cNvSpPr>
+          <p:nvPr>
+            <p:ph type="title"/>
+          </p:nvPr>
+        </p:nvSpPr>
+        <p:spPr/>
+        <p:txBody>
+          <a:bodyPr/>
+          <a:lstStyle/>
+          <a:p>
+            <a:r>
+              <a:rPr lang="en-US" dirty="0" err="1"/>
+              <a:t>Conclusão</a:t>
+            </a:r>
+            <a:endParaRPr lang="pt-BR" dirty="0"/>
+          </a:p>
+        </p:txBody>
+      </p:sp>
+      <p:sp>
+        <p:nvSpPr>
+          <p:cNvPr id="3" name="Espaço Reservado para Conteúdo 2">
+            <a:extLst>
+              <a:ext uri="{FF2B5EF4-FFF2-40B4-BE49-F238E27FC236}">
+                <a16:creationId xmlns:a16="http://schemas.microsoft.com/office/drawing/2014/main" id="{69359096-6B47-BEA3-55AD-95F90CDC8489}"/>
+              </a:ext>
+            </a:extLst>
+          </p:cNvPr>
+          <p:cNvSpPr>
+            <a:spLocks noGrp="1"/>
+          </p:cNvSpPr>
+          <p:nvPr>
+            <p:ph idx="1"/>
+          </p:nvPr>
+        </p:nvSpPr>
+        <p:spPr/>
+        <p:txBody>
+          <a:bodyPr/>
+          <a:lstStyle/>
+          <a:p>
+            <a:pPr fontAlgn="base"/>
+            <a:r>
+              <a:rPr lang="pt-BR" dirty="0"/>
+              <a:t>Síntese do que foi aprendido</a:t>
+            </a:r>
+          </a:p>
+          <a:p>
+            <a:pPr fontAlgn="base"/>
+            <a:r>
+              <a:rPr lang="pt-BR" dirty="0"/>
+              <a:t>Impacto do trabalho</a:t>
+            </a:r>
+          </a:p>
+          <a:p>
+            <a:pPr fontAlgn="base"/>
+            <a:r>
+              <a:rPr lang="pt-BR" dirty="0"/>
+              <a:t>Direções futuras propostas pelos autores ou encontradas por você</a:t>
+            </a:r>
+          </a:p>
+        </p:txBody>
+      </p:sp>
+    </p:spTree>
+    <p:extLst>
+      <p:ext uri="{BB962C8B-B14F-4D97-AF65-F5344CB8AC3E}">
+        <p14:creationId xmlns:p14="http://schemas.microsoft.com/office/powerpoint/2010/main" val="1532530965"/>
+      </p:ext>
+    </p:extLst>
+  </p:cSld>
+  <p:clrMapOvr>
+    <a:masterClrMapping/>
+  </p:clrMapOvr>
+</p:sld>
+</file>
+
+<file path=ppt/slides/slide31.xml><?xml version="1.0" encoding="utf-8"?>
+<p:sld xmlns:a="http://schemas.openxmlformats.org/drawingml/2006/main" xmlns:r="http://schemas.openxmlformats.org/officeDocument/2006/relationships" xmlns:p="http://schemas.openxmlformats.org/presentationml/2006/main">
+  <p:cSld>
+    <p:spTree>
+      <p:nvGrpSpPr>
+        <p:cNvPr id="1" name=""/>
+        <p:cNvGrpSpPr/>
+        <p:nvPr/>
+      </p:nvGrpSpPr>
+      <p:grpSpPr>
+        <a:xfrm>
+          <a:off x="0" y="0"/>
+          <a:ext cx="0" cy="0"/>
+          <a:chOff x="0" y="0"/>
+          <a:chExt cx="0" cy="0"/>
+        </a:xfrm>
+      </p:grpSpPr>
+      <p:sp>
+        <p:nvSpPr>
+          <p:cNvPr id="4" name="Título 1">
+            <a:extLst>
+              <a:ext uri="{FF2B5EF4-FFF2-40B4-BE49-F238E27FC236}">
+                <a16:creationId xmlns:a16="http://schemas.microsoft.com/office/drawing/2014/main" id="{32666AC8-2E17-4DB4-B0F5-60C640CCFD2E}"/>
+              </a:ext>
+            </a:extLst>
+          </p:cNvPr>
+          <p:cNvSpPr txBox="1">
+            <a:spLocks/>
+          </p:cNvSpPr>
+          <p:nvPr/>
+        </p:nvSpPr>
+        <p:spPr>
+          <a:xfrm>
+            <a:off x="1431533" y="2720526"/>
+            <a:ext cx="9144000" cy="1029541"/>
+          </a:xfrm>
+          <a:prstGeom prst="rect">
+            <a:avLst/>
+          </a:prstGeom>
+        </p:spPr>
+        <p:txBody>
+          <a:bodyPr vert="horz" lIns="91440" tIns="45720" rIns="91440" bIns="45720" rtlCol="0" anchor="ctr">
+            <a:normAutofit/>
+          </a:bodyPr>
+          <a:lstStyle>
+            <a:lvl1pPr algn="l" defTabSz="914400" rtl="0" eaLnBrk="1" latinLnBrk="0" hangingPunct="1">
+              <a:lnSpc>
+                <a:spcPct val="90000"/>
+              </a:lnSpc>
+              <a:spcBef>
+                <a:spcPct val="0"/>
+              </a:spcBef>
+              <a:buNone/>
+              <a:defRPr sz="4400" kern="1200">
+                <a:solidFill>
+                  <a:schemeClr val="tx1"/>
+                </a:solidFill>
+                <a:latin typeface="+mj-lt"/>
+                <a:ea typeface="+mj-ea"/>
+                <a:cs typeface="+mj-cs"/>
+              </a:defRPr>
+            </a:lvl1pPr>
+          </a:lstStyle>
+          <a:p>
+            <a:pPr algn="ctr"/>
+            <a:r>
+              <a:rPr lang="pt-BR" sz="6600" dirty="0"/>
+              <a:t>Perguntas?</a:t>
+            </a:r>
+            <a:endParaRPr lang="pt-BR" sz="6600" b="1" i="1" dirty="0"/>
+          </a:p>
+        </p:txBody>
+      </p:sp>
+    </p:spTree>
+    <p:extLst>
+      <p:ext uri="{BB962C8B-B14F-4D97-AF65-F5344CB8AC3E}">
+        <p14:creationId xmlns:p14="http://schemas.microsoft.com/office/powerpoint/2010/main" val="3773005660"/>
+      </p:ext>
+    </p:extLst>
+  </p:cSld>
+  <p:clrMapOvr>
+    <a:masterClrMapping/>
+  </p:clrMapOvr>
+</p:sld>
+</file>
+
+<file path=ppt/slides/slide32.xml><?xml version="1.0" encoding="utf-8"?>
+<p:sld xmlns:a="http://schemas.openxmlformats.org/drawingml/2006/main" xmlns:r="http://schemas.openxmlformats.org/officeDocument/2006/relationships" xmlns:p="http://schemas.openxmlformats.org/presentationml/2006/main">
+  <p:cSld>
+    <p:spTree>
+      <p:nvGrpSpPr>
+        <p:cNvPr id="1" name=""/>
+        <p:cNvGrpSpPr/>
+        <p:nvPr/>
+      </p:nvGrpSpPr>
+      <p:grpSpPr>
+        <a:xfrm>
+          <a:off x="0" y="0"/>
+          <a:ext cx="0" cy="0"/>
+          <a:chOff x="0" y="0"/>
+          <a:chExt cx="0" cy="0"/>
+        </a:xfrm>
+      </p:grpSpPr>
+      <p:sp>
+        <p:nvSpPr>
+          <p:cNvPr id="2" name="Título 1">
+            <a:extLst>
+              <a:ext uri="{FF2B5EF4-FFF2-40B4-BE49-F238E27FC236}">
+                <a16:creationId xmlns:a16="http://schemas.microsoft.com/office/drawing/2014/main" id="{3CA32550-8C76-B013-2EC7-989D8C3B19BE}"/>
+              </a:ext>
+            </a:extLst>
+          </p:cNvPr>
+          <p:cNvSpPr>
+            <a:spLocks noGrp="1"/>
+          </p:cNvSpPr>
+          <p:nvPr>
+            <p:ph type="title"/>
+          </p:nvPr>
+        </p:nvSpPr>
+        <p:spPr/>
+        <p:txBody>
+          <a:bodyPr/>
+          <a:lstStyle/>
+          <a:p>
+            <a:r>
+              <a:rPr lang="pt-BR" dirty="0"/>
+              <a:t>Referências</a:t>
+            </a:r>
+          </a:p>
+        </p:txBody>
+      </p:sp>
+      <p:sp>
+        <p:nvSpPr>
+          <p:cNvPr id="3" name="Espaço Reservado para Conteúdo 2">
+            <a:extLst>
+              <a:ext uri="{FF2B5EF4-FFF2-40B4-BE49-F238E27FC236}">
+                <a16:creationId xmlns:a16="http://schemas.microsoft.com/office/drawing/2014/main" id="{EF043237-7757-7557-B63E-D4EB5152D44B}"/>
+              </a:ext>
+            </a:extLst>
+          </p:cNvPr>
+          <p:cNvSpPr>
+            <a:spLocks noGrp="1"/>
+          </p:cNvSpPr>
+          <p:nvPr>
+            <p:ph idx="1"/>
+          </p:nvPr>
+        </p:nvSpPr>
+        <p:spPr/>
+        <p:txBody>
+          <a:bodyPr/>
+          <a:lstStyle/>
+          <a:p>
+            <a:r>
+              <a:rPr lang="pt-BR" dirty="0"/>
+              <a:t>Artigos, livros, blogs, etc. usados como referência para o desenvolvimento do seminário.</a:t>
+            </a:r>
+          </a:p>
+        </p:txBody>
+      </p:sp>
+    </p:spTree>
+    <p:extLst>
+      <p:ext uri="{BB962C8B-B14F-4D97-AF65-F5344CB8AC3E}">
+        <p14:creationId xmlns:p14="http://schemas.microsoft.com/office/powerpoint/2010/main" val="1787264919"/>
+      </p:ext>
+    </p:extLst>
+  </p:cSld>
+  <p:clrMapOvr>
+    <a:masterClrMapping/>
+  </p:clrMapOvr>
+</p:sld>
+</file>
+
+<file path=ppt/slides/slide33.xml><?xml version="1.0" encoding="utf-8"?>
+<p:sld xmlns:a="http://schemas.openxmlformats.org/drawingml/2006/main" xmlns:r="http://schemas.openxmlformats.org/officeDocument/2006/relationships" xmlns:p="http://schemas.openxmlformats.org/presentationml/2006/main">
+  <p:cSld>
+    <p:spTree>
+      <p:nvGrpSpPr>
+        <p:cNvPr id="1" name=""/>
+        <p:cNvGrpSpPr/>
+        <p:nvPr/>
+      </p:nvGrpSpPr>
+      <p:grpSpPr>
+        <a:xfrm>
+          <a:off x="0" y="0"/>
+          <a:ext cx="0" cy="0"/>
+          <a:chOff x="0" y="0"/>
+          <a:chExt cx="0" cy="0"/>
+        </a:xfrm>
+      </p:grpSpPr>
+      <p:sp>
+        <p:nvSpPr>
+          <p:cNvPr id="4" name="Título 1">
+            <a:extLst>
+              <a:ext uri="{FF2B5EF4-FFF2-40B4-BE49-F238E27FC236}">
+                <a16:creationId xmlns:a16="http://schemas.microsoft.com/office/drawing/2014/main" id="{32666AC8-2E17-4DB4-B0F5-60C640CCFD2E}"/>
+              </a:ext>
+            </a:extLst>
+          </p:cNvPr>
+          <p:cNvSpPr txBox="1">
+            <a:spLocks/>
+          </p:cNvSpPr>
+          <p:nvPr/>
+        </p:nvSpPr>
+        <p:spPr>
+          <a:xfrm>
+            <a:off x="1431533" y="2720526"/>
+            <a:ext cx="9144000" cy="1029541"/>
+          </a:xfrm>
+          <a:prstGeom prst="rect">
+            <a:avLst/>
+          </a:prstGeom>
+        </p:spPr>
+        <p:txBody>
+          <a:bodyPr vert="horz" lIns="91440" tIns="45720" rIns="91440" bIns="45720" rtlCol="0" anchor="ctr">
+            <a:normAutofit/>
+          </a:bodyPr>
+          <a:lstStyle>
+            <a:lvl1pPr algn="l" defTabSz="914400" rtl="0" eaLnBrk="1" latinLnBrk="0" hangingPunct="1">
+              <a:lnSpc>
+                <a:spcPct val="90000"/>
+              </a:lnSpc>
+              <a:spcBef>
+                <a:spcPct val="0"/>
+              </a:spcBef>
+              <a:buNone/>
+              <a:defRPr sz="4400" kern="1200">
+                <a:solidFill>
+                  <a:schemeClr val="tx1"/>
+                </a:solidFill>
+                <a:latin typeface="+mj-lt"/>
+                <a:ea typeface="+mj-ea"/>
+                <a:cs typeface="+mj-cs"/>
+              </a:defRPr>
+            </a:lvl1pPr>
+          </a:lstStyle>
+          <a:p>
+            <a:pPr algn="ctr"/>
+            <a:r>
+              <a:rPr lang="pt-BR" sz="6600" dirty="0"/>
+              <a:t>Obrigado!</a:t>
+            </a:r>
+            <a:endParaRPr lang="pt-BR" sz="6600" b="1" i="1" dirty="0"/>
+          </a:p>
+        </p:txBody>
+      </p:sp>
+    </p:spTree>
+    <p:extLst>
+      <p:ext uri="{BB962C8B-B14F-4D97-AF65-F5344CB8AC3E}">
+        <p14:creationId xmlns:p14="http://schemas.microsoft.com/office/powerpoint/2010/main" val="2655704619"/>
+      </p:ext>
+    </p:extLst>
+  </p:cSld>
+  <p:clrMapOvr>
+    <a:masterClrMapping/>
+  </p:clrMapOvr>
+</p:sld>
+</file>
+
+<file path=ppt/slides/slide4.xml><?xml version="1.0" encoding="utf-8"?>
 <p:sld xmlns:a="http://schemas.openxmlformats.org/drawingml/2006/main" xmlns:r="http://schemas.openxmlformats.org/officeDocument/2006/relationships" xmlns:p="http://schemas.openxmlformats.org/presentationml/2006/main">
   <p:cSld>
     <p:spTree>
@@ -4518,164 +9664,120 @@
             <p:ph type="title"/>
           </p:nvPr>
         </p:nvSpPr>
+        <p:spPr>
+          <a:xfrm>
+            <a:off x="0" y="0"/>
+            <a:ext cx="10515600" cy="1325563"/>
+          </a:xfrm>
+        </p:spPr>
+        <p:txBody>
+          <a:bodyPr/>
+          <a:lstStyle/>
+          <a:p>
+            <a:r>
+              <a:rPr lang="pt-BR" dirty="0"/>
+              <a:t>Introdução</a:t>
+            </a:r>
+          </a:p>
+        </p:txBody>
+      </p:sp>
+      <p:sp>
+        <p:nvSpPr>
+          <p:cNvPr id="3" name="Espaço Reservado para Conteúdo 2">
+            <a:extLst>
+              <a:ext uri="{FF2B5EF4-FFF2-40B4-BE49-F238E27FC236}">
+                <a16:creationId xmlns:a16="http://schemas.microsoft.com/office/drawing/2014/main" id="{A9FDF00C-07E3-57DD-2C43-753297609C4B}"/>
+              </a:ext>
+            </a:extLst>
+          </p:cNvPr>
+          <p:cNvSpPr>
+            <a:spLocks noGrp="1"/>
+          </p:cNvSpPr>
+          <p:nvPr>
+            <p:ph idx="1"/>
+          </p:nvPr>
+        </p:nvSpPr>
         <p:spPr/>
         <p:txBody>
-          <a:bodyPr/>
-          <a:lstStyle/>
-          <a:p>
-            <a:r>
-              <a:rPr lang="pt-BR" dirty="0"/>
-              <a:t>Introdução do artigo</a:t>
-            </a:r>
-          </a:p>
-        </p:txBody>
-      </p:sp>
-      <p:sp>
-        <p:nvSpPr>
-          <p:cNvPr id="3" name="Espaço Reservado para Conteúdo 2">
-            <a:extLst>
-              <a:ext uri="{FF2B5EF4-FFF2-40B4-BE49-F238E27FC236}">
-                <a16:creationId xmlns:a16="http://schemas.microsoft.com/office/drawing/2014/main" id="{A9FDF00C-07E3-57DD-2C43-753297609C4B}"/>
-              </a:ext>
-            </a:extLst>
-          </p:cNvPr>
-          <p:cNvSpPr>
-            <a:spLocks noGrp="1"/>
-          </p:cNvSpPr>
-          <p:nvPr>
-            <p:ph idx="1"/>
-          </p:nvPr>
-        </p:nvSpPr>
-        <p:spPr/>
-        <p:txBody>
-          <a:bodyPr/>
-          <a:lstStyle/>
-          <a:p>
-            <a:pPr fontAlgn="base"/>
-            <a:r>
-              <a:rPr lang="pt-BR" dirty="0"/>
-              <a:t>Objetivo</a:t>
-            </a:r>
-            <a:endParaRPr lang="pt-BR" b="1" dirty="0"/>
-          </a:p>
-          <a:p>
-            <a:pPr fontAlgn="base"/>
-            <a:r>
-              <a:rPr lang="pt-BR" dirty="0"/>
-              <a:t>Hipótese</a:t>
-            </a:r>
-            <a:endParaRPr lang="pt-BR" b="1" dirty="0"/>
-          </a:p>
-          <a:p>
-            <a:pPr fontAlgn="base"/>
-            <a:r>
-              <a:rPr lang="pt-BR" dirty="0"/>
-              <a:t>Contribuições declaradas pelos autores</a:t>
-            </a:r>
-            <a:endParaRPr lang="pt-BR" b="1" dirty="0"/>
+          <a:bodyPr>
+            <a:normAutofit fontScale="92500" lnSpcReduction="10000"/>
+          </a:bodyPr>
+          <a:lstStyle/>
+          <a:p>
+            <a:pPr fontAlgn="base"/>
+            <a:r>
+              <a:rPr lang="pt-BR" dirty="0"/>
+              <a:t>ML aplicado em sistemas de IoT e dispositivos móveis </a:t>
+            </a:r>
+            <a:r>
+              <a:rPr lang="pt-BR" dirty="0">
+                <a:latin typeface="Calibri" panose="020F0502020204030204" pitchFamily="34" charset="0"/>
+                <a:ea typeface="Calibri" panose="020F0502020204030204" pitchFamily="34" charset="0"/>
+                <a:cs typeface="Calibri" panose="020F0502020204030204" pitchFamily="34" charset="0"/>
+              </a:rPr>
+              <a:t>→ </a:t>
+            </a:r>
+            <a:r>
+              <a:rPr lang="pt-BR" dirty="0"/>
+              <a:t>extrair informações de grandes volumes de dados sensoriais.</a:t>
+            </a:r>
+          </a:p>
+          <a:p>
+            <a:pPr fontAlgn="base"/>
+            <a:endParaRPr lang="pt-BR" dirty="0"/>
+          </a:p>
+          <a:p>
+            <a:pPr fontAlgn="base"/>
+            <a:r>
+              <a:rPr lang="pt-BR" dirty="0"/>
+              <a:t>Redes neurais apresentam alta precisão em tarefas de classificação.</a:t>
+            </a:r>
+          </a:p>
+          <a:p>
+            <a:pPr fontAlgn="base"/>
+            <a:endParaRPr lang="pt-BR" dirty="0"/>
+          </a:p>
+          <a:p>
+            <a:pPr fontAlgn="base"/>
+            <a:r>
+              <a:rPr lang="pt-BR" dirty="0"/>
+              <a:t>Limitação do modelo tradicional:</a:t>
+            </a:r>
+          </a:p>
+          <a:p>
+            <a:pPr fontAlgn="base"/>
+            <a:endParaRPr lang="pt-BR" dirty="0"/>
+          </a:p>
+          <a:p>
+            <a:pPr lvl="1" fontAlgn="base"/>
+            <a:r>
+              <a:rPr lang="pt-BR" dirty="0"/>
+              <a:t>Atualmente, o processamento de ML ocorre principalmente na nuvem;</a:t>
+            </a:r>
+          </a:p>
+          <a:p>
+            <a:pPr lvl="1" fontAlgn="base"/>
+            <a:endParaRPr lang="pt-BR" dirty="0"/>
+          </a:p>
+          <a:p>
+            <a:pPr lvl="1" fontAlgn="base"/>
+            <a:r>
+              <a:rPr lang="pt-BR" dirty="0"/>
+              <a:t>Dispositivos IoT enviam dados brutos ou pouco processados para processamento remoto.</a:t>
+            </a:r>
+          </a:p>
+          <a:p>
+            <a:pPr marL="0" indent="0" fontAlgn="base">
+              <a:buNone/>
+            </a:pPr>
+            <a:endParaRPr lang="pt-BR" dirty="0"/>
           </a:p>
         </p:txBody>
       </p:sp>
     </p:spTree>
     <p:extLst>
       <p:ext uri="{BB962C8B-B14F-4D97-AF65-F5344CB8AC3E}">
-        <p14:creationId xmlns:p14="http://schemas.microsoft.com/office/powerpoint/2010/main" val="2982830720"/>
-      </p:ext>
-    </p:extLst>
-  </p:cSld>
-  <p:clrMapOvr>
-    <a:masterClrMapping/>
-  </p:clrMapOvr>
-</p:sld>
-</file>
-
-<file path=ppt/slides/slide4.xml><?xml version="1.0" encoding="utf-8"?>
-<p:sld xmlns:a="http://schemas.openxmlformats.org/drawingml/2006/main" xmlns:r="http://schemas.openxmlformats.org/officeDocument/2006/relationships" xmlns:p="http://schemas.openxmlformats.org/presentationml/2006/main">
-  <p:cSld>
-    <p:spTree>
-      <p:nvGrpSpPr>
-        <p:cNvPr id="1" name=""/>
-        <p:cNvGrpSpPr/>
-        <p:nvPr/>
-      </p:nvGrpSpPr>
-      <p:grpSpPr>
-        <a:xfrm>
-          <a:off x="0" y="0"/>
-          <a:ext cx="0" cy="0"/>
-          <a:chOff x="0" y="0"/>
-          <a:chExt cx="0" cy="0"/>
-        </a:xfrm>
-      </p:grpSpPr>
-      <p:sp>
-        <p:nvSpPr>
-          <p:cNvPr id="2" name="Título 1">
-            <a:extLst>
-              <a:ext uri="{FF2B5EF4-FFF2-40B4-BE49-F238E27FC236}">
-                <a16:creationId xmlns:a16="http://schemas.microsoft.com/office/drawing/2014/main" id="{94AB8438-E56E-2412-517C-8456E4CA773C}"/>
-              </a:ext>
-            </a:extLst>
-          </p:cNvPr>
-          <p:cNvSpPr>
-            <a:spLocks noGrp="1"/>
-          </p:cNvSpPr>
-          <p:nvPr>
-            <p:ph type="title"/>
-          </p:nvPr>
-        </p:nvSpPr>
-        <p:spPr/>
-        <p:txBody>
-          <a:bodyPr/>
-          <a:lstStyle/>
-          <a:p>
-            <a:r>
-              <a:rPr lang="pt-BR" dirty="0"/>
-              <a:t>Fundamentação teórica</a:t>
-            </a:r>
-          </a:p>
-        </p:txBody>
-      </p:sp>
-      <p:sp>
-        <p:nvSpPr>
-          <p:cNvPr id="3" name="Espaço Reservado para Conteúdo 2">
-            <a:extLst>
-              <a:ext uri="{FF2B5EF4-FFF2-40B4-BE49-F238E27FC236}">
-                <a16:creationId xmlns:a16="http://schemas.microsoft.com/office/drawing/2014/main" id="{F7E2B09C-6D56-4C9F-A364-B904CCE2F1A0}"/>
-              </a:ext>
-            </a:extLst>
-          </p:cNvPr>
-          <p:cNvSpPr>
-            <a:spLocks noGrp="1"/>
-          </p:cNvSpPr>
-          <p:nvPr>
-            <p:ph idx="1"/>
-          </p:nvPr>
-        </p:nvSpPr>
-        <p:spPr/>
-        <p:txBody>
-          <a:bodyPr/>
-          <a:lstStyle/>
-          <a:p>
-            <a:pPr fontAlgn="base"/>
-            <a:r>
-              <a:rPr lang="pt-BR" dirty="0"/>
-              <a:t>Conceitos necessários para entender o trabalho</a:t>
-            </a:r>
-            <a:endParaRPr lang="pt-BR" b="1" dirty="0"/>
-          </a:p>
-          <a:p>
-            <a:pPr fontAlgn="base"/>
-            <a:r>
-              <a:rPr lang="pt-BR" dirty="0"/>
-              <a:t>Trabalhos relacionados mais importantes</a:t>
-            </a:r>
-            <a:endParaRPr lang="pt-BR" b="1" dirty="0"/>
-          </a:p>
-        </p:txBody>
-      </p:sp>
-    </p:spTree>
-    <p:extLst>
-      <p:ext uri="{BB962C8B-B14F-4D97-AF65-F5344CB8AC3E}">
-        <p14:creationId xmlns:p14="http://schemas.microsoft.com/office/powerpoint/2010/main" val="3187071590"/>
+        <p14:creationId xmlns:p14="http://schemas.microsoft.com/office/powerpoint/2010/main" val="306256328"/>
       </p:ext>
     </p:extLst>
   </p:cSld>
@@ -4690,7 +9792,13 @@
   <p:cSld>
     <p:spTree>
       <p:nvGrpSpPr>
-        <p:cNvPr id="1" name=""/>
+        <p:cNvPr id="1" name="">
+          <a:extLst>
+            <a:ext uri="{FF2B5EF4-FFF2-40B4-BE49-F238E27FC236}">
+              <a16:creationId xmlns:a16="http://schemas.microsoft.com/office/drawing/2014/main" id="{25D7944B-3372-1D90-B28C-FB39520968C9}"/>
+            </a:ext>
+          </a:extLst>
+        </p:cNvPr>
         <p:cNvGrpSpPr/>
         <p:nvPr/>
       </p:nvGrpSpPr>
@@ -4707,7 +9815,7 @@
           <p:cNvPr id="2" name="Título 1">
             <a:extLst>
               <a:ext uri="{FF2B5EF4-FFF2-40B4-BE49-F238E27FC236}">
-                <a16:creationId xmlns:a16="http://schemas.microsoft.com/office/drawing/2014/main" id="{083FFF02-0FC8-9F0B-AAB0-565FC99EA70D}"/>
+                <a16:creationId xmlns:a16="http://schemas.microsoft.com/office/drawing/2014/main" id="{0452B460-304F-8D6A-49E2-170E86973EFE}"/>
               </a:ext>
             </a:extLst>
           </p:cNvPr>
@@ -4718,65 +9826,108 @@
             <p:ph type="title"/>
           </p:nvPr>
         </p:nvSpPr>
+        <p:spPr>
+          <a:xfrm>
+            <a:off x="0" y="0"/>
+            <a:ext cx="10515600" cy="1325563"/>
+          </a:xfrm>
+        </p:spPr>
+        <p:txBody>
+          <a:bodyPr/>
+          <a:lstStyle/>
+          <a:p>
+            <a:r>
+              <a:rPr lang="pt-BR" dirty="0"/>
+              <a:t>Introdução</a:t>
+            </a:r>
+          </a:p>
+        </p:txBody>
+      </p:sp>
+      <p:sp>
+        <p:nvSpPr>
+          <p:cNvPr id="3" name="Espaço Reservado para Conteúdo 2">
+            <a:extLst>
+              <a:ext uri="{FF2B5EF4-FFF2-40B4-BE49-F238E27FC236}">
+                <a16:creationId xmlns:a16="http://schemas.microsoft.com/office/drawing/2014/main" id="{A9FDF00C-07E3-57DD-2C43-753297609C4B}"/>
+              </a:ext>
+            </a:extLst>
+          </p:cNvPr>
+          <p:cNvSpPr>
+            <a:spLocks noGrp="1"/>
+          </p:cNvSpPr>
+          <p:nvPr>
+            <p:ph idx="1"/>
+          </p:nvPr>
+        </p:nvSpPr>
         <p:spPr/>
         <p:txBody>
-          <a:bodyPr/>
-          <a:lstStyle/>
-          <a:p>
-            <a:r>
-              <a:rPr lang="pt-BR" dirty="0"/>
-              <a:t>Metodologia</a:t>
-            </a:r>
-          </a:p>
-        </p:txBody>
-      </p:sp>
-      <p:sp>
-        <p:nvSpPr>
-          <p:cNvPr id="3" name="Espaço Reservado para Conteúdo 2">
-            <a:extLst>
-              <a:ext uri="{FF2B5EF4-FFF2-40B4-BE49-F238E27FC236}">
-                <a16:creationId xmlns:a16="http://schemas.microsoft.com/office/drawing/2014/main" id="{8C5488AE-34B4-EF1D-F674-507FF2FCD122}"/>
-              </a:ext>
-            </a:extLst>
-          </p:cNvPr>
-          <p:cNvSpPr>
-            <a:spLocks noGrp="1"/>
-          </p:cNvSpPr>
-          <p:nvPr>
-            <p:ph idx="1"/>
-          </p:nvPr>
-        </p:nvSpPr>
-        <p:spPr/>
-        <p:txBody>
-          <a:bodyPr/>
-          <a:lstStyle/>
-          <a:p>
-            <a:pPr fontAlgn="base"/>
-            <a:r>
-              <a:rPr lang="pt-BR" dirty="0"/>
-              <a:t>Base de dados / cenário experimental</a:t>
-            </a:r>
-          </a:p>
-          <a:p>
-            <a:pPr fontAlgn="base"/>
-            <a:r>
-              <a:rPr lang="pt-BR" dirty="0"/>
-              <a:t>Modelos, algoritmos ou abordagem</a:t>
-            </a:r>
-          </a:p>
-          <a:p>
-            <a:pPr fontAlgn="base"/>
-            <a:r>
-              <a:rPr lang="pt-BR" dirty="0"/>
-              <a:t>Fluxo do método</a:t>
-            </a:r>
+          <a:bodyPr>
+            <a:normAutofit/>
+          </a:bodyPr>
+          <a:lstStyle/>
+          <a:p>
+            <a:pPr fontAlgn="base"/>
+            <a:r>
+              <a:rPr lang="pt-BR" dirty="0"/>
+              <a:t>Problema do modelo tradicional no contexto de IoT:</a:t>
+            </a:r>
+          </a:p>
+          <a:p>
+            <a:pPr fontAlgn="base"/>
+            <a:endParaRPr lang="pt-BR" dirty="0"/>
+          </a:p>
+          <a:p>
+            <a:pPr lvl="1" fontAlgn="base"/>
+            <a:r>
+              <a:rPr lang="pt-BR" dirty="0"/>
+              <a:t>Sobrecarga da rede;</a:t>
+            </a:r>
+          </a:p>
+          <a:p>
+            <a:pPr lvl="1" fontAlgn="base"/>
+            <a:endParaRPr lang="pt-BR" dirty="0"/>
+          </a:p>
+          <a:p>
+            <a:pPr lvl="1" fontAlgn="base"/>
+            <a:r>
+              <a:rPr lang="pt-BR" dirty="0"/>
+              <a:t>Maior consumo de energia na transmissão;</a:t>
+            </a:r>
+          </a:p>
+          <a:p>
+            <a:pPr lvl="1" fontAlgn="base"/>
+            <a:endParaRPr lang="pt-BR" dirty="0"/>
+          </a:p>
+          <a:p>
+            <a:pPr lvl="1" fontAlgn="base"/>
+            <a:r>
+              <a:rPr lang="pt-BR" dirty="0"/>
+              <a:t>Latência;</a:t>
+            </a:r>
+          </a:p>
+          <a:p>
+            <a:pPr lvl="1" fontAlgn="base"/>
+            <a:endParaRPr lang="pt-BR" dirty="0"/>
+          </a:p>
+          <a:p>
+            <a:pPr lvl="1" fontAlgn="base"/>
+            <a:r>
+              <a:rPr lang="pt-BR" dirty="0"/>
+              <a:t>Questões de privacidade e confiabilidade.</a:t>
+            </a:r>
+          </a:p>
+          <a:p>
+            <a:pPr marL="0" indent="0" fontAlgn="base">
+              <a:buNone/>
+            </a:pPr>
+            <a:endParaRPr lang="pt-BR" dirty="0"/>
           </a:p>
         </p:txBody>
       </p:sp>
     </p:spTree>
     <p:extLst>
       <p:ext uri="{BB962C8B-B14F-4D97-AF65-F5344CB8AC3E}">
-        <p14:creationId xmlns:p14="http://schemas.microsoft.com/office/powerpoint/2010/main" val="1547259554"/>
+        <p14:creationId xmlns:p14="http://schemas.microsoft.com/office/powerpoint/2010/main" val="4148884338"/>
       </p:ext>
     </p:extLst>
   </p:cSld>
@@ -4794,7 +9945,7 @@
         <p:cNvPr id="1" name="">
           <a:extLst>
             <a:ext uri="{FF2B5EF4-FFF2-40B4-BE49-F238E27FC236}">
-              <a16:creationId xmlns:a16="http://schemas.microsoft.com/office/drawing/2014/main" id="{E1C9F56A-97FC-7CCD-E5BA-3B5E230AD9AB}"/>
+              <a16:creationId xmlns:a16="http://schemas.microsoft.com/office/drawing/2014/main" id="{25D7944B-3372-1D90-B28C-FB39520968C9}"/>
             </a:ext>
           </a:extLst>
         </p:cNvPr>
@@ -4814,7 +9965,7 @@
           <p:cNvPr id="2" name="Título 1">
             <a:extLst>
               <a:ext uri="{FF2B5EF4-FFF2-40B4-BE49-F238E27FC236}">
-                <a16:creationId xmlns:a16="http://schemas.microsoft.com/office/drawing/2014/main" id="{A979DAB9-0612-F0CD-7BB1-AF52B98B3210}"/>
+                <a16:creationId xmlns:a16="http://schemas.microsoft.com/office/drawing/2014/main" id="{0452B460-304F-8D6A-49E2-170E86973EFE}"/>
               </a:ext>
             </a:extLst>
           </p:cNvPr>
@@ -4825,64 +9976,151 @@
             <p:ph type="title"/>
           </p:nvPr>
         </p:nvSpPr>
+        <p:spPr>
+          <a:xfrm>
+            <a:off x="0" y="18255"/>
+            <a:ext cx="10515600" cy="1325563"/>
+          </a:xfrm>
+        </p:spPr>
+        <p:txBody>
+          <a:bodyPr/>
+          <a:lstStyle/>
+          <a:p>
+            <a:r>
+              <a:rPr lang="pt-BR" dirty="0"/>
+              <a:t>Introdução</a:t>
+            </a:r>
+          </a:p>
+        </p:txBody>
+      </p:sp>
+      <p:sp>
+        <p:nvSpPr>
+          <p:cNvPr id="3" name="Espaço Reservado para Conteúdo 2">
+            <a:extLst>
+              <a:ext uri="{FF2B5EF4-FFF2-40B4-BE49-F238E27FC236}">
+                <a16:creationId xmlns:a16="http://schemas.microsoft.com/office/drawing/2014/main" id="{A9FDF00C-07E3-57DD-2C43-753297609C4B}"/>
+              </a:ext>
+            </a:extLst>
+          </p:cNvPr>
+          <p:cNvSpPr>
+            <a:spLocks noGrp="1"/>
+          </p:cNvSpPr>
+          <p:nvPr>
+            <p:ph idx="1"/>
+          </p:nvPr>
+        </p:nvSpPr>
         <p:spPr/>
         <p:txBody>
-          <a:bodyPr/>
-          <a:lstStyle/>
-          <a:p>
-            <a:r>
-              <a:rPr lang="pt-BR" dirty="0"/>
-              <a:t>Resultados</a:t>
-            </a:r>
-          </a:p>
-        </p:txBody>
-      </p:sp>
-      <p:sp>
-        <p:nvSpPr>
-          <p:cNvPr id="3" name="Espaço Reservado para Conteúdo 2">
-            <a:extLst>
-              <a:ext uri="{FF2B5EF4-FFF2-40B4-BE49-F238E27FC236}">
-                <a16:creationId xmlns:a16="http://schemas.microsoft.com/office/drawing/2014/main" id="{F22F88A5-87D1-340F-853F-8C2ED8F8C877}"/>
-              </a:ext>
-            </a:extLst>
-          </p:cNvPr>
-          <p:cNvSpPr>
-            <a:spLocks noGrp="1"/>
-          </p:cNvSpPr>
-          <p:nvPr>
-            <p:ph idx="1"/>
-          </p:nvPr>
-        </p:nvSpPr>
-        <p:spPr/>
-        <p:txBody>
-          <a:bodyPr/>
-          <a:lstStyle/>
-          <a:p>
-            <a:pPr fontAlgn="base"/>
-            <a:r>
-              <a:rPr lang="pt-BR" dirty="0"/>
-              <a:t>Principais gráficos/tabelas</a:t>
-            </a:r>
-          </a:p>
-          <a:p>
-            <a:pPr fontAlgn="base"/>
-            <a:r>
-              <a:rPr lang="pt-BR" dirty="0"/>
-              <a:t>Comparação com estado da arte</a:t>
-            </a:r>
-          </a:p>
-          <a:p>
-            <a:pPr fontAlgn="base"/>
-            <a:r>
-              <a:rPr lang="pt-BR" dirty="0"/>
-              <a:t>O que funcionou e o que não funcionou</a:t>
-            </a:r>
-          </a:p>
-          <a:p>
-            <a:pPr fontAlgn="base"/>
-            <a:r>
-              <a:rPr lang="pt-BR" dirty="0"/>
-              <a:t>Reproduzir os resultados ou parte deles é importante.</a:t>
+          <a:bodyPr>
+            <a:normAutofit fontScale="92500" lnSpcReduction="10000"/>
+          </a:bodyPr>
+          <a:lstStyle/>
+          <a:p>
+            <a:pPr fontAlgn="base"/>
+            <a:r>
+              <a:rPr lang="pt-BR" dirty="0"/>
+              <a:t>Edge </a:t>
+            </a:r>
+            <a:r>
+              <a:rPr lang="pt-BR" dirty="0" err="1"/>
+              <a:t>Computing</a:t>
+            </a:r>
+            <a:r>
+              <a:rPr lang="pt-BR" dirty="0"/>
+              <a:t> como alternativa.</a:t>
+            </a:r>
+          </a:p>
+          <a:p>
+            <a:pPr fontAlgn="base"/>
+            <a:endParaRPr lang="pt-BR" dirty="0"/>
+          </a:p>
+          <a:p>
+            <a:pPr fontAlgn="base"/>
+            <a:r>
+              <a:rPr lang="pt-BR" dirty="0"/>
+              <a:t>Desafios:</a:t>
+            </a:r>
+          </a:p>
+          <a:p>
+            <a:pPr marL="0" indent="0" fontAlgn="base">
+              <a:buNone/>
+            </a:pPr>
+            <a:endParaRPr lang="pt-BR" dirty="0"/>
+          </a:p>
+          <a:p>
+            <a:pPr lvl="1" fontAlgn="base"/>
+            <a:r>
+              <a:rPr lang="pt-BR" dirty="0">
+                <a:solidFill>
+                  <a:srgbClr val="303030"/>
+                </a:solidFill>
+                <a:latin typeface="Google Sans Text"/>
+              </a:rPr>
+              <a:t>A</a:t>
+            </a:r>
+            <a:r>
+              <a:rPr lang="pt-BR" b="0" i="0" dirty="0">
+                <a:solidFill>
+                  <a:srgbClr val="303030"/>
+                </a:solidFill>
+                <a:effectLst/>
+                <a:latin typeface="Google Sans Text"/>
+              </a:rPr>
+              <a:t>bordagens em computação em nuvem utiliza redes neurais </a:t>
+            </a:r>
+            <a:r>
+              <a:rPr lang="pt-BR" b="0" i="0" dirty="0" err="1">
+                <a:solidFill>
+                  <a:srgbClr val="303030"/>
+                </a:solidFill>
+                <a:effectLst/>
+                <a:latin typeface="Google Sans Text"/>
+              </a:rPr>
+              <a:t>convolucionais</a:t>
+            </a:r>
+            <a:r>
+              <a:rPr lang="pt-BR" b="0" i="0" dirty="0">
+                <a:solidFill>
+                  <a:srgbClr val="303030"/>
+                </a:solidFill>
+                <a:effectLst/>
+                <a:latin typeface="Google Sans Text"/>
+              </a:rPr>
+              <a:t> profundas;</a:t>
+            </a:r>
+            <a:endParaRPr lang="pt-BR" dirty="0"/>
+          </a:p>
+          <a:p>
+            <a:pPr lvl="1" fontAlgn="base"/>
+            <a:endParaRPr lang="pt-BR" dirty="0"/>
+          </a:p>
+          <a:p>
+            <a:pPr lvl="1" fontAlgn="base"/>
+            <a:r>
+              <a:rPr lang="pt-BR" dirty="0"/>
+              <a:t>Energia (alimentação por bateria);</a:t>
+            </a:r>
+          </a:p>
+          <a:p>
+            <a:pPr lvl="1" fontAlgn="base"/>
+            <a:endParaRPr lang="pt-BR" dirty="0"/>
+          </a:p>
+          <a:p>
+            <a:pPr lvl="1" fontAlgn="base"/>
+            <a:r>
+              <a:rPr lang="pt-BR" dirty="0"/>
+              <a:t>Memória;</a:t>
+            </a:r>
+          </a:p>
+          <a:p>
+            <a:pPr lvl="1" fontAlgn="base"/>
+            <a:endParaRPr lang="pt-BR" dirty="0"/>
+          </a:p>
+          <a:p>
+            <a:pPr lvl="1" fontAlgn="base"/>
+            <a:r>
+              <a:rPr lang="pt-BR" dirty="0"/>
+              <a:t>Capacidade de processamento.</a:t>
             </a:r>
           </a:p>
         </p:txBody>
@@ -4890,7 +10128,7 @@
     </p:spTree>
     <p:extLst>
       <p:ext uri="{BB962C8B-B14F-4D97-AF65-F5344CB8AC3E}">
-        <p14:creationId xmlns:p14="http://schemas.microsoft.com/office/powerpoint/2010/main" val="3906980817"/>
+        <p14:creationId xmlns:p14="http://schemas.microsoft.com/office/powerpoint/2010/main" val="2064495763"/>
       </p:ext>
     </p:extLst>
   </p:cSld>
@@ -4908,7 +10146,7 @@
         <p:cNvPr id="1" name="">
           <a:extLst>
             <a:ext uri="{FF2B5EF4-FFF2-40B4-BE49-F238E27FC236}">
-              <a16:creationId xmlns:a16="http://schemas.microsoft.com/office/drawing/2014/main" id="{B28A9759-CA4F-DA4F-85C2-F6E51DCED2D9}"/>
+              <a16:creationId xmlns:a16="http://schemas.microsoft.com/office/drawing/2014/main" id="{25D7944B-3372-1D90-B28C-FB39520968C9}"/>
             </a:ext>
           </a:extLst>
         </p:cNvPr>
@@ -4928,7 +10166,7 @@
           <p:cNvPr id="2" name="Título 1">
             <a:extLst>
               <a:ext uri="{FF2B5EF4-FFF2-40B4-BE49-F238E27FC236}">
-                <a16:creationId xmlns:a16="http://schemas.microsoft.com/office/drawing/2014/main" id="{072F732D-34CE-6153-324F-D7F6821577F0}"/>
+                <a16:creationId xmlns:a16="http://schemas.microsoft.com/office/drawing/2014/main" id="{0452B460-304F-8D6A-49E2-170E86973EFE}"/>
               </a:ext>
             </a:extLst>
           </p:cNvPr>
@@ -4939,64 +10177,102 @@
             <p:ph type="title"/>
           </p:nvPr>
         </p:nvSpPr>
+        <p:spPr>
+          <a:xfrm>
+            <a:off x="0" y="18255"/>
+            <a:ext cx="10515600" cy="1325563"/>
+          </a:xfrm>
+        </p:spPr>
+        <p:txBody>
+          <a:bodyPr/>
+          <a:lstStyle/>
+          <a:p>
+            <a:r>
+              <a:rPr lang="pt-BR" dirty="0"/>
+              <a:t>Introdução</a:t>
+            </a:r>
+          </a:p>
+        </p:txBody>
+      </p:sp>
+      <p:sp>
+        <p:nvSpPr>
+          <p:cNvPr id="3" name="Espaço Reservado para Conteúdo 2">
+            <a:extLst>
+              <a:ext uri="{FF2B5EF4-FFF2-40B4-BE49-F238E27FC236}">
+                <a16:creationId xmlns:a16="http://schemas.microsoft.com/office/drawing/2014/main" id="{A9FDF00C-07E3-57DD-2C43-753297609C4B}"/>
+              </a:ext>
+            </a:extLst>
+          </p:cNvPr>
+          <p:cNvSpPr>
+            <a:spLocks noGrp="1"/>
+          </p:cNvSpPr>
+          <p:nvPr>
+            <p:ph idx="1"/>
+          </p:nvPr>
+        </p:nvSpPr>
         <p:spPr/>
         <p:txBody>
-          <a:bodyPr/>
-          <a:lstStyle/>
-          <a:p>
-            <a:r>
-              <a:rPr lang="pt-BR" dirty="0"/>
-              <a:t>Análise crítica do trabalho</a:t>
-            </a:r>
-          </a:p>
-        </p:txBody>
-      </p:sp>
-      <p:sp>
-        <p:nvSpPr>
-          <p:cNvPr id="3" name="Espaço Reservado para Conteúdo 2">
-            <a:extLst>
-              <a:ext uri="{FF2B5EF4-FFF2-40B4-BE49-F238E27FC236}">
-                <a16:creationId xmlns:a16="http://schemas.microsoft.com/office/drawing/2014/main" id="{62A55622-8E11-E5D7-8EAF-7AE2CCAA3321}"/>
-              </a:ext>
-            </a:extLst>
-          </p:cNvPr>
-          <p:cNvSpPr>
-            <a:spLocks noGrp="1"/>
-          </p:cNvSpPr>
-          <p:nvPr>
-            <p:ph idx="1"/>
-          </p:nvPr>
-        </p:nvSpPr>
-        <p:spPr/>
-        <p:txBody>
-          <a:bodyPr/>
-          <a:lstStyle/>
-          <a:p>
-            <a:pPr fontAlgn="base"/>
-            <a:r>
-              <a:rPr lang="pt-BR" dirty="0"/>
-              <a:t>Pontos fortes</a:t>
-            </a:r>
-          </a:p>
-          <a:p>
-            <a:pPr fontAlgn="base"/>
-            <a:r>
-              <a:rPr lang="pt-BR" dirty="0"/>
-              <a:t>Limitações</a:t>
-            </a:r>
-          </a:p>
-          <a:p>
-            <a:pPr fontAlgn="base"/>
-            <a:r>
-              <a:rPr lang="pt-BR" dirty="0"/>
-              <a:t>Possíveis melhorias</a:t>
-            </a:r>
-          </a:p>
-          <a:p>
-            <a:pPr fontAlgn="base"/>
-            <a:r>
-              <a:rPr lang="pt-BR" dirty="0"/>
-              <a:t>Aplicações práticas</a:t>
+          <a:bodyPr>
+            <a:normAutofit fontScale="92500" lnSpcReduction="10000"/>
+          </a:bodyPr>
+          <a:lstStyle/>
+          <a:p>
+            <a:pPr fontAlgn="base"/>
+            <a:r>
+              <a:rPr lang="pt-BR" dirty="0"/>
+              <a:t>Objetivo: Desenvolver um framework que permita executar redes neurais em microcontroladores de baixo consumo de forma eficiente.</a:t>
+            </a:r>
+          </a:p>
+          <a:p>
+            <a:pPr fontAlgn="base"/>
+            <a:endParaRPr lang="pt-BR" dirty="0"/>
+          </a:p>
+          <a:p>
+            <a:pPr fontAlgn="base"/>
+            <a:r>
+              <a:rPr lang="pt-BR" dirty="0"/>
+              <a:t>É possível executar redes neurais eficientes em microcontroladores de </a:t>
+            </a:r>
+            <a:r>
+              <a:rPr lang="pt-BR" dirty="0" err="1"/>
+              <a:t>ultra-baixo</a:t>
+            </a:r>
+            <a:r>
+              <a:rPr lang="pt-BR" dirty="0"/>
+              <a:t> consumo, desde que:</a:t>
+            </a:r>
+          </a:p>
+          <a:p>
+            <a:pPr fontAlgn="base"/>
+            <a:endParaRPr lang="pt-BR" dirty="0"/>
+          </a:p>
+          <a:p>
+            <a:pPr lvl="1" fontAlgn="base"/>
+            <a:r>
+              <a:rPr lang="pt-BR" dirty="0"/>
+              <a:t>os algoritmos sejam leves (MLP);</a:t>
+            </a:r>
+          </a:p>
+          <a:p>
+            <a:pPr lvl="1" fontAlgn="base"/>
+            <a:endParaRPr lang="pt-BR" dirty="0"/>
+          </a:p>
+          <a:p>
+            <a:pPr lvl="1" fontAlgn="base"/>
+            <a:r>
+              <a:rPr lang="pt-BR" dirty="0"/>
+              <a:t>o software seja otimizado para a arquitetura do hardware;</a:t>
+            </a:r>
+          </a:p>
+          <a:p>
+            <a:pPr lvl="1" fontAlgn="base"/>
+            <a:endParaRPr lang="pt-BR" dirty="0"/>
+          </a:p>
+          <a:p>
+            <a:pPr lvl="1" fontAlgn="base"/>
+            <a:r>
+              <a:rPr lang="pt-BR" dirty="0"/>
+              <a:t>sejam exploradas técnicas de paralelismo e otimização de memória.</a:t>
             </a:r>
           </a:p>
         </p:txBody>
@@ -5004,7 +10280,7 @@
     </p:spTree>
     <p:extLst>
       <p:ext uri="{BB962C8B-B14F-4D97-AF65-F5344CB8AC3E}">
-        <p14:creationId xmlns:p14="http://schemas.microsoft.com/office/powerpoint/2010/main" val="1521811257"/>
+        <p14:creationId xmlns:p14="http://schemas.microsoft.com/office/powerpoint/2010/main" val="2079153551"/>
       </p:ext>
     </p:extLst>
   </p:cSld>
@@ -5019,7 +10295,13 @@
   <p:cSld>
     <p:spTree>
       <p:nvGrpSpPr>
-        <p:cNvPr id="1" name=""/>
+        <p:cNvPr id="1" name="">
+          <a:extLst>
+            <a:ext uri="{FF2B5EF4-FFF2-40B4-BE49-F238E27FC236}">
+              <a16:creationId xmlns:a16="http://schemas.microsoft.com/office/drawing/2014/main" id="{25D7944B-3372-1D90-B28C-FB39520968C9}"/>
+            </a:ext>
+          </a:extLst>
+        </p:cNvPr>
         <p:cNvGrpSpPr/>
         <p:nvPr/>
       </p:nvGrpSpPr>
@@ -5036,7 +10318,7 @@
           <p:cNvPr id="2" name="Título 1">
             <a:extLst>
               <a:ext uri="{FF2B5EF4-FFF2-40B4-BE49-F238E27FC236}">
-                <a16:creationId xmlns:a16="http://schemas.microsoft.com/office/drawing/2014/main" id="{B9E502FC-4440-F5DA-F299-69CD15E702AE}"/>
+                <a16:creationId xmlns:a16="http://schemas.microsoft.com/office/drawing/2014/main" id="{0452B460-304F-8D6A-49E2-170E86973EFE}"/>
               </a:ext>
             </a:extLst>
           </p:cNvPr>
@@ -5047,66 +10329,228 @@
             <p:ph type="title"/>
           </p:nvPr>
         </p:nvSpPr>
+        <p:spPr>
+          <a:xfrm>
+            <a:off x="0" y="0"/>
+            <a:ext cx="10515600" cy="1325563"/>
+          </a:xfrm>
+        </p:spPr>
+        <p:txBody>
+          <a:bodyPr/>
+          <a:lstStyle/>
+          <a:p>
+            <a:r>
+              <a:rPr lang="pt-BR" dirty="0"/>
+              <a:t>Introdução</a:t>
+            </a:r>
+          </a:p>
+        </p:txBody>
+      </p:sp>
+      <p:sp>
+        <p:nvSpPr>
+          <p:cNvPr id="3" name="Espaço Reservado para Conteúdo 2">
+            <a:extLst>
+              <a:ext uri="{FF2B5EF4-FFF2-40B4-BE49-F238E27FC236}">
+                <a16:creationId xmlns:a16="http://schemas.microsoft.com/office/drawing/2014/main" id="{A9FDF00C-07E3-57DD-2C43-753297609C4B}"/>
+              </a:ext>
+            </a:extLst>
+          </p:cNvPr>
+          <p:cNvSpPr>
+            <a:spLocks noGrp="1"/>
+          </p:cNvSpPr>
+          <p:nvPr>
+            <p:ph idx="1"/>
+          </p:nvPr>
+        </p:nvSpPr>
         <p:spPr/>
         <p:txBody>
-          <a:bodyPr/>
-          <a:lstStyle/>
-          <a:p>
-            <a:r>
-              <a:rPr lang="en-US" dirty="0" err="1"/>
-              <a:t>Conclusão</a:t>
-            </a:r>
+          <a:bodyPr>
+            <a:normAutofit fontScale="70000" lnSpcReduction="20000"/>
+          </a:bodyPr>
+          <a:lstStyle/>
+          <a:p>
+            <a:pPr fontAlgn="base"/>
+            <a:r>
+              <a:rPr lang="pt-BR" dirty="0"/>
+              <a:t>Contribuições:</a:t>
+            </a:r>
+          </a:p>
+          <a:p>
+            <a:pPr fontAlgn="base"/>
             <a:endParaRPr lang="pt-BR" dirty="0"/>
           </a:p>
-        </p:txBody>
-      </p:sp>
-      <p:sp>
-        <p:nvSpPr>
-          <p:cNvPr id="3" name="Espaço Reservado para Conteúdo 2">
-            <a:extLst>
-              <a:ext uri="{FF2B5EF4-FFF2-40B4-BE49-F238E27FC236}">
-                <a16:creationId xmlns:a16="http://schemas.microsoft.com/office/drawing/2014/main" id="{69359096-6B47-BEA3-55AD-95F90CDC8489}"/>
-              </a:ext>
-            </a:extLst>
-          </p:cNvPr>
-          <p:cNvSpPr>
-            <a:spLocks noGrp="1"/>
-          </p:cNvSpPr>
-          <p:nvPr>
-            <p:ph idx="1"/>
-          </p:nvPr>
-        </p:nvSpPr>
-        <p:spPr/>
-        <p:txBody>
-          <a:bodyPr/>
-          <a:lstStyle/>
-          <a:p>
-            <a:pPr fontAlgn="base"/>
-            <a:r>
-              <a:rPr lang="pt-BR" dirty="0"/>
-              <a:t>Síntese do que foi aprendido</a:t>
-            </a:r>
-          </a:p>
-          <a:p>
-            <a:pPr fontAlgn="base"/>
-            <a:r>
-              <a:rPr lang="pt-BR" dirty="0"/>
-              <a:t>Impacto do trabalho</a:t>
-            </a:r>
-          </a:p>
-          <a:p>
-            <a:pPr fontAlgn="base"/>
-            <a:r>
-              <a:rPr lang="pt-BR" dirty="0"/>
-              <a:t>Direções futuras propostas pelos autores ou encontradas por você</a:t>
-            </a:r>
+          <a:p>
+            <a:pPr lvl="1" fontAlgn="base"/>
+            <a:r>
+              <a:rPr lang="pt-BR" i="0" dirty="0">
+                <a:solidFill>
+                  <a:srgbClr val="303030"/>
+                </a:solidFill>
+                <a:effectLst/>
+                <a:latin typeface="Google Sans Text"/>
+              </a:rPr>
+              <a:t>FANN-</a:t>
+            </a:r>
+            <a:r>
+              <a:rPr lang="pt-BR" i="0" dirty="0" err="1">
+                <a:solidFill>
+                  <a:srgbClr val="303030"/>
+                </a:solidFill>
+                <a:effectLst/>
+                <a:latin typeface="Google Sans Text"/>
+              </a:rPr>
+              <a:t>on</a:t>
+            </a:r>
+            <a:r>
+              <a:rPr lang="pt-BR" i="0" dirty="0">
+                <a:solidFill>
+                  <a:srgbClr val="303030"/>
+                </a:solidFill>
+                <a:effectLst/>
+                <a:latin typeface="Google Sans Text"/>
+              </a:rPr>
+              <a:t>-MCU para processadores ARM e RISC-V;</a:t>
+            </a:r>
+          </a:p>
+          <a:p>
+            <a:pPr lvl="1" fontAlgn="base"/>
+            <a:endParaRPr lang="pt-BR" dirty="0">
+              <a:solidFill>
+                <a:srgbClr val="303030"/>
+              </a:solidFill>
+              <a:latin typeface="Google Sans Text"/>
+            </a:endParaRPr>
+          </a:p>
+          <a:p>
+            <a:pPr lvl="1" fontAlgn="base"/>
+            <a:r>
+              <a:rPr lang="pt-BR" i="0" dirty="0">
+                <a:solidFill>
+                  <a:srgbClr val="303030"/>
+                </a:solidFill>
+                <a:effectLst/>
+                <a:latin typeface="Google Sans Text"/>
+              </a:rPr>
+              <a:t>Comparações de desempenho e uso de memória;</a:t>
+            </a:r>
+          </a:p>
+          <a:p>
+            <a:pPr lvl="1" fontAlgn="base"/>
+            <a:endParaRPr lang="pt-BR" dirty="0">
+              <a:solidFill>
+                <a:srgbClr val="303030"/>
+              </a:solidFill>
+              <a:latin typeface="Google Sans Text"/>
+            </a:endParaRPr>
+          </a:p>
+          <a:p>
+            <a:pPr lvl="1" fontAlgn="base"/>
+            <a:r>
+              <a:rPr lang="pt-BR" i="0" dirty="0">
+                <a:solidFill>
+                  <a:srgbClr val="303030"/>
+                </a:solidFill>
+                <a:effectLst/>
+                <a:latin typeface="Google Sans Text"/>
+              </a:rPr>
+              <a:t>Otimizações para diferentes tamanhos de rede e hierarquias de memória;</a:t>
+            </a:r>
+          </a:p>
+          <a:p>
+            <a:pPr lvl="1" fontAlgn="base"/>
+            <a:endParaRPr lang="pt-BR" dirty="0">
+              <a:solidFill>
+                <a:srgbClr val="303030"/>
+              </a:solidFill>
+              <a:latin typeface="Google Sans Text"/>
+            </a:endParaRPr>
+          </a:p>
+          <a:p>
+            <a:pPr lvl="1" fontAlgn="base"/>
+            <a:r>
+              <a:rPr lang="pt-BR" i="0" dirty="0">
+                <a:solidFill>
+                  <a:srgbClr val="303030"/>
+                </a:solidFill>
+                <a:effectLst/>
+                <a:latin typeface="Google Sans Text"/>
+              </a:rPr>
+              <a:t>Análise detalhada de ganhos e perdas por paralelização;</a:t>
+            </a:r>
+          </a:p>
+          <a:p>
+            <a:pPr lvl="1" fontAlgn="base"/>
+            <a:endParaRPr lang="pt-BR" dirty="0">
+              <a:solidFill>
+                <a:srgbClr val="303030"/>
+              </a:solidFill>
+              <a:latin typeface="Google Sans Text"/>
+            </a:endParaRPr>
+          </a:p>
+          <a:p>
+            <a:pPr lvl="1" fontAlgn="base"/>
+            <a:r>
+              <a:rPr lang="pt-BR" i="0" dirty="0">
+                <a:solidFill>
+                  <a:srgbClr val="303030"/>
+                </a:solidFill>
+                <a:effectLst/>
+                <a:latin typeface="Google Sans Text"/>
+              </a:rPr>
+              <a:t>Implementação em cenários reais, como reconhecimento de gestos, detecção de quedas e classificação de atividades humanas;</a:t>
+            </a:r>
+          </a:p>
+          <a:p>
+            <a:pPr lvl="1" fontAlgn="base"/>
+            <a:endParaRPr lang="pt-BR" dirty="0">
+              <a:solidFill>
+                <a:srgbClr val="303030"/>
+              </a:solidFill>
+              <a:latin typeface="Google Sans Text"/>
+            </a:endParaRPr>
+          </a:p>
+          <a:p>
+            <a:pPr lvl="1" fontAlgn="base"/>
+            <a:r>
+              <a:rPr lang="pt-BR" i="0" dirty="0">
+                <a:solidFill>
+                  <a:srgbClr val="303030"/>
+                </a:solidFill>
+                <a:effectLst/>
+                <a:latin typeface="Google Sans Text"/>
+              </a:rPr>
+              <a:t>Resultados experimentais com medições de campo;</a:t>
+            </a:r>
+          </a:p>
+          <a:p>
+            <a:pPr lvl="1" fontAlgn="base"/>
+            <a:endParaRPr lang="pt-BR" dirty="0">
+              <a:solidFill>
+                <a:srgbClr val="303030"/>
+              </a:solidFill>
+              <a:latin typeface="Google Sans Text"/>
+            </a:endParaRPr>
+          </a:p>
+          <a:p>
+            <a:pPr lvl="1" fontAlgn="base"/>
+            <a:r>
+              <a:rPr lang="pt-BR" i="0" dirty="0">
+                <a:solidFill>
+                  <a:srgbClr val="303030"/>
+                </a:solidFill>
+                <a:effectLst/>
+                <a:latin typeface="Google Sans Text"/>
+              </a:rPr>
+              <a:t>Lançamento do kit de ferramentas como software de código aberto.</a:t>
+            </a:r>
+            <a:endParaRPr lang="pt-BR" dirty="0"/>
           </a:p>
         </p:txBody>
       </p:sp>
     </p:spTree>
     <p:extLst>
       <p:ext uri="{BB962C8B-B14F-4D97-AF65-F5344CB8AC3E}">
-        <p14:creationId xmlns:p14="http://schemas.microsoft.com/office/powerpoint/2010/main" val="1532530965"/>
+        <p14:creationId xmlns:p14="http://schemas.microsoft.com/office/powerpoint/2010/main" val="2982830720"/>
       </p:ext>
     </p:extLst>
   </p:cSld>
@@ -5135,64 +10579,217 @@
       </p:grpSpPr>
       <p:sp>
         <p:nvSpPr>
-          <p:cNvPr id="4" name="Título 1">
-            <a:extLst>
-              <a:ext uri="{FF2B5EF4-FFF2-40B4-BE49-F238E27FC236}">
-                <a16:creationId xmlns:a16="http://schemas.microsoft.com/office/drawing/2014/main" id="{32666AC8-2E17-4DB4-B0F5-60C640CCFD2E}"/>
-              </a:ext>
-            </a:extLst>
-          </p:cNvPr>
-          <p:cNvSpPr txBox="1">
-            <a:spLocks/>
-          </p:cNvSpPr>
-          <p:nvPr/>
+          <p:cNvPr id="2" name="Título 1">
+            <a:extLst>
+              <a:ext uri="{FF2B5EF4-FFF2-40B4-BE49-F238E27FC236}">
+                <a16:creationId xmlns:a16="http://schemas.microsoft.com/office/drawing/2014/main" id="{94AB8438-E56E-2412-517C-8456E4CA773C}"/>
+              </a:ext>
+            </a:extLst>
+          </p:cNvPr>
+          <p:cNvSpPr>
+            <a:spLocks noGrp="1"/>
+          </p:cNvSpPr>
+          <p:nvPr>
+            <p:ph type="title"/>
+          </p:nvPr>
         </p:nvSpPr>
         <p:spPr>
           <a:xfrm>
-            <a:off x="1431533" y="2720526"/>
-            <a:ext cx="9144000" cy="1029541"/>
+            <a:off x="838199" y="365125"/>
+            <a:ext cx="11198629" cy="1325563"/>
+          </a:xfrm>
+        </p:spPr>
+        <p:txBody>
+          <a:bodyPr>
+            <a:normAutofit/>
+          </a:bodyPr>
+          <a:lstStyle/>
+          <a:p>
+            <a:r>
+              <a:rPr lang="pt-BR" dirty="0"/>
+              <a:t>Fundamentação teórica - </a:t>
+            </a:r>
+            <a:r>
+              <a:rPr lang="pt-BR" dirty="0" err="1"/>
+              <a:t>Multilayer</a:t>
+            </a:r>
+            <a:r>
+              <a:rPr lang="pt-BR" dirty="0"/>
+              <a:t> </a:t>
+            </a:r>
+            <a:r>
+              <a:rPr lang="pt-BR" dirty="0" err="1"/>
+              <a:t>Perceptron</a:t>
+            </a:r>
+            <a:r>
+              <a:rPr lang="pt-BR" dirty="0"/>
+              <a:t> </a:t>
+            </a:r>
+          </a:p>
+        </p:txBody>
+      </p:sp>
+      <p:sp>
+        <p:nvSpPr>
+          <p:cNvPr id="3" name="Espaço Reservado para Conteúdo 2">
+            <a:extLst>
+              <a:ext uri="{FF2B5EF4-FFF2-40B4-BE49-F238E27FC236}">
+                <a16:creationId xmlns:a16="http://schemas.microsoft.com/office/drawing/2014/main" id="{F7E2B09C-6D56-4C9F-A364-B904CCE2F1A0}"/>
+              </a:ext>
+            </a:extLst>
+          </p:cNvPr>
+          <p:cNvSpPr>
+            <a:spLocks noGrp="1"/>
+          </p:cNvSpPr>
+          <p:nvPr>
+            <p:ph idx="1"/>
+          </p:nvPr>
+        </p:nvSpPr>
+        <p:spPr>
+          <a:xfrm>
+            <a:off x="838200" y="1842251"/>
+            <a:ext cx="5953298" cy="4351338"/>
+          </a:xfrm>
+        </p:spPr>
+        <p:txBody>
+          <a:bodyPr/>
+          <a:lstStyle/>
+          <a:p>
+            <a:pPr fontAlgn="base"/>
+            <a:r>
+              <a:rPr lang="pt-BR" dirty="0">
+                <a:solidFill>
+                  <a:srgbClr val="303030"/>
+                </a:solidFill>
+                <a:latin typeface="Google Sans Text"/>
+              </a:rPr>
+              <a:t>E</a:t>
+            </a:r>
+            <a:r>
+              <a:rPr lang="pt-BR" b="0" i="0" dirty="0">
+                <a:solidFill>
+                  <a:srgbClr val="303030"/>
+                </a:solidFill>
+                <a:effectLst/>
+                <a:latin typeface="Google Sans Text"/>
+              </a:rPr>
+              <a:t>specificado pelo número de camadas ocultas, o número de nós em cada camada e quais não linearidades são usadas</a:t>
+            </a:r>
+          </a:p>
+          <a:p>
+            <a:pPr marL="0" indent="0" fontAlgn="base">
+              <a:buNone/>
+            </a:pPr>
+            <a:endParaRPr lang="pt-BR" dirty="0"/>
+          </a:p>
+          <a:p>
+            <a:pPr fontAlgn="base"/>
+            <a:r>
+              <a:rPr lang="pt-BR" dirty="0">
+                <a:solidFill>
+                  <a:srgbClr val="303030"/>
+                </a:solidFill>
+                <a:latin typeface="Google Sans Text"/>
+              </a:rPr>
+              <a:t>M</a:t>
+            </a:r>
+            <a:r>
+              <a:rPr lang="pt-BR" b="0" i="0" dirty="0">
+                <a:solidFill>
+                  <a:srgbClr val="303030"/>
+                </a:solidFill>
+                <a:effectLst/>
+                <a:latin typeface="Google Sans Text"/>
+              </a:rPr>
+              <a:t>enos exigentes do que as redes </a:t>
+            </a:r>
+            <a:r>
+              <a:rPr lang="pt-BR" b="0" i="0" dirty="0" err="1">
+                <a:solidFill>
+                  <a:srgbClr val="303030"/>
+                </a:solidFill>
+                <a:effectLst/>
+                <a:latin typeface="Google Sans Text"/>
+              </a:rPr>
+              <a:t>convolucionais</a:t>
+            </a:r>
+            <a:r>
+              <a:rPr lang="pt-BR" b="0" i="0" dirty="0">
+                <a:solidFill>
+                  <a:srgbClr val="303030"/>
+                </a:solidFill>
+                <a:effectLst/>
+                <a:latin typeface="Google Sans Text"/>
+              </a:rPr>
+              <a:t> profundas em termos de requisitos de memória e computação</a:t>
+            </a:r>
+            <a:endParaRPr lang="pt-BR" dirty="0"/>
+          </a:p>
+        </p:txBody>
+      </p:sp>
+      <p:pic>
+        <p:nvPicPr>
+          <p:cNvPr id="5" name="Imagem 4">
+            <a:extLst>
+              <a:ext uri="{FF2B5EF4-FFF2-40B4-BE49-F238E27FC236}">
+                <a16:creationId xmlns:a16="http://schemas.microsoft.com/office/drawing/2014/main" id="{9382ADA0-FE8E-DA5E-7F0F-652B0C78D079}"/>
+              </a:ext>
+            </a:extLst>
+          </p:cNvPr>
+          <p:cNvPicPr>
+            <a:picLocks noChangeAspect="1"/>
+          </p:cNvPicPr>
+          <p:nvPr/>
+        </p:nvPicPr>
+        <p:blipFill>
+          <a:blip r:embed="rId2"/>
+          <a:stretch>
+            <a:fillRect/>
+          </a:stretch>
+        </p:blipFill>
+        <p:spPr>
+          <a:xfrm>
+            <a:off x="7068844" y="2197620"/>
+            <a:ext cx="4806142" cy="1937169"/>
           </a:xfrm>
           <a:prstGeom prst="rect">
             <a:avLst/>
           </a:prstGeom>
         </p:spPr>
-        <p:txBody>
-          <a:bodyPr vert="horz" lIns="91440" tIns="45720" rIns="91440" bIns="45720" rtlCol="0" anchor="ctr">
-            <a:normAutofit/>
-          </a:bodyPr>
-          <a:lstStyle>
-            <a:lvl1pPr algn="l" defTabSz="914400" rtl="0" eaLnBrk="1" latinLnBrk="0" hangingPunct="1">
-              <a:lnSpc>
-                <a:spcPct val="90000"/>
-              </a:lnSpc>
-              <a:spcBef>
-                <a:spcPct val="0"/>
-              </a:spcBef>
-              <a:buNone/>
-              <a:defRPr sz="4400" kern="1200">
-                <a:solidFill>
-                  <a:schemeClr val="tx1"/>
-                </a:solidFill>
-                <a:latin typeface="+mj-lt"/>
-                <a:ea typeface="+mj-ea"/>
-                <a:cs typeface="+mj-cs"/>
-              </a:defRPr>
-            </a:lvl1pPr>
-          </a:lstStyle>
-          <a:p>
-            <a:pPr algn="ctr"/>
-            <a:r>
-              <a:rPr lang="pt-BR" sz="6600" dirty="0"/>
-              <a:t>Perguntas?</a:t>
-            </a:r>
-            <a:endParaRPr lang="pt-BR" sz="6600" b="1" i="1" dirty="0"/>
-          </a:p>
-        </p:txBody>
-      </p:sp>
+      </p:pic>
+      <p:pic>
+        <p:nvPicPr>
+          <p:cNvPr id="9" name="Imagem 8">
+            <a:extLst>
+              <a:ext uri="{FF2B5EF4-FFF2-40B4-BE49-F238E27FC236}">
+                <a16:creationId xmlns:a16="http://schemas.microsoft.com/office/drawing/2014/main" id="{A6958E0C-555F-3AE3-59A7-71388527386B}"/>
+              </a:ext>
+            </a:extLst>
+          </p:cNvPr>
+          <p:cNvPicPr>
+            <a:picLocks noChangeAspect="1"/>
+          </p:cNvPicPr>
+          <p:nvPr/>
+        </p:nvPicPr>
+        <p:blipFill>
+          <a:blip r:embed="rId3"/>
+          <a:stretch>
+            <a:fillRect/>
+          </a:stretch>
+        </p:blipFill>
+        <p:spPr>
+          <a:xfrm>
+            <a:off x="7448203" y="4641721"/>
+            <a:ext cx="3547344" cy="933070"/>
+          </a:xfrm>
+          <a:prstGeom prst="rect">
+            <a:avLst/>
+          </a:prstGeom>
+        </p:spPr>
+      </p:pic>
     </p:spTree>
     <p:extLst>
       <p:ext uri="{BB962C8B-B14F-4D97-AF65-F5344CB8AC3E}">
-        <p14:creationId xmlns:p14="http://schemas.microsoft.com/office/powerpoint/2010/main" val="3773005660"/>
+        <p14:creationId xmlns:p14="http://schemas.microsoft.com/office/powerpoint/2010/main" val="3187071590"/>
       </p:ext>
     </p:extLst>
   </p:cSld>
